--- a/exports/pptx/lessons/middle-module-09-subtraction-nikhilam/day-01-hook.pptx
+++ b/exports/pptx/lessons/middle-module-09-subtraction-nikhilam/day-01-hook.pptx
@@ -6670,8 +6670,56 @@
         </p:nvSpPr>
         <p:spPr>
           <a:xfrm>
-            <a:off x="634901" y="4671268"/>
-            <a:ext cx="8102798" cy="281880"/>
+            <a:off x="406301" y="3230463"/>
+            <a:ext cx="8498026" cy="213271"/>
+          </a:xfrm>
+          <a:prstGeom prst="rect">
+            <a:avLst/>
+          </a:prstGeom>
+          <a:noFill/>
+          <a:ln/>
+        </p:spPr>
+        <p:txBody>
+          <a:bodyPr wrap="square" lIns="0" tIns="0" rIns="0" bIns="0" rtlCol="0" anchor="t"/>
+          <a:lstStyle/>
+          <a:p>
+            <a:pPr algn="l" indent="0" marL="0">
+              <a:lnSpc>
+                <a:spcPts val="1680"/>
+              </a:lnSpc>
+              <a:spcBef>
+                <a:spcPts val="300"/>
+              </a:spcBef>
+              <a:spcAft>
+                <a:spcPts val="300"/>
+              </a:spcAft>
+              <a:buNone/>
+            </a:pPr>
+            <a:r>
+              <a:rPr lang="en-US" sz="1200" i="1" dirty="0">
+                <a:solidFill>
+                  <a:srgbClr val="1C2833"/>
+                </a:solidFill>
+                <a:latin typeface="Arial" pitchFamily="34" charset="0"/>
+                <a:ea typeface="Arial" pitchFamily="34" charset="-122"/>
+                <a:cs typeface="Arial" pitchFamily="34" charset="-120"/>
+              </a:rPr>
+              <a:t>Each row: Step · Apply rule · Get.</a:t>
+            </a:r>
+            <a:endParaRPr lang="en-US" sz="1200" dirty="0"/>
+          </a:p>
+        </p:txBody>
+      </p:sp>
+      <p:sp>
+        <p:nvSpPr>
+          <p:cNvPr id="13" name="Text 11"/>
+          <p:cNvSpPr/>
+          <p:nvPr/>
+        </p:nvSpPr>
+        <p:spPr>
+          <a:xfrm>
+            <a:off x="634901" y="3532584"/>
+            <a:ext cx="8102798" cy="1013222"/>
           </a:xfrm>
           <a:prstGeom prst="rect">
             <a:avLst/>
@@ -6694,6 +6742,26 @@
               <a:buChar char="•"/>
             </a:pPr>
             <a:r>
+              <a:rPr lang="en-US" sz="1200" b="1" dirty="0">
+                <a:solidFill>
+                  <a:srgbClr val="1C2833"/>
+                </a:solidFill>
+                <a:latin typeface="Arial" pitchFamily="34" charset="0"/>
+                <a:ea typeface="Arial" pitchFamily="34" charset="-122"/>
+                <a:cs typeface="Arial" pitchFamily="34" charset="-120"/>
+              </a:rPr>
+              <a:t>First digit (4):</a:t>
+            </a:r>
+            <a:pPr algn="l" indent="0" marL="0">
+              <a:lnSpc>
+                <a:spcPts val="1620"/>
+              </a:lnSpc>
+              <a:spcAft>
+                <a:spcPts val="300"/>
+              </a:spcAft>
+              <a:buNone/>
+            </a:pPr>
+            <a:r>
               <a:rPr lang="en-US" sz="1200" dirty="0">
                 <a:solidFill>
                   <a:srgbClr val="1C2833"/>
@@ -6702,7 +6770,7 @@
                 <a:ea typeface="Arial" pitchFamily="34" charset="-122"/>
                 <a:cs typeface="Arial" pitchFamily="34" charset="-120"/>
               </a:rPr>
-              <a:t>Read the answer top-to-bottom: </a:t>
+              <a:t> — "from 9" · 9 − 4 = </a:t>
             </a:r>
             <a:pPr algn="l" indent="0" marL="0">
               <a:lnSpc>
@@ -6722,52 +6790,10 @@
                 <a:ea typeface="Arial" pitchFamily="34" charset="-122"/>
                 <a:cs typeface="Arial" pitchFamily="34" charset="-120"/>
               </a:rPr>
-              <a:t>5433</a:t>
-            </a:r>
-            <a:pPr algn="l" indent="0" marL="0">
-              <a:lnSpc>
-                <a:spcPts val="1620"/>
-              </a:lnSpc>
-              <a:spcAft>
-                <a:spcPts val="300"/>
-              </a:spcAft>
-              <a:buNone/>
-            </a:pPr>
-            <a:r>
-              <a:rPr lang="en-US" sz="1200" dirty="0">
-                <a:solidFill>
-                  <a:srgbClr val="1C2833"/>
-                </a:solidFill>
-                <a:latin typeface="Arial" pitchFamily="34" charset="0"/>
-                <a:ea typeface="Arial" pitchFamily="34" charset="-122"/>
-                <a:cs typeface="Arial" pitchFamily="34" charset="-120"/>
-              </a:rPr>
-              <a:t>.</a:t>
+              <a:t>5</a:t>
             </a:r>
             <a:endParaRPr lang="en-US" sz="1200" dirty="0"/>
           </a:p>
-        </p:txBody>
-      </p:sp>
-      <p:sp>
-        <p:nvSpPr>
-          <p:cNvPr id="13" name="Text 11"/>
-          <p:cNvSpPr/>
-          <p:nvPr/>
-        </p:nvSpPr>
-        <p:spPr>
-          <a:xfrm>
-            <a:off x="634901" y="5054650"/>
-            <a:ext cx="8102798" cy="281880"/>
-          </a:xfrm>
-          <a:prstGeom prst="rect">
-            <a:avLst/>
-          </a:prstGeom>
-          <a:noFill/>
-          <a:ln/>
-        </p:spPr>
-        <p:txBody>
-          <a:bodyPr wrap="square" lIns="0" tIns="0" rIns="0" bIns="0" rtlCol="0" anchor="t"/>
-          <a:lstStyle/>
           <a:p>
             <a:pPr algn="l" marL="342900" indent="-342900">
               <a:lnSpc>
@@ -6788,7 +6814,7 @@
                 <a:ea typeface="Arial" pitchFamily="34" charset="-122"/>
                 <a:cs typeface="Arial" pitchFamily="34" charset="-120"/>
               </a:rPr>
-              <a:t>Verify</a:t>
+              <a:t>Second digit (5):</a:t>
             </a:r>
             <a:pPr algn="l" indent="0" marL="0">
               <a:lnSpc>
@@ -6808,32 +6834,30 @@
                 <a:ea typeface="Arial" pitchFamily="34" charset="-122"/>
                 <a:cs typeface="Arial" pitchFamily="34" charset="-120"/>
               </a:rPr>
-              <a:t> (with the class): 4567 + 5433 = 10 000. ✓</a:t>
+              <a:t> — "from 9" · 9 − 5 = </a:t>
+            </a:r>
+            <a:pPr algn="l" indent="0" marL="0">
+              <a:lnSpc>
+                <a:spcPts val="1620"/>
+              </a:lnSpc>
+              <a:spcAft>
+                <a:spcPts val="300"/>
+              </a:spcAft>
+              <a:buNone/>
+            </a:pPr>
+            <a:r>
+              <a:rPr lang="en-US" sz="1200" b="1" dirty="0">
+                <a:solidFill>
+                  <a:srgbClr val="1C2833"/>
+                </a:solidFill>
+                <a:latin typeface="Arial" pitchFamily="34" charset="0"/>
+                <a:ea typeface="Arial" pitchFamily="34" charset="-122"/>
+                <a:cs typeface="Arial" pitchFamily="34" charset="-120"/>
+              </a:rPr>
+              <a:t>4</a:t>
             </a:r>
             <a:endParaRPr lang="en-US" sz="1200" dirty="0"/>
           </a:p>
-        </p:txBody>
-      </p:sp>
-      <p:sp>
-        <p:nvSpPr>
-          <p:cNvPr id="14" name="Text 12"/>
-          <p:cNvSpPr/>
-          <p:nvPr/>
-        </p:nvSpPr>
-        <p:spPr>
-          <a:xfrm>
-            <a:off x="634901" y="5438031"/>
-            <a:ext cx="8102798" cy="487561"/>
-          </a:xfrm>
-          <a:prstGeom prst="rect">
-            <a:avLst/>
-          </a:prstGeom>
-          <a:noFill/>
-          <a:ln/>
-        </p:spPr>
-        <p:txBody>
-          <a:bodyPr wrap="square" lIns="0" tIns="0" rIns="0" bIns="0" rtlCol="0" anchor="t"/>
-          <a:lstStyle/>
           <a:p>
             <a:pPr algn="l" marL="342900" indent="-342900">
               <a:lnSpc>
@@ -6846,6 +6870,308 @@
               <a:buChar char="•"/>
             </a:pPr>
             <a:r>
+              <a:rPr lang="en-US" sz="1200" b="1" dirty="0">
+                <a:solidFill>
+                  <a:srgbClr val="1C2833"/>
+                </a:solidFill>
+                <a:latin typeface="Arial" pitchFamily="34" charset="0"/>
+                <a:ea typeface="Arial" pitchFamily="34" charset="-122"/>
+                <a:cs typeface="Arial" pitchFamily="34" charset="-120"/>
+              </a:rPr>
+              <a:t>Third digit (6):</a:t>
+            </a:r>
+            <a:pPr algn="l" indent="0" marL="0">
+              <a:lnSpc>
+                <a:spcPts val="1620"/>
+              </a:lnSpc>
+              <a:spcAft>
+                <a:spcPts val="300"/>
+              </a:spcAft>
+              <a:buNone/>
+            </a:pPr>
+            <a:r>
+              <a:rPr lang="en-US" sz="1200" dirty="0">
+                <a:solidFill>
+                  <a:srgbClr val="1C2833"/>
+                </a:solidFill>
+                <a:latin typeface="Arial" pitchFamily="34" charset="0"/>
+                <a:ea typeface="Arial" pitchFamily="34" charset="-122"/>
+                <a:cs typeface="Arial" pitchFamily="34" charset="-120"/>
+              </a:rPr>
+              <a:t> — "from 9" · 9 − 6 = </a:t>
+            </a:r>
+            <a:pPr algn="l" indent="0" marL="0">
+              <a:lnSpc>
+                <a:spcPts val="1620"/>
+              </a:lnSpc>
+              <a:spcAft>
+                <a:spcPts val="300"/>
+              </a:spcAft>
+              <a:buNone/>
+            </a:pPr>
+            <a:r>
+              <a:rPr lang="en-US" sz="1200" b="1" dirty="0">
+                <a:solidFill>
+                  <a:srgbClr val="1C2833"/>
+                </a:solidFill>
+                <a:latin typeface="Arial" pitchFamily="34" charset="0"/>
+                <a:ea typeface="Arial" pitchFamily="34" charset="-122"/>
+                <a:cs typeface="Arial" pitchFamily="34" charset="-120"/>
+              </a:rPr>
+              <a:t>3</a:t>
+            </a:r>
+            <a:endParaRPr lang="en-US" sz="1200" dirty="0"/>
+          </a:p>
+          <a:p>
+            <a:pPr algn="l" marL="342900" indent="-342900">
+              <a:lnSpc>
+                <a:spcPts val="1620"/>
+              </a:lnSpc>
+              <a:spcAft>
+                <a:spcPts val="300"/>
+              </a:spcAft>
+              <a:buSzPct val="100000"/>
+              <a:buChar char="•"/>
+            </a:pPr>
+            <a:r>
+              <a:rPr lang="en-US" sz="1200" b="1" dirty="0">
+                <a:solidFill>
+                  <a:srgbClr val="1C2833"/>
+                </a:solidFill>
+                <a:latin typeface="Arial" pitchFamily="34" charset="0"/>
+                <a:ea typeface="Arial" pitchFamily="34" charset="-122"/>
+                <a:cs typeface="Arial" pitchFamily="34" charset="-120"/>
+              </a:rPr>
+              <a:t>Last digit (7):</a:t>
+            </a:r>
+            <a:pPr algn="l" indent="0" marL="0">
+              <a:lnSpc>
+                <a:spcPts val="1620"/>
+              </a:lnSpc>
+              <a:spcAft>
+                <a:spcPts val="300"/>
+              </a:spcAft>
+              <a:buNone/>
+            </a:pPr>
+            <a:r>
+              <a:rPr lang="en-US" sz="1200" dirty="0">
+                <a:solidFill>
+                  <a:srgbClr val="1C2833"/>
+                </a:solidFill>
+                <a:latin typeface="Arial" pitchFamily="34" charset="0"/>
+                <a:ea typeface="Arial" pitchFamily="34" charset="-122"/>
+                <a:cs typeface="Arial" pitchFamily="34" charset="-120"/>
+              </a:rPr>
+              <a:t> — "from 10" · 10 − 7 = </a:t>
+            </a:r>
+            <a:pPr algn="l" indent="0" marL="0">
+              <a:lnSpc>
+                <a:spcPts val="1620"/>
+              </a:lnSpc>
+              <a:spcAft>
+                <a:spcPts val="300"/>
+              </a:spcAft>
+              <a:buNone/>
+            </a:pPr>
+            <a:r>
+              <a:rPr lang="en-US" sz="1200" b="1" dirty="0">
+                <a:solidFill>
+                  <a:srgbClr val="1C2833"/>
+                </a:solidFill>
+                <a:latin typeface="Arial" pitchFamily="34" charset="0"/>
+                <a:ea typeface="Arial" pitchFamily="34" charset="-122"/>
+                <a:cs typeface="Arial" pitchFamily="34" charset="-120"/>
+              </a:rPr>
+              <a:t>3</a:t>
+            </a:r>
+            <a:endParaRPr lang="en-US" sz="1200" dirty="0"/>
+          </a:p>
+        </p:txBody>
+      </p:sp>
+      <p:sp>
+        <p:nvSpPr>
+          <p:cNvPr id="14" name="Text 12"/>
+          <p:cNvSpPr/>
+          <p:nvPr/>
+        </p:nvSpPr>
+        <p:spPr>
+          <a:xfrm>
+            <a:off x="634901" y="4647307"/>
+            <a:ext cx="8102798" cy="281880"/>
+          </a:xfrm>
+          <a:prstGeom prst="rect">
+            <a:avLst/>
+          </a:prstGeom>
+          <a:noFill/>
+          <a:ln/>
+        </p:spPr>
+        <p:txBody>
+          <a:bodyPr wrap="square" lIns="0" tIns="0" rIns="0" bIns="0" rtlCol="0" anchor="t"/>
+          <a:lstStyle/>
+          <a:p>
+            <a:pPr algn="l" marL="342900" indent="-342900">
+              <a:lnSpc>
+                <a:spcPts val="1620"/>
+              </a:lnSpc>
+              <a:spcAft>
+                <a:spcPts val="300"/>
+              </a:spcAft>
+              <a:buSzPct val="100000"/>
+              <a:buChar char="•"/>
+            </a:pPr>
+            <a:r>
+              <a:rPr lang="en-US" sz="1200" dirty="0">
+                <a:solidFill>
+                  <a:srgbClr val="1C2833"/>
+                </a:solidFill>
+                <a:latin typeface="Arial" pitchFamily="34" charset="0"/>
+                <a:ea typeface="Arial" pitchFamily="34" charset="-122"/>
+                <a:cs typeface="Arial" pitchFamily="34" charset="-120"/>
+              </a:rPr>
+              <a:t>Read the answer top-to-bottom: </a:t>
+            </a:r>
+            <a:pPr algn="l" indent="0" marL="0">
+              <a:lnSpc>
+                <a:spcPts val="1620"/>
+              </a:lnSpc>
+              <a:spcAft>
+                <a:spcPts val="300"/>
+              </a:spcAft>
+              <a:buNone/>
+            </a:pPr>
+            <a:r>
+              <a:rPr lang="en-US" sz="1200" b="1" dirty="0">
+                <a:solidFill>
+                  <a:srgbClr val="1C2833"/>
+                </a:solidFill>
+                <a:latin typeface="Arial" pitchFamily="34" charset="0"/>
+                <a:ea typeface="Arial" pitchFamily="34" charset="-122"/>
+                <a:cs typeface="Arial" pitchFamily="34" charset="-120"/>
+              </a:rPr>
+              <a:t>5433</a:t>
+            </a:r>
+            <a:pPr algn="l" indent="0" marL="0">
+              <a:lnSpc>
+                <a:spcPts val="1620"/>
+              </a:lnSpc>
+              <a:spcAft>
+                <a:spcPts val="300"/>
+              </a:spcAft>
+              <a:buNone/>
+            </a:pPr>
+            <a:r>
+              <a:rPr lang="en-US" sz="1200" dirty="0">
+                <a:solidFill>
+                  <a:srgbClr val="1C2833"/>
+                </a:solidFill>
+                <a:latin typeface="Arial" pitchFamily="34" charset="0"/>
+                <a:ea typeface="Arial" pitchFamily="34" charset="-122"/>
+                <a:cs typeface="Arial" pitchFamily="34" charset="-120"/>
+              </a:rPr>
+              <a:t>.</a:t>
+            </a:r>
+            <a:endParaRPr lang="en-US" sz="1200" dirty="0"/>
+          </a:p>
+        </p:txBody>
+      </p:sp>
+      <p:sp>
+        <p:nvSpPr>
+          <p:cNvPr id="15" name="Text 13"/>
+          <p:cNvSpPr/>
+          <p:nvPr/>
+        </p:nvSpPr>
+        <p:spPr>
+          <a:xfrm>
+            <a:off x="634901" y="5030688"/>
+            <a:ext cx="8102798" cy="281880"/>
+          </a:xfrm>
+          <a:prstGeom prst="rect">
+            <a:avLst/>
+          </a:prstGeom>
+          <a:noFill/>
+          <a:ln/>
+        </p:spPr>
+        <p:txBody>
+          <a:bodyPr wrap="square" lIns="0" tIns="0" rIns="0" bIns="0" rtlCol="0" anchor="t"/>
+          <a:lstStyle/>
+          <a:p>
+            <a:pPr algn="l" marL="342900" indent="-342900">
+              <a:lnSpc>
+                <a:spcPts val="1620"/>
+              </a:lnSpc>
+              <a:spcAft>
+                <a:spcPts val="300"/>
+              </a:spcAft>
+              <a:buSzPct val="100000"/>
+              <a:buChar char="•"/>
+            </a:pPr>
+            <a:r>
+              <a:rPr lang="en-US" sz="1200" b="1" dirty="0">
+                <a:solidFill>
+                  <a:srgbClr val="1C2833"/>
+                </a:solidFill>
+                <a:latin typeface="Arial" pitchFamily="34" charset="0"/>
+                <a:ea typeface="Arial" pitchFamily="34" charset="-122"/>
+                <a:cs typeface="Arial" pitchFamily="34" charset="-120"/>
+              </a:rPr>
+              <a:t>Verify</a:t>
+            </a:r>
+            <a:pPr algn="l" indent="0" marL="0">
+              <a:lnSpc>
+                <a:spcPts val="1620"/>
+              </a:lnSpc>
+              <a:spcAft>
+                <a:spcPts val="300"/>
+              </a:spcAft>
+              <a:buNone/>
+            </a:pPr>
+            <a:r>
+              <a:rPr lang="en-US" sz="1200" dirty="0">
+                <a:solidFill>
+                  <a:srgbClr val="1C2833"/>
+                </a:solidFill>
+                <a:latin typeface="Arial" pitchFamily="34" charset="0"/>
+                <a:ea typeface="Arial" pitchFamily="34" charset="-122"/>
+                <a:cs typeface="Arial" pitchFamily="34" charset="-120"/>
+              </a:rPr>
+              <a:t> (with the class): 4567 + 5433 = 10 000. ✓</a:t>
+            </a:r>
+            <a:endParaRPr lang="en-US" sz="1200" dirty="0"/>
+          </a:p>
+        </p:txBody>
+      </p:sp>
+      <p:sp>
+        <p:nvSpPr>
+          <p:cNvPr id="16" name="Text 14"/>
+          <p:cNvSpPr/>
+          <p:nvPr/>
+        </p:nvSpPr>
+        <p:spPr>
+          <a:xfrm>
+            <a:off x="634901" y="5414070"/>
+            <a:ext cx="8102798" cy="487561"/>
+          </a:xfrm>
+          <a:prstGeom prst="rect">
+            <a:avLst/>
+          </a:prstGeom>
+          <a:noFill/>
+          <a:ln/>
+        </p:spPr>
+        <p:txBody>
+          <a:bodyPr wrap="square" lIns="0" tIns="0" rIns="0" bIns="0" rtlCol="0" anchor="t"/>
+          <a:lstStyle/>
+          <a:p>
+            <a:pPr algn="l" marL="342900" indent="-342900">
+              <a:lnSpc>
+                <a:spcPts val="1620"/>
+              </a:lnSpc>
+              <a:spcAft>
+                <a:spcPts val="300"/>
+              </a:spcAft>
+              <a:buSzPct val="100000"/>
+              <a:buChar char="•"/>
+            </a:pPr>
+            <a:r>
               <a:rPr lang="en-US" sz="1200" i="1" dirty="0">
                 <a:solidFill>
                   <a:srgbClr val="1C2833"/>
@@ -6862,13 +7188,13 @@
       </p:sp>
       <p:sp>
         <p:nvSpPr>
-          <p:cNvPr id="15" name="Text 13"/>
-          <p:cNvSpPr/>
-          <p:nvPr/>
-        </p:nvSpPr>
-        <p:spPr>
-          <a:xfrm>
-            <a:off x="406301" y="6090642"/>
+          <p:cNvPr id="17" name="Text 15"/>
+          <p:cNvSpPr/>
+          <p:nvPr/>
+        </p:nvSpPr>
+        <p:spPr>
+          <a:xfrm>
+            <a:off x="406301" y="6066681"/>
             <a:ext cx="8498026" cy="213271"/>
           </a:xfrm>
           <a:prstGeom prst="rect">

--- a/exports/pptx/lessons/middle-module-09-subtraction-nikhilam/day-01-hook.pptx
+++ b/exports/pptx/lessons/middle-module-09-subtraction-nikhilam/day-01-hook.pptx
@@ -20,9 +20,13 @@
     <p:sldId id="268" r:id="rId14"/>
     <p:sldId id="269" r:id="rId15"/>
     <p:sldId id="270" r:id="rId16"/>
+    <p:sldId id="271" r:id="rId17"/>
+    <p:sldId id="272" r:id="rId18"/>
+    <p:sldId id="273" r:id="rId19"/>
+    <p:sldId id="274" r:id="rId20"/>
   </p:sldIdLst>
   <p:notesMasterIdLst>
-    <p:notesMasterId r:id="rId17"/>
+    <p:notesMasterId r:id="rId21"/>
   </p:notesMasterIdLst>
   <p:sldSz cx="9144000" cy="5143500"/>
   <p:notesSz cx="5143500" cy="9144000"/>
@@ -1068,6 +1072,358 @@
             <a:fld id="{F7021451-1387-4CA6-816F-3879F97B5CBC}" type="slidenum">
               <a:rPr lang="en-US"/>
               <a:t>15</a:t>
+            </a:fld>
+            <a:endParaRPr lang="en-US"/>
+          </a:p>
+        </p:txBody>
+      </p:sp>
+    </p:spTree>
+    <p:extLst>
+      <p:ext uri="{BB962C8B-B14F-4D97-AF65-F5344CB8AC3E}">
+        <p14:creationId xmlns:p14="http://schemas.microsoft.com/office/powerpoint/2010/main" val="1024086991"/>
+      </p:ext>
+    </p:extLst>
+  </p:cSld>
+  <p:clrMapOvr>
+    <a:masterClrMapping/>
+  </p:clrMapOvr>
+</p:notes>
+</file>
+
+<file path=ppt/notesSlides/notesSlide16.xml><?xml version="1.0" encoding="utf-8"?>
+<p:notes xmlns:a="http://schemas.openxmlformats.org/drawingml/2006/main" xmlns:r="http://schemas.openxmlformats.org/officeDocument/2006/relationships" xmlns:p="http://schemas.openxmlformats.org/presentationml/2006/main">
+  <p:cSld>
+    <p:spTree>
+      <p:nvGrpSpPr>
+        <p:cNvPr id="1" name=""/>
+        <p:cNvGrpSpPr/>
+        <p:nvPr/>
+      </p:nvGrpSpPr>
+      <p:grpSpPr>
+        <a:xfrm>
+          <a:off x="0" y="0"/>
+          <a:ext cx="0" cy="0"/>
+          <a:chOff x="0" y="0"/>
+          <a:chExt cx="0" cy="0"/>
+        </a:xfrm>
+      </p:grpSpPr>
+      <p:sp>
+        <p:nvSpPr>
+          <p:cNvPr id="2" name="Slide Image Placeholder 1"/>
+          <p:cNvSpPr>
+            <a:spLocks noGrp="1" noRot="1" noChangeAspect="1"/>
+          </p:cNvSpPr>
+          <p:nvPr>
+            <p:ph type="sldImg"/>
+          </p:nvPr>
+        </p:nvSpPr>
+        <p:spPr/>
+      </p:sp>
+      <p:sp>
+        <p:nvSpPr>
+          <p:cNvPr id="3" name="Notes Placeholder 2"/>
+          <p:cNvSpPr>
+            <a:spLocks noGrp="1"/>
+          </p:cNvSpPr>
+          <p:nvPr>
+            <p:ph type="body" idx="1"/>
+          </p:nvPr>
+        </p:nvSpPr>
+        <p:spPr/>
+        <p:txBody>
+          <a:bodyPr/>
+          <a:lstStyle/>
+          <a:p>
+            <a:r>
+              <a:rPr lang="en-US" dirty="0"/>
+              <a:t/>
+            </a:r>
+            <a:endParaRPr lang="en-US" dirty="0"/>
+          </a:p>
+        </p:txBody>
+      </p:sp>
+      <p:sp>
+        <p:nvSpPr>
+          <p:cNvPr id="4" name="Slide Number Placeholder 3"/>
+          <p:cNvSpPr>
+            <a:spLocks noGrp="1"/>
+          </p:cNvSpPr>
+          <p:nvPr>
+            <p:ph type="sldNum" sz="quarter" idx="10"/>
+          </p:nvPr>
+        </p:nvSpPr>
+        <p:spPr/>
+        <p:txBody>
+          <a:bodyPr/>
+          <a:lstStyle/>
+          <a:p>
+            <a:fld id="{F7021451-1387-4CA6-816F-3879F97B5CBC}" type="slidenum">
+              <a:rPr lang="en-US"/>
+              <a:t>16</a:t>
+            </a:fld>
+            <a:endParaRPr lang="en-US"/>
+          </a:p>
+        </p:txBody>
+      </p:sp>
+    </p:spTree>
+    <p:extLst>
+      <p:ext uri="{BB962C8B-B14F-4D97-AF65-F5344CB8AC3E}">
+        <p14:creationId xmlns:p14="http://schemas.microsoft.com/office/powerpoint/2010/main" val="1024086991"/>
+      </p:ext>
+    </p:extLst>
+  </p:cSld>
+  <p:clrMapOvr>
+    <a:masterClrMapping/>
+  </p:clrMapOvr>
+</p:notes>
+</file>
+
+<file path=ppt/notesSlides/notesSlide17.xml><?xml version="1.0" encoding="utf-8"?>
+<p:notes xmlns:a="http://schemas.openxmlformats.org/drawingml/2006/main" xmlns:r="http://schemas.openxmlformats.org/officeDocument/2006/relationships" xmlns:p="http://schemas.openxmlformats.org/presentationml/2006/main">
+  <p:cSld>
+    <p:spTree>
+      <p:nvGrpSpPr>
+        <p:cNvPr id="1" name=""/>
+        <p:cNvGrpSpPr/>
+        <p:nvPr/>
+      </p:nvGrpSpPr>
+      <p:grpSpPr>
+        <a:xfrm>
+          <a:off x="0" y="0"/>
+          <a:ext cx="0" cy="0"/>
+          <a:chOff x="0" y="0"/>
+          <a:chExt cx="0" cy="0"/>
+        </a:xfrm>
+      </p:grpSpPr>
+      <p:sp>
+        <p:nvSpPr>
+          <p:cNvPr id="2" name="Slide Image Placeholder 1"/>
+          <p:cNvSpPr>
+            <a:spLocks noGrp="1" noRot="1" noChangeAspect="1"/>
+          </p:cNvSpPr>
+          <p:nvPr>
+            <p:ph type="sldImg"/>
+          </p:nvPr>
+        </p:nvSpPr>
+        <p:spPr/>
+      </p:sp>
+      <p:sp>
+        <p:nvSpPr>
+          <p:cNvPr id="3" name="Notes Placeholder 2"/>
+          <p:cNvSpPr>
+            <a:spLocks noGrp="1"/>
+          </p:cNvSpPr>
+          <p:nvPr>
+            <p:ph type="body" idx="1"/>
+          </p:nvPr>
+        </p:nvSpPr>
+        <p:spPr/>
+        <p:txBody>
+          <a:bodyPr/>
+          <a:lstStyle/>
+          <a:p>
+            <a:r>
+              <a:rPr lang="en-US" dirty="0"/>
+              <a:t/>
+            </a:r>
+            <a:endParaRPr lang="en-US" dirty="0"/>
+          </a:p>
+        </p:txBody>
+      </p:sp>
+      <p:sp>
+        <p:nvSpPr>
+          <p:cNvPr id="4" name="Slide Number Placeholder 3"/>
+          <p:cNvSpPr>
+            <a:spLocks noGrp="1"/>
+          </p:cNvSpPr>
+          <p:nvPr>
+            <p:ph type="sldNum" sz="quarter" idx="10"/>
+          </p:nvPr>
+        </p:nvSpPr>
+        <p:spPr/>
+        <p:txBody>
+          <a:bodyPr/>
+          <a:lstStyle/>
+          <a:p>
+            <a:fld id="{F7021451-1387-4CA6-816F-3879F97B5CBC}" type="slidenum">
+              <a:rPr lang="en-US"/>
+              <a:t>17</a:t>
+            </a:fld>
+            <a:endParaRPr lang="en-US"/>
+          </a:p>
+        </p:txBody>
+      </p:sp>
+    </p:spTree>
+    <p:extLst>
+      <p:ext uri="{BB962C8B-B14F-4D97-AF65-F5344CB8AC3E}">
+        <p14:creationId xmlns:p14="http://schemas.microsoft.com/office/powerpoint/2010/main" val="1024086991"/>
+      </p:ext>
+    </p:extLst>
+  </p:cSld>
+  <p:clrMapOvr>
+    <a:masterClrMapping/>
+  </p:clrMapOvr>
+</p:notes>
+</file>
+
+<file path=ppt/notesSlides/notesSlide18.xml><?xml version="1.0" encoding="utf-8"?>
+<p:notes xmlns:a="http://schemas.openxmlformats.org/drawingml/2006/main" xmlns:r="http://schemas.openxmlformats.org/officeDocument/2006/relationships" xmlns:p="http://schemas.openxmlformats.org/presentationml/2006/main">
+  <p:cSld>
+    <p:spTree>
+      <p:nvGrpSpPr>
+        <p:cNvPr id="1" name=""/>
+        <p:cNvGrpSpPr/>
+        <p:nvPr/>
+      </p:nvGrpSpPr>
+      <p:grpSpPr>
+        <a:xfrm>
+          <a:off x="0" y="0"/>
+          <a:ext cx="0" cy="0"/>
+          <a:chOff x="0" y="0"/>
+          <a:chExt cx="0" cy="0"/>
+        </a:xfrm>
+      </p:grpSpPr>
+      <p:sp>
+        <p:nvSpPr>
+          <p:cNvPr id="2" name="Slide Image Placeholder 1"/>
+          <p:cNvSpPr>
+            <a:spLocks noGrp="1" noRot="1" noChangeAspect="1"/>
+          </p:cNvSpPr>
+          <p:nvPr>
+            <p:ph type="sldImg"/>
+          </p:nvPr>
+        </p:nvSpPr>
+        <p:spPr/>
+      </p:sp>
+      <p:sp>
+        <p:nvSpPr>
+          <p:cNvPr id="3" name="Notes Placeholder 2"/>
+          <p:cNvSpPr>
+            <a:spLocks noGrp="1"/>
+          </p:cNvSpPr>
+          <p:nvPr>
+            <p:ph type="body" idx="1"/>
+          </p:nvPr>
+        </p:nvSpPr>
+        <p:spPr/>
+        <p:txBody>
+          <a:bodyPr/>
+          <a:lstStyle/>
+          <a:p>
+            <a:r>
+              <a:rPr lang="en-US" dirty="0"/>
+              <a:t/>
+            </a:r>
+            <a:endParaRPr lang="en-US" dirty="0"/>
+          </a:p>
+        </p:txBody>
+      </p:sp>
+      <p:sp>
+        <p:nvSpPr>
+          <p:cNvPr id="4" name="Slide Number Placeholder 3"/>
+          <p:cNvSpPr>
+            <a:spLocks noGrp="1"/>
+          </p:cNvSpPr>
+          <p:nvPr>
+            <p:ph type="sldNum" sz="quarter" idx="10"/>
+          </p:nvPr>
+        </p:nvSpPr>
+        <p:spPr/>
+        <p:txBody>
+          <a:bodyPr/>
+          <a:lstStyle/>
+          <a:p>
+            <a:fld id="{F7021451-1387-4CA6-816F-3879F97B5CBC}" type="slidenum">
+              <a:rPr lang="en-US"/>
+              <a:t>18</a:t>
+            </a:fld>
+            <a:endParaRPr lang="en-US"/>
+          </a:p>
+        </p:txBody>
+      </p:sp>
+    </p:spTree>
+    <p:extLst>
+      <p:ext uri="{BB962C8B-B14F-4D97-AF65-F5344CB8AC3E}">
+        <p14:creationId xmlns:p14="http://schemas.microsoft.com/office/powerpoint/2010/main" val="1024086991"/>
+      </p:ext>
+    </p:extLst>
+  </p:cSld>
+  <p:clrMapOvr>
+    <a:masterClrMapping/>
+  </p:clrMapOvr>
+</p:notes>
+</file>
+
+<file path=ppt/notesSlides/notesSlide19.xml><?xml version="1.0" encoding="utf-8"?>
+<p:notes xmlns:a="http://schemas.openxmlformats.org/drawingml/2006/main" xmlns:r="http://schemas.openxmlformats.org/officeDocument/2006/relationships" xmlns:p="http://schemas.openxmlformats.org/presentationml/2006/main">
+  <p:cSld>
+    <p:spTree>
+      <p:nvGrpSpPr>
+        <p:cNvPr id="1" name=""/>
+        <p:cNvGrpSpPr/>
+        <p:nvPr/>
+      </p:nvGrpSpPr>
+      <p:grpSpPr>
+        <a:xfrm>
+          <a:off x="0" y="0"/>
+          <a:ext cx="0" cy="0"/>
+          <a:chOff x="0" y="0"/>
+          <a:chExt cx="0" cy="0"/>
+        </a:xfrm>
+      </p:grpSpPr>
+      <p:sp>
+        <p:nvSpPr>
+          <p:cNvPr id="2" name="Slide Image Placeholder 1"/>
+          <p:cNvSpPr>
+            <a:spLocks noGrp="1" noRot="1" noChangeAspect="1"/>
+          </p:cNvSpPr>
+          <p:nvPr>
+            <p:ph type="sldImg"/>
+          </p:nvPr>
+        </p:nvSpPr>
+        <p:spPr/>
+      </p:sp>
+      <p:sp>
+        <p:nvSpPr>
+          <p:cNvPr id="3" name="Notes Placeholder 2"/>
+          <p:cNvSpPr>
+            <a:spLocks noGrp="1"/>
+          </p:cNvSpPr>
+          <p:nvPr>
+            <p:ph type="body" idx="1"/>
+          </p:nvPr>
+        </p:nvSpPr>
+        <p:spPr/>
+        <p:txBody>
+          <a:bodyPr/>
+          <a:lstStyle/>
+          <a:p>
+            <a:r>
+              <a:rPr lang="en-US" dirty="0"/>
+              <a:t/>
+            </a:r>
+            <a:endParaRPr lang="en-US" dirty="0"/>
+          </a:p>
+        </p:txBody>
+      </p:sp>
+      <p:sp>
+        <p:nvSpPr>
+          <p:cNvPr id="4" name="Slide Number Placeholder 3"/>
+          <p:cNvSpPr>
+            <a:spLocks noGrp="1"/>
+          </p:cNvSpPr>
+          <p:nvPr>
+            <p:ph type="sldNum" sz="quarter" idx="10"/>
+          </p:nvPr>
+        </p:nvSpPr>
+        <p:spPr/>
+        <p:txBody>
+          <a:bodyPr/>
+          <a:lstStyle/>
+          <a:p>
+            <a:fld id="{F7021451-1387-4CA6-816F-3879F97B5CBC}" type="slidenum">
+              <a:rPr lang="en-US"/>
+              <a:t>19</a:t>
             </a:fld>
             <a:endParaRPr lang="en-US"/>
           </a:p>
@@ -2367,148 +2723,6 @@
         </p:nvSpPr>
         <p:spPr>
           <a:xfrm>
-            <a:off x="406301" y="1223963"/>
-            <a:ext cx="8498026" cy="274290"/>
-          </a:xfrm>
-          <a:prstGeom prst="rect">
-            <a:avLst/>
-          </a:prstGeom>
-          <a:noFill/>
-          <a:ln/>
-        </p:spPr>
-        <p:txBody>
-          <a:bodyPr wrap="square" lIns="0" tIns="0" rIns="0" bIns="0" rtlCol="0" anchor="t"/>
-          <a:lstStyle/>
-          <a:p>
-            <a:pPr algn="l" indent="0" marL="0">
-              <a:lnSpc>
-                <a:spcPts val="2160"/>
-              </a:lnSpc>
-              <a:spcBef>
-                <a:spcPts val="600"/>
-              </a:spcBef>
-              <a:spcAft>
-                <a:spcPts val="800"/>
-              </a:spcAft>
-              <a:buNone/>
-            </a:pPr>
-            <a:r>
-              <a:rPr lang="en-US" sz="1800" b="1" dirty="0">
-                <a:solidFill>
-                  <a:srgbClr val="FE4447"/>
-                </a:solidFill>
-                <a:latin typeface="Georgia" pitchFamily="34" charset="0"/>
-                <a:ea typeface="Georgia" pitchFamily="34" charset="-122"/>
-                <a:cs typeface="Georgia" pitchFamily="34" charset="-120"/>
-              </a:rPr>
-              <a:t>Learning objective</a:t>
-            </a:r>
-            <a:endParaRPr lang="en-US" sz="1800" dirty="0"/>
-          </a:p>
-        </p:txBody>
-      </p:sp>
-      <p:sp>
-        <p:nvSpPr>
-          <p:cNvPr id="6" name="Text 4"/>
-          <p:cNvSpPr/>
-          <p:nvPr/>
-        </p:nvSpPr>
-        <p:spPr>
-          <a:xfrm>
-            <a:off x="406301" y="1637854"/>
-            <a:ext cx="8498026" cy="436066"/>
-          </a:xfrm>
-          <a:prstGeom prst="rect">
-            <a:avLst/>
-          </a:prstGeom>
-          <a:noFill/>
-          <a:ln/>
-        </p:spPr>
-        <p:txBody>
-          <a:bodyPr wrap="square" lIns="0" tIns="0" rIns="0" bIns="0" rtlCol="0" anchor="t"/>
-          <a:lstStyle/>
-          <a:p>
-            <a:pPr algn="l" indent="0" marL="0">
-              <a:lnSpc>
-                <a:spcPts val="1680"/>
-              </a:lnSpc>
-              <a:spcBef>
-                <a:spcPts val="300"/>
-              </a:spcBef>
-              <a:spcAft>
-                <a:spcPts val="300"/>
-              </a:spcAft>
-              <a:buNone/>
-            </a:pPr>
-            <a:r>
-              <a:rPr lang="en-US" sz="1200" dirty="0">
-                <a:solidFill>
-                  <a:srgbClr val="1C2833"/>
-                </a:solidFill>
-                <a:latin typeface="Arial" pitchFamily="34" charset="0"/>
-                <a:ea typeface="Arial" pitchFamily="34" charset="-122"/>
-                <a:cs typeface="Arial" pitchFamily="34" charset="-120"/>
-              </a:rPr>
-              <a:t>By the end of this lesson, students will record a personal baseline time for </a:t>
-            </a:r>
-            <a:pPr algn="l" indent="0" marL="0">
-              <a:lnSpc>
-                <a:spcPts val="1680"/>
-              </a:lnSpc>
-              <a:spcBef>
-                <a:spcPts val="300"/>
-              </a:spcBef>
-              <a:spcAft>
-                <a:spcPts val="300"/>
-              </a:spcAft>
-              <a:buNone/>
-            </a:pPr>
-            <a:r>
-              <a:rPr lang="en-US" sz="1200" dirty="0">
-                <a:solidFill>
-                  <a:srgbClr val="1C2833"/>
-                </a:solidFill>
-                <a:latin typeface="Arial" pitchFamily="34" charset="0"/>
-                <a:ea typeface="Arial" pitchFamily="34" charset="-122"/>
-                <a:cs typeface="Arial" pitchFamily="34" charset="-120"/>
-              </a:rPr>
-              <a:t>10 000 − 4567</a:t>
-            </a:r>
-            <a:pPr algn="l" indent="0" marL="0">
-              <a:lnSpc>
-                <a:spcPts val="1680"/>
-              </a:lnSpc>
-              <a:spcBef>
-                <a:spcPts val="300"/>
-              </a:spcBef>
-              <a:spcAft>
-                <a:spcPts val="300"/>
-              </a:spcAft>
-              <a:buNone/>
-            </a:pPr>
-            <a:r>
-              <a:rPr lang="en-US" sz="1200" dirty="0">
-                <a:solidFill>
-                  <a:srgbClr val="1C2833"/>
-                </a:solidFill>
-                <a:latin typeface="Arial" pitchFamily="34" charset="0"/>
-                <a:ea typeface="Arial" pitchFamily="34" charset="-122"/>
-                <a:cs typeface="Arial" pitchFamily="34" charset="-120"/>
-              </a:rPr>
-              <a:t> using standard borrowing, will recite the Nikhilam sūtra in Sanskrit, and will have watched the method solve the same problem visibly faster.</a:t>
-            </a:r>
-            <a:endParaRPr lang="en-US" sz="1200" dirty="0"/>
-          </a:p>
-        </p:txBody>
-      </p:sp>
-      <p:sp>
-        <p:nvSpPr>
-          <p:cNvPr id="7" name="Text 5"/>
-          <p:cNvSpPr/>
-          <p:nvPr/>
-        </p:nvSpPr>
-        <p:spPr>
-          <a:xfrm>
             <a:off x="406301" y="4434929"/>
             <a:ext cx="8498026" cy="213271"/>
           </a:xfrm>
@@ -2620,7 +2834,7 @@
         <p:spPr>
           <a:xfrm>
             <a:off x="406301" y="457051"/>
-            <a:ext cx="8498026" cy="274290"/>
+            <a:ext cx="8498026" cy="548580"/>
           </a:xfrm>
           <a:prstGeom prst="rect">
             <a:avLst/>
@@ -2653,7 +2867,7 @@
                 <a:ea typeface="Georgia" pitchFamily="34" charset="-122"/>
                 <a:cs typeface="Georgia" pitchFamily="34" charset="-120"/>
               </a:rPr>
-              <a:t>Wrap-up (5 min)</a:t>
+              <a:t>Teacher demonstration (12 min) — the same baseline problem, the Nikhilam way (cont.)</a:t>
             </a:r>
             <a:endParaRPr lang="en-US" sz="1800" dirty="0"/>
           </a:p>
@@ -2667,8 +2881,8 @@
         </p:nvSpPr>
         <p:spPr>
           <a:xfrm>
-            <a:off x="406301" y="870942"/>
-            <a:ext cx="8498026" cy="639812"/>
+            <a:off x="634901" y="1157883"/>
+            <a:ext cx="8102798" cy="525661"/>
           </a:xfrm>
           <a:prstGeom prst="rect">
             <a:avLst/>
@@ -2680,6 +2894,76 @@
           <a:bodyPr wrap="square" lIns="0" tIns="0" rIns="0" bIns="0" rtlCol="0" anchor="t"/>
           <a:lstStyle/>
           <a:p>
+            <a:pPr algn="l" marL="342900" indent="-342900">
+              <a:lnSpc>
+                <a:spcPts val="1620"/>
+              </a:lnSpc>
+              <a:spcAft>
+                <a:spcPts val="300"/>
+              </a:spcAft>
+              <a:buSzPct val="100000"/>
+              <a:buChar char="•"/>
+            </a:pPr>
+            <a:r>
+              <a:rPr lang="en-US" sz="1200" i="1" dirty="0">
+                <a:solidFill>
+                  <a:srgbClr val="1C2833"/>
+                </a:solidFill>
+                <a:latin typeface="Arial" pitchFamily="34" charset="0"/>
+                <a:ea typeface="Arial" pitchFamily="34" charset="-122"/>
+                <a:cs typeface="Arial" pitchFamily="34" charset="-120"/>
+              </a:rPr>
+              <a:t>"We want to subtract 4567 from 10 000. That's 10⁴ — a clean power of ten. Perfect Nikhilam territory."</a:t>
+            </a:r>
+            <a:endParaRPr lang="en-US" sz="1200" dirty="0"/>
+          </a:p>
+          <a:p>
+            <a:pPr algn="l" marL="342900" indent="-342900">
+              <a:lnSpc>
+                <a:spcPts val="1620"/>
+              </a:lnSpc>
+              <a:spcAft>
+                <a:spcPts val="300"/>
+              </a:spcAft>
+              <a:buSzPct val="100000"/>
+              <a:buChar char="•"/>
+            </a:pPr>
+            <a:r>
+              <a:rPr lang="en-US" sz="1200" i="1" dirty="0">
+                <a:solidFill>
+                  <a:srgbClr val="1C2833"/>
+                </a:solidFill>
+                <a:latin typeface="Arial" pitchFamily="34" charset="0"/>
+                <a:ea typeface="Arial" pitchFamily="34" charset="-122"/>
+                <a:cs typeface="Arial" pitchFamily="34" charset="-120"/>
+              </a:rPr>
+              <a:t>"Treat 4567 as a 4-digit number. Apply the rule digit-by-digit."</a:t>
+            </a:r>
+            <a:endParaRPr lang="en-US" sz="1200" dirty="0"/>
+          </a:p>
+        </p:txBody>
+      </p:sp>
+      <p:sp>
+        <p:nvSpPr>
+          <p:cNvPr id="5" name="Text 3"/>
+          <p:cNvSpPr/>
+          <p:nvPr/>
+        </p:nvSpPr>
+        <p:spPr>
+          <a:xfrm>
+            <a:off x="406301" y="1772394"/>
+            <a:ext cx="8498026" cy="213271"/>
+          </a:xfrm>
+          <a:prstGeom prst="rect">
+            <a:avLst/>
+          </a:prstGeom>
+          <a:noFill/>
+          <a:ln/>
+        </p:spPr>
+        <p:txBody>
+          <a:bodyPr wrap="square" lIns="0" tIns="0" rIns="0" bIns="0" rtlCol="0" anchor="t"/>
+          <a:lstStyle/>
+          <a:p>
             <a:pPr algn="l" indent="0" marL="0">
               <a:lnSpc>
                 <a:spcPts val="1680"/>
@@ -2693,29 +2977,6 @@
               <a:buNone/>
             </a:pPr>
             <a:r>
-              <a:rPr lang="en-US" sz="1200" dirty="0">
-                <a:solidFill>
-                  <a:srgbClr val="1C2833"/>
-                </a:solidFill>
-                <a:latin typeface="Arial" pitchFamily="34" charset="0"/>
-                <a:ea typeface="Arial" pitchFamily="34" charset="-122"/>
-                <a:cs typeface="Arial" pitchFamily="34" charset="-120"/>
-              </a:rPr>
-              <a:t>– Show of hands: who was faster with Nikhilam on first try? Who was slower? (Most will be slower — that's expected. Practice fixes it.) – Preview Day 2: </a:t>
-            </a:r>
-            <a:pPr algn="l" indent="0" marL="0">
-              <a:lnSpc>
-                <a:spcPts val="1680"/>
-              </a:lnSpc>
-              <a:spcBef>
-                <a:spcPts val="300"/>
-              </a:spcBef>
-              <a:spcAft>
-                <a:spcPts val="300"/>
-              </a:spcAft>
-              <a:buNone/>
-            </a:pPr>
-            <a:r>
               <a:rPr lang="en-US" sz="1200" i="1" dirty="0">
                 <a:solidFill>
                   <a:srgbClr val="1C2833"/>
@@ -2724,30 +2985,7 @@
                 <a:ea typeface="Arial" pitchFamily="34" charset="-122"/>
                 <a:cs typeface="Arial" pitchFamily="34" charset="-120"/>
               </a:rPr>
-              <a:t>"Tomorrow we drill the foundational skill — finding the complement of a 2-digit number to 100, fast."</a:t>
-            </a:r>
-            <a:pPr algn="l" indent="0" marL="0">
-              <a:lnSpc>
-                <a:spcPts val="1680"/>
-              </a:lnSpc>
-              <a:spcBef>
-                <a:spcPts val="300"/>
-              </a:spcBef>
-              <a:spcAft>
-                <a:spcPts val="300"/>
-              </a:spcAft>
-              <a:buNone/>
-            </a:pPr>
-            <a:r>
-              <a:rPr lang="en-US" sz="1200" dirty="0">
-                <a:solidFill>
-                  <a:srgbClr val="1C2833"/>
-                </a:solidFill>
-                <a:latin typeface="Arial" pitchFamily="34" charset="0"/>
-                <a:ea typeface="Arial" pitchFamily="34" charset="-122"/>
-                <a:cs typeface="Arial" pitchFamily="34" charset="-120"/>
-              </a:rPr>
-              <a:t> – Set the wall-poster Sanskrit chant as the daily opener for the next 9 days.</a:t>
+              <a:t>Each row: Step · Apply rule · Get.</a:t>
             </a:r>
             <a:endParaRPr lang="en-US" sz="1200" dirty="0"/>
           </a:p>
@@ -2755,7 +2993,7 @@
       </p:sp>
       <p:sp>
         <p:nvSpPr>
-          <p:cNvPr id="5" name="Text 3"/>
+          <p:cNvPr id="6" name="Text 4"/>
           <p:cNvSpPr/>
           <p:nvPr/>
         </p:nvSpPr>
@@ -2872,7 +3110,7 @@
         <p:spPr>
           <a:xfrm>
             <a:off x="406301" y="457051"/>
-            <a:ext cx="8498026" cy="274290"/>
+            <a:ext cx="8498026" cy="548580"/>
           </a:xfrm>
           <a:prstGeom prst="rect">
             <a:avLst/>
@@ -2905,7 +3143,7 @@
                 <a:ea typeface="Georgia" pitchFamily="34" charset="-122"/>
                 <a:cs typeface="Georgia" pitchFamily="34" charset="-120"/>
               </a:rPr>
-              <a:t>Student-facing content</a:t>
+              <a:t>Teacher demonstration (12 min) — the same baseline problem, the Nikhilam way (cont.)</a:t>
             </a:r>
             <a:endParaRPr lang="en-US" sz="1800" dirty="0"/>
           </a:p>
@@ -2919,503 +3157,365 @@
         </p:nvSpPr>
         <p:spPr>
           <a:xfrm>
-            <a:off x="406301" y="883593"/>
-            <a:ext cx="8331398" cy="2419350"/>
-          </a:xfrm>
-          <a:prstGeom prst="rect">
-            <a:avLst/>
-          </a:prstGeom>
-          <a:solidFill>
-            <a:srgbClr val="F4F8F9"/>
-          </a:solidFill>
-          <a:ln/>
-        </p:spPr>
-        <p:txBody>
-          <a:bodyPr wrap="square" rtlCol="0" anchor="ctr"/>
-          <a:lstStyle/>
-          <a:p>
-            <a:pPr indent="0" marL="0">
-              <a:buNone/>
-            </a:pPr>
-            <a:endParaRPr lang="en-US" dirty="0"/>
-          </a:p>
-        </p:txBody>
-      </p:sp>
-      <p:sp>
-        <p:nvSpPr>
-          <p:cNvPr id="5" name="Shape 3"/>
-          <p:cNvSpPr/>
-          <p:nvPr/>
-        </p:nvSpPr>
-        <p:spPr>
-          <a:xfrm>
-            <a:off x="434876" y="883593"/>
-            <a:ext cx="0" cy="2419350"/>
-          </a:xfrm>
-          <a:prstGeom prst="line">
+            <a:off x="634901" y="1157883"/>
+            <a:ext cx="8102798" cy="1013222"/>
+          </a:xfrm>
+          <a:prstGeom prst="rect">
             <a:avLst/>
           </a:prstGeom>
           <a:noFill/>
-          <a:ln w="57150">
-            <a:solidFill>
-              <a:srgbClr val="FE4447"/>
-            </a:solidFill>
-            <a:prstDash val="solid"/>
-          </a:ln>
-        </p:spPr>
+          <a:ln/>
+        </p:spPr>
+        <p:txBody>
+          <a:bodyPr wrap="square" lIns="0" tIns="0" rIns="0" bIns="0" rtlCol="0" anchor="t"/>
+          <a:lstStyle/>
+          <a:p>
+            <a:pPr algn="l" marL="342900" indent="-342900">
+              <a:lnSpc>
+                <a:spcPts val="1620"/>
+              </a:lnSpc>
+              <a:spcAft>
+                <a:spcPts val="300"/>
+              </a:spcAft>
+              <a:buSzPct val="100000"/>
+              <a:buChar char="•"/>
+            </a:pPr>
+            <a:r>
+              <a:rPr lang="en-US" sz="1200" b="1" dirty="0">
+                <a:solidFill>
+                  <a:srgbClr val="1C2833"/>
+                </a:solidFill>
+                <a:latin typeface="Arial" pitchFamily="34" charset="0"/>
+                <a:ea typeface="Arial" pitchFamily="34" charset="-122"/>
+                <a:cs typeface="Arial" pitchFamily="34" charset="-120"/>
+              </a:rPr>
+              <a:t>First digit (4):</a:t>
+            </a:r>
+            <a:pPr algn="l" indent="0" marL="0">
+              <a:lnSpc>
+                <a:spcPts val="1620"/>
+              </a:lnSpc>
+              <a:spcAft>
+                <a:spcPts val="300"/>
+              </a:spcAft>
+              <a:buNone/>
+            </a:pPr>
+            <a:r>
+              <a:rPr lang="en-US" sz="1200" dirty="0">
+                <a:solidFill>
+                  <a:srgbClr val="1C2833"/>
+                </a:solidFill>
+                <a:latin typeface="Arial" pitchFamily="34" charset="0"/>
+                <a:ea typeface="Arial" pitchFamily="34" charset="-122"/>
+                <a:cs typeface="Arial" pitchFamily="34" charset="-120"/>
+              </a:rPr>
+              <a:t> — "from 9" · 9 − 4 = </a:t>
+            </a:r>
+            <a:pPr algn="l" indent="0" marL="0">
+              <a:lnSpc>
+                <a:spcPts val="1620"/>
+              </a:lnSpc>
+              <a:spcAft>
+                <a:spcPts val="300"/>
+              </a:spcAft>
+              <a:buNone/>
+            </a:pPr>
+            <a:r>
+              <a:rPr lang="en-US" sz="1200" b="1" dirty="0">
+                <a:solidFill>
+                  <a:srgbClr val="1C2833"/>
+                </a:solidFill>
+                <a:latin typeface="Arial" pitchFamily="34" charset="0"/>
+                <a:ea typeface="Arial" pitchFamily="34" charset="-122"/>
+                <a:cs typeface="Arial" pitchFamily="34" charset="-120"/>
+              </a:rPr>
+              <a:t>5</a:t>
+            </a:r>
+            <a:endParaRPr lang="en-US" sz="1200" dirty="0"/>
+          </a:p>
+          <a:p>
+            <a:pPr algn="l" marL="342900" indent="-342900">
+              <a:lnSpc>
+                <a:spcPts val="1620"/>
+              </a:lnSpc>
+              <a:spcAft>
+                <a:spcPts val="300"/>
+              </a:spcAft>
+              <a:buSzPct val="100000"/>
+              <a:buChar char="•"/>
+            </a:pPr>
+            <a:r>
+              <a:rPr lang="en-US" sz="1200" b="1" dirty="0">
+                <a:solidFill>
+                  <a:srgbClr val="1C2833"/>
+                </a:solidFill>
+                <a:latin typeface="Arial" pitchFamily="34" charset="0"/>
+                <a:ea typeface="Arial" pitchFamily="34" charset="-122"/>
+                <a:cs typeface="Arial" pitchFamily="34" charset="-120"/>
+              </a:rPr>
+              <a:t>Second digit (5):</a:t>
+            </a:r>
+            <a:pPr algn="l" indent="0" marL="0">
+              <a:lnSpc>
+                <a:spcPts val="1620"/>
+              </a:lnSpc>
+              <a:spcAft>
+                <a:spcPts val="300"/>
+              </a:spcAft>
+              <a:buNone/>
+            </a:pPr>
+            <a:r>
+              <a:rPr lang="en-US" sz="1200" dirty="0">
+                <a:solidFill>
+                  <a:srgbClr val="1C2833"/>
+                </a:solidFill>
+                <a:latin typeface="Arial" pitchFamily="34" charset="0"/>
+                <a:ea typeface="Arial" pitchFamily="34" charset="-122"/>
+                <a:cs typeface="Arial" pitchFamily="34" charset="-120"/>
+              </a:rPr>
+              <a:t> — "from 9" · 9 − 5 = </a:t>
+            </a:r>
+            <a:pPr algn="l" indent="0" marL="0">
+              <a:lnSpc>
+                <a:spcPts val="1620"/>
+              </a:lnSpc>
+              <a:spcAft>
+                <a:spcPts val="300"/>
+              </a:spcAft>
+              <a:buNone/>
+            </a:pPr>
+            <a:r>
+              <a:rPr lang="en-US" sz="1200" b="1" dirty="0">
+                <a:solidFill>
+                  <a:srgbClr val="1C2833"/>
+                </a:solidFill>
+                <a:latin typeface="Arial" pitchFamily="34" charset="0"/>
+                <a:ea typeface="Arial" pitchFamily="34" charset="-122"/>
+                <a:cs typeface="Arial" pitchFamily="34" charset="-120"/>
+              </a:rPr>
+              <a:t>4</a:t>
+            </a:r>
+            <a:endParaRPr lang="en-US" sz="1200" dirty="0"/>
+          </a:p>
+          <a:p>
+            <a:pPr algn="l" marL="342900" indent="-342900">
+              <a:lnSpc>
+                <a:spcPts val="1620"/>
+              </a:lnSpc>
+              <a:spcAft>
+                <a:spcPts val="300"/>
+              </a:spcAft>
+              <a:buSzPct val="100000"/>
+              <a:buChar char="•"/>
+            </a:pPr>
+            <a:r>
+              <a:rPr lang="en-US" sz="1200" b="1" dirty="0">
+                <a:solidFill>
+                  <a:srgbClr val="1C2833"/>
+                </a:solidFill>
+                <a:latin typeface="Arial" pitchFamily="34" charset="0"/>
+                <a:ea typeface="Arial" pitchFamily="34" charset="-122"/>
+                <a:cs typeface="Arial" pitchFamily="34" charset="-120"/>
+              </a:rPr>
+              <a:t>Third digit (6):</a:t>
+            </a:r>
+            <a:pPr algn="l" indent="0" marL="0">
+              <a:lnSpc>
+                <a:spcPts val="1620"/>
+              </a:lnSpc>
+              <a:spcAft>
+                <a:spcPts val="300"/>
+              </a:spcAft>
+              <a:buNone/>
+            </a:pPr>
+            <a:r>
+              <a:rPr lang="en-US" sz="1200" dirty="0">
+                <a:solidFill>
+                  <a:srgbClr val="1C2833"/>
+                </a:solidFill>
+                <a:latin typeface="Arial" pitchFamily="34" charset="0"/>
+                <a:ea typeface="Arial" pitchFamily="34" charset="-122"/>
+                <a:cs typeface="Arial" pitchFamily="34" charset="-120"/>
+              </a:rPr>
+              <a:t> — "from 9" · 9 − 6 = </a:t>
+            </a:r>
+            <a:pPr algn="l" indent="0" marL="0">
+              <a:lnSpc>
+                <a:spcPts val="1620"/>
+              </a:lnSpc>
+              <a:spcAft>
+                <a:spcPts val="300"/>
+              </a:spcAft>
+              <a:buNone/>
+            </a:pPr>
+            <a:r>
+              <a:rPr lang="en-US" sz="1200" b="1" dirty="0">
+                <a:solidFill>
+                  <a:srgbClr val="1C2833"/>
+                </a:solidFill>
+                <a:latin typeface="Arial" pitchFamily="34" charset="0"/>
+                <a:ea typeface="Arial" pitchFamily="34" charset="-122"/>
+                <a:cs typeface="Arial" pitchFamily="34" charset="-120"/>
+              </a:rPr>
+              <a:t>3</a:t>
+            </a:r>
+            <a:endParaRPr lang="en-US" sz="1200" dirty="0"/>
+          </a:p>
+          <a:p>
+            <a:pPr algn="l" marL="342900" indent="-342900">
+              <a:lnSpc>
+                <a:spcPts val="1620"/>
+              </a:lnSpc>
+              <a:spcAft>
+                <a:spcPts val="300"/>
+              </a:spcAft>
+              <a:buSzPct val="100000"/>
+              <a:buChar char="•"/>
+            </a:pPr>
+            <a:r>
+              <a:rPr lang="en-US" sz="1200" b="1" dirty="0">
+                <a:solidFill>
+                  <a:srgbClr val="1C2833"/>
+                </a:solidFill>
+                <a:latin typeface="Arial" pitchFamily="34" charset="0"/>
+                <a:ea typeface="Arial" pitchFamily="34" charset="-122"/>
+                <a:cs typeface="Arial" pitchFamily="34" charset="-120"/>
+              </a:rPr>
+              <a:t>Last digit (7):</a:t>
+            </a:r>
+            <a:pPr algn="l" indent="0" marL="0">
+              <a:lnSpc>
+                <a:spcPts val="1620"/>
+              </a:lnSpc>
+              <a:spcAft>
+                <a:spcPts val="300"/>
+              </a:spcAft>
+              <a:buNone/>
+            </a:pPr>
+            <a:r>
+              <a:rPr lang="en-US" sz="1200" dirty="0">
+                <a:solidFill>
+                  <a:srgbClr val="1C2833"/>
+                </a:solidFill>
+                <a:latin typeface="Arial" pitchFamily="34" charset="0"/>
+                <a:ea typeface="Arial" pitchFamily="34" charset="-122"/>
+                <a:cs typeface="Arial" pitchFamily="34" charset="-120"/>
+              </a:rPr>
+              <a:t> — "from 10" · 10 − 7 = </a:t>
+            </a:r>
+            <a:pPr algn="l" indent="0" marL="0">
+              <a:lnSpc>
+                <a:spcPts val="1620"/>
+              </a:lnSpc>
+              <a:spcAft>
+                <a:spcPts val="300"/>
+              </a:spcAft>
+              <a:buNone/>
+            </a:pPr>
+            <a:r>
+              <a:rPr lang="en-US" sz="1200" b="1" dirty="0">
+                <a:solidFill>
+                  <a:srgbClr val="1C2833"/>
+                </a:solidFill>
+                <a:latin typeface="Arial" pitchFamily="34" charset="0"/>
+                <a:ea typeface="Arial" pitchFamily="34" charset="-122"/>
+                <a:cs typeface="Arial" pitchFamily="34" charset="-120"/>
+              </a:rPr>
+              <a:t>3</a:t>
+            </a:r>
+            <a:endParaRPr lang="en-US" sz="1200" dirty="0"/>
+          </a:p>
+        </p:txBody>
+      </p:sp>
+      <p:sp>
+        <p:nvSpPr>
+          <p:cNvPr id="5" name="Text 3"/>
+          <p:cNvSpPr/>
+          <p:nvPr/>
+        </p:nvSpPr>
+        <p:spPr>
+          <a:xfrm>
+            <a:off x="634901" y="2272605"/>
+            <a:ext cx="8102798" cy="281880"/>
+          </a:xfrm>
+          <a:prstGeom prst="rect">
+            <a:avLst/>
+          </a:prstGeom>
+          <a:noFill/>
+          <a:ln/>
+        </p:spPr>
+        <p:txBody>
+          <a:bodyPr wrap="square" lIns="0" tIns="0" rIns="0" bIns="0" rtlCol="0" anchor="t"/>
+          <a:lstStyle/>
+          <a:p>
+            <a:pPr algn="l" marL="342900" indent="-342900">
+              <a:lnSpc>
+                <a:spcPts val="1620"/>
+              </a:lnSpc>
+              <a:spcAft>
+                <a:spcPts val="300"/>
+              </a:spcAft>
+              <a:buSzPct val="100000"/>
+              <a:buChar char="•"/>
+            </a:pPr>
+            <a:r>
+              <a:rPr lang="en-US" sz="1200" dirty="0">
+                <a:solidFill>
+                  <a:srgbClr val="1C2833"/>
+                </a:solidFill>
+                <a:latin typeface="Arial" pitchFamily="34" charset="0"/>
+                <a:ea typeface="Arial" pitchFamily="34" charset="-122"/>
+                <a:cs typeface="Arial" pitchFamily="34" charset="-120"/>
+              </a:rPr>
+              <a:t>Read the answer top-to-bottom: </a:t>
+            </a:r>
+            <a:pPr algn="l" indent="0" marL="0">
+              <a:lnSpc>
+                <a:spcPts val="1620"/>
+              </a:lnSpc>
+              <a:spcAft>
+                <a:spcPts val="300"/>
+              </a:spcAft>
+              <a:buNone/>
+            </a:pPr>
+            <a:r>
+              <a:rPr lang="en-US" sz="1200" b="1" dirty="0">
+                <a:solidFill>
+                  <a:srgbClr val="1C2833"/>
+                </a:solidFill>
+                <a:latin typeface="Arial" pitchFamily="34" charset="0"/>
+                <a:ea typeface="Arial" pitchFamily="34" charset="-122"/>
+                <a:cs typeface="Arial" pitchFamily="34" charset="-120"/>
+              </a:rPr>
+              <a:t>5433</a:t>
+            </a:r>
+            <a:pPr algn="l" indent="0" marL="0">
+              <a:lnSpc>
+                <a:spcPts val="1620"/>
+              </a:lnSpc>
+              <a:spcAft>
+                <a:spcPts val="300"/>
+              </a:spcAft>
+              <a:buNone/>
+            </a:pPr>
+            <a:r>
+              <a:rPr lang="en-US" sz="1200" dirty="0">
+                <a:solidFill>
+                  <a:srgbClr val="1C2833"/>
+                </a:solidFill>
+                <a:latin typeface="Arial" pitchFamily="34" charset="0"/>
+                <a:ea typeface="Arial" pitchFamily="34" charset="-122"/>
+                <a:cs typeface="Arial" pitchFamily="34" charset="-120"/>
+              </a:rPr>
+              <a:t>.</a:t>
+            </a:r>
+            <a:endParaRPr lang="en-US" sz="1200" dirty="0"/>
+          </a:p>
+        </p:txBody>
       </p:sp>
       <p:sp>
         <p:nvSpPr>
           <p:cNvPr id="6" name="Text 4"/>
-          <p:cNvSpPr/>
-          <p:nvPr/>
-        </p:nvSpPr>
-        <p:spPr>
-          <a:xfrm>
-            <a:off x="692051" y="1074093"/>
-            <a:ext cx="7973389" cy="230981"/>
-          </a:xfrm>
-          <a:prstGeom prst="rect">
-            <a:avLst/>
-          </a:prstGeom>
-          <a:noFill/>
-          <a:ln/>
-        </p:spPr>
-        <p:txBody>
-          <a:bodyPr wrap="square" lIns="0" tIns="0" rIns="0" bIns="0" rtlCol="0" anchor="t"/>
-          <a:lstStyle/>
-          <a:p>
-            <a:pPr algn="l" indent="0" marL="0">
-              <a:lnSpc>
-                <a:spcPts val="1820"/>
-              </a:lnSpc>
-              <a:spcBef>
-                <a:spcPts val="300"/>
-              </a:spcBef>
-              <a:spcAft>
-                <a:spcPts val="300"/>
-              </a:spcAft>
-              <a:buNone/>
-            </a:pPr>
-            <a:r>
-              <a:rPr lang="en-US" sz="1300" b="1" i="1" dirty="0">
-                <a:solidFill>
-                  <a:srgbClr val="1C2833"/>
-                </a:solidFill>
-                <a:latin typeface="Georgia" pitchFamily="34" charset="0"/>
-                <a:ea typeface="Georgia" pitchFamily="34" charset="-122"/>
-                <a:cs typeface="Georgia" pitchFamily="34" charset="-120"/>
-              </a:rPr>
-              <a:t>The Nikhilam Sūtra</a:t>
-            </a:r>
-            <a:endParaRPr lang="en-US" sz="1300" dirty="0"/>
-          </a:p>
-        </p:txBody>
-      </p:sp>
-      <p:sp>
-        <p:nvSpPr>
-          <p:cNvPr id="7" name="Text 5"/>
-          <p:cNvSpPr/>
-          <p:nvPr/>
-        </p:nvSpPr>
-        <p:spPr>
-          <a:xfrm>
-            <a:off x="692051" y="1343174"/>
-            <a:ext cx="7973389" cy="230981"/>
-          </a:xfrm>
-          <a:prstGeom prst="rect">
-            <a:avLst/>
-          </a:prstGeom>
-          <a:noFill/>
-          <a:ln/>
-        </p:spPr>
-        <p:txBody>
-          <a:bodyPr wrap="square" lIns="0" tIns="0" rIns="0" bIns="0" rtlCol="0" anchor="t"/>
-          <a:lstStyle/>
-          <a:p>
-            <a:pPr algn="l" indent="0" marL="0">
-              <a:lnSpc>
-                <a:spcPts val="1820"/>
-              </a:lnSpc>
-              <a:spcBef>
-                <a:spcPts val="300"/>
-              </a:spcBef>
-              <a:spcAft>
-                <a:spcPts val="300"/>
-              </a:spcAft>
-              <a:buNone/>
-            </a:pPr>
-            <a:r>
-              <a:rPr lang="en-US" sz="1300" i="1" dirty="0">
-                <a:solidFill>
-                  <a:srgbClr val="1C2833"/>
-                </a:solidFill>
-                <a:latin typeface="Georgia" pitchFamily="34" charset="0"/>
-                <a:ea typeface="Georgia" pitchFamily="34" charset="-122"/>
-                <a:cs typeface="Georgia" pitchFamily="34" charset="-120"/>
-              </a:rPr>
-              <a:t>Nikhilaṁ Navataścaramaṁ Daśataḥ</a:t>
-            </a:r>
-            <a:pPr algn="l" indent="0" marL="0">
-              <a:lnSpc>
-                <a:spcPts val="1820"/>
-              </a:lnSpc>
-              <a:spcBef>
-                <a:spcPts val="300"/>
-              </a:spcBef>
-              <a:spcAft>
-                <a:spcPts val="300"/>
-              </a:spcAft>
-              <a:buNone/>
-            </a:pPr>
-            <a:r>
-              <a:rPr lang="en-US" sz="1300" dirty="0">
-                <a:solidFill>
-                  <a:srgbClr val="1C2833"/>
-                </a:solidFill>
-                <a:latin typeface="Georgia" pitchFamily="34" charset="0"/>
-                <a:ea typeface="Georgia" pitchFamily="34" charset="-122"/>
-                <a:cs typeface="Georgia" pitchFamily="34" charset="-120"/>
-              </a:rPr>
-              <a:t> — "all from nine and the last from ten."</a:t>
-            </a:r>
-            <a:endParaRPr lang="en-US" sz="1300" dirty="0"/>
-          </a:p>
-        </p:txBody>
-      </p:sp>
-      <p:sp>
-        <p:nvSpPr>
-          <p:cNvPr id="8" name="Text 6"/>
-          <p:cNvSpPr/>
-          <p:nvPr/>
-        </p:nvSpPr>
-        <p:spPr>
-          <a:xfrm>
-            <a:off x="692051" y="1612255"/>
-            <a:ext cx="7973389" cy="461963"/>
-          </a:xfrm>
-          <a:prstGeom prst="rect">
-            <a:avLst/>
-          </a:prstGeom>
-          <a:noFill/>
-          <a:ln/>
-        </p:spPr>
-        <p:txBody>
-          <a:bodyPr wrap="square" lIns="0" tIns="0" rIns="0" bIns="0" rtlCol="0" anchor="t"/>
-          <a:lstStyle/>
-          <a:p>
-            <a:pPr algn="l" indent="0" marL="0">
-              <a:lnSpc>
-                <a:spcPts val="1820"/>
-              </a:lnSpc>
-              <a:spcBef>
-                <a:spcPts val="300"/>
-              </a:spcBef>
-              <a:spcAft>
-                <a:spcPts val="300"/>
-              </a:spcAft>
-              <a:buNone/>
-            </a:pPr>
-            <a:r>
-              <a:rPr lang="en-US" sz="1300" dirty="0">
-                <a:solidFill>
-                  <a:srgbClr val="1C2833"/>
-                </a:solidFill>
-                <a:latin typeface="Georgia" pitchFamily="34" charset="0"/>
-                <a:ea typeface="Georgia" pitchFamily="34" charset="-122"/>
-                <a:cs typeface="Georgia" pitchFamily="34" charset="-120"/>
-              </a:rPr>
-              <a:t>To subtract from 10, 100, 1000, 10 000, …: 1. Subtract each digit </a:t>
-            </a:r>
-            <a:pPr algn="l" indent="0" marL="0">
-              <a:lnSpc>
-                <a:spcPts val="1820"/>
-              </a:lnSpc>
-              <a:spcBef>
-                <a:spcPts val="300"/>
-              </a:spcBef>
-              <a:spcAft>
-                <a:spcPts val="300"/>
-              </a:spcAft>
-              <a:buNone/>
-            </a:pPr>
-            <a:r>
-              <a:rPr lang="en-US" sz="1300" i="1" dirty="0">
-                <a:solidFill>
-                  <a:srgbClr val="1C2833"/>
-                </a:solidFill>
-                <a:latin typeface="Georgia" pitchFamily="34" charset="0"/>
-                <a:ea typeface="Georgia" pitchFamily="34" charset="-122"/>
-                <a:cs typeface="Georgia" pitchFamily="34" charset="-120"/>
-              </a:rPr>
-              <a:t>from 9</a:t>
-            </a:r>
-            <a:pPr algn="l" indent="0" marL="0">
-              <a:lnSpc>
-                <a:spcPts val="1820"/>
-              </a:lnSpc>
-              <a:spcBef>
-                <a:spcPts val="300"/>
-              </a:spcBef>
-              <a:spcAft>
-                <a:spcPts val="300"/>
-              </a:spcAft>
-              <a:buNone/>
-            </a:pPr>
-            <a:r>
-              <a:rPr lang="en-US" sz="1300" dirty="0">
-                <a:solidFill>
-                  <a:srgbClr val="1C2833"/>
-                </a:solidFill>
-                <a:latin typeface="Georgia" pitchFamily="34" charset="0"/>
-                <a:ea typeface="Georgia" pitchFamily="34" charset="-122"/>
-                <a:cs typeface="Georgia" pitchFamily="34" charset="-120"/>
-              </a:rPr>
-              <a:t>, </a:t>
-            </a:r>
-            <a:pPr algn="l" indent="0" marL="0">
-              <a:lnSpc>
-                <a:spcPts val="1820"/>
-              </a:lnSpc>
-              <a:spcBef>
-                <a:spcPts val="300"/>
-              </a:spcBef>
-              <a:spcAft>
-                <a:spcPts val="300"/>
-              </a:spcAft>
-              <a:buNone/>
-            </a:pPr>
-            <a:r>
-              <a:rPr lang="en-US" sz="1300" b="1" i="1" dirty="0">
-                <a:solidFill>
-                  <a:srgbClr val="1C2833"/>
-                </a:solidFill>
-                <a:latin typeface="Georgia" pitchFamily="34" charset="0"/>
-                <a:ea typeface="Georgia" pitchFamily="34" charset="-122"/>
-                <a:cs typeface="Georgia" pitchFamily="34" charset="-120"/>
-              </a:rPr>
-              <a:t>except the last digit</a:t>
-            </a:r>
-            <a:pPr algn="l" indent="0" marL="0">
-              <a:lnSpc>
-                <a:spcPts val="1820"/>
-              </a:lnSpc>
-              <a:spcBef>
-                <a:spcPts val="300"/>
-              </a:spcBef>
-              <a:spcAft>
-                <a:spcPts val="300"/>
-              </a:spcAft>
-              <a:buNone/>
-            </a:pPr>
-            <a:r>
-              <a:rPr lang="en-US" sz="1300" dirty="0">
-                <a:solidFill>
-                  <a:srgbClr val="1C2833"/>
-                </a:solidFill>
-                <a:latin typeface="Georgia" pitchFamily="34" charset="0"/>
-                <a:ea typeface="Georgia" pitchFamily="34" charset="-122"/>
-                <a:cs typeface="Georgia" pitchFamily="34" charset="-120"/>
-              </a:rPr>
-              <a:t> — subtract it </a:t>
-            </a:r>
-            <a:pPr algn="l" indent="0" marL="0">
-              <a:lnSpc>
-                <a:spcPts val="1820"/>
-              </a:lnSpc>
-              <a:spcBef>
-                <a:spcPts val="300"/>
-              </a:spcBef>
-              <a:spcAft>
-                <a:spcPts val="300"/>
-              </a:spcAft>
-              <a:buNone/>
-            </a:pPr>
-            <a:r>
-              <a:rPr lang="en-US" sz="1300" i="1" dirty="0">
-                <a:solidFill>
-                  <a:srgbClr val="1C2833"/>
-                </a:solidFill>
-                <a:latin typeface="Georgia" pitchFamily="34" charset="0"/>
-                <a:ea typeface="Georgia" pitchFamily="34" charset="-122"/>
-                <a:cs typeface="Georgia" pitchFamily="34" charset="-120"/>
-              </a:rPr>
-              <a:t>from 10</a:t>
-            </a:r>
-            <a:pPr algn="l" indent="0" marL="0">
-              <a:lnSpc>
-                <a:spcPts val="1820"/>
-              </a:lnSpc>
-              <a:spcBef>
-                <a:spcPts val="300"/>
-              </a:spcBef>
-              <a:spcAft>
-                <a:spcPts val="300"/>
-              </a:spcAft>
-              <a:buNone/>
-            </a:pPr>
-            <a:r>
-              <a:rPr lang="en-US" sz="1300" dirty="0">
-                <a:solidFill>
-                  <a:srgbClr val="1C2833"/>
-                </a:solidFill>
-                <a:latin typeface="Georgia" pitchFamily="34" charset="0"/>
-                <a:ea typeface="Georgia" pitchFamily="34" charset="-122"/>
-                <a:cs typeface="Georgia" pitchFamily="34" charset="-120"/>
-              </a:rPr>
-              <a:t>. 2. Read the answer top-to-bottom. 3. Verify: original + answer = the round base.</a:t>
-            </a:r>
-            <a:endParaRPr lang="en-US" sz="1300" dirty="0"/>
-          </a:p>
-        </p:txBody>
-      </p:sp>
-      <p:sp>
-        <p:nvSpPr>
-          <p:cNvPr id="9" name="Text 7"/>
-          <p:cNvSpPr/>
-          <p:nvPr/>
-        </p:nvSpPr>
-        <p:spPr>
-          <a:xfrm>
-            <a:off x="692051" y="2112318"/>
-            <a:ext cx="7973389" cy="230981"/>
-          </a:xfrm>
-          <a:prstGeom prst="rect">
-            <a:avLst/>
-          </a:prstGeom>
-          <a:noFill/>
-          <a:ln/>
-        </p:spPr>
-        <p:txBody>
-          <a:bodyPr wrap="square" lIns="0" tIns="0" rIns="0" bIns="0" rtlCol="0" anchor="t"/>
-          <a:lstStyle/>
-          <a:p>
-            <a:pPr algn="l" indent="0" marL="0">
-              <a:lnSpc>
-                <a:spcPts val="1820"/>
-              </a:lnSpc>
-              <a:spcBef>
-                <a:spcPts val="300"/>
-              </a:spcBef>
-              <a:spcAft>
-                <a:spcPts val="300"/>
-              </a:spcAft>
-              <a:buNone/>
-            </a:pPr>
-            <a:r>
-              <a:rPr lang="en-US" sz="1300" i="1" dirty="0">
-                <a:solidFill>
-                  <a:srgbClr val="1C2833"/>
-                </a:solidFill>
-                <a:latin typeface="Georgia" pitchFamily="34" charset="0"/>
-                <a:ea typeface="Georgia" pitchFamily="34" charset="-122"/>
-                <a:cs typeface="Georgia" pitchFamily="34" charset="-120"/>
-              </a:rPr>
-              <a:t>No borrowing. Ever.</a:t>
-            </a:r>
-            <a:endParaRPr lang="en-US" sz="1300" dirty="0"/>
-          </a:p>
-        </p:txBody>
-      </p:sp>
-      <p:sp>
-        <p:nvSpPr>
-          <p:cNvPr id="10" name="Text 8"/>
-          <p:cNvSpPr/>
-          <p:nvPr/>
-        </p:nvSpPr>
-        <p:spPr>
-          <a:xfrm>
-            <a:off x="692051" y="2381399"/>
-            <a:ext cx="7973389" cy="461963"/>
-          </a:xfrm>
-          <a:prstGeom prst="rect">
-            <a:avLst/>
-          </a:prstGeom>
-          <a:noFill/>
-          <a:ln/>
-        </p:spPr>
-        <p:txBody>
-          <a:bodyPr wrap="square" lIns="0" tIns="0" rIns="0" bIns="0" rtlCol="0" anchor="t"/>
-          <a:lstStyle/>
-          <a:p>
-            <a:pPr algn="l" indent="0" marL="0">
-              <a:lnSpc>
-                <a:spcPts val="1820"/>
-              </a:lnSpc>
-              <a:spcBef>
-                <a:spcPts val="300"/>
-              </a:spcBef>
-              <a:spcAft>
-                <a:spcPts val="300"/>
-              </a:spcAft>
-              <a:buNone/>
-            </a:pPr>
-            <a:r>
-              <a:rPr lang="en-US" sz="1300" i="1" dirty="0">
-                <a:solidFill>
-                  <a:srgbClr val="1C2833"/>
-                </a:solidFill>
-                <a:latin typeface="Georgia" pitchFamily="34" charset="0"/>
-                <a:ea typeface="Georgia" pitchFamily="34" charset="-122"/>
-                <a:cs typeface="Georgia" pitchFamily="34" charset="-120"/>
-              </a:rPr>
-              <a:t>Today's baseline: - My time with my normal method = _____ seconds - My time with Nikhilam (first try) = _____ seconds</a:t>
-            </a:r>
-            <a:endParaRPr lang="en-US" sz="1300" dirty="0"/>
-          </a:p>
-        </p:txBody>
-      </p:sp>
-      <p:sp>
-        <p:nvSpPr>
-          <p:cNvPr id="11" name="Text 9"/>
-          <p:cNvSpPr/>
-          <p:nvPr/>
-        </p:nvSpPr>
-        <p:spPr>
-          <a:xfrm>
-            <a:off x="692051" y="2881461"/>
-            <a:ext cx="7973389" cy="230981"/>
-          </a:xfrm>
-          <a:prstGeom prst="rect">
-            <a:avLst/>
-          </a:prstGeom>
-          <a:noFill/>
-          <a:ln/>
-        </p:spPr>
-        <p:txBody>
-          <a:bodyPr wrap="square" lIns="0" tIns="0" rIns="0" bIns="0" rtlCol="0" anchor="t"/>
-          <a:lstStyle/>
-          <a:p>
-            <a:pPr algn="l" indent="0" marL="0">
-              <a:lnSpc>
-                <a:spcPts val="1820"/>
-              </a:lnSpc>
-              <a:spcBef>
-                <a:spcPts val="300"/>
-              </a:spcBef>
-              <a:spcAft>
-                <a:spcPts val="300"/>
-              </a:spcAft>
-              <a:buNone/>
-            </a:pPr>
-            <a:r>
-              <a:rPr lang="en-US" sz="1300" i="1" dirty="0">
-                <a:solidFill>
-                  <a:srgbClr val="1C2833"/>
-                </a:solidFill>
-                <a:latin typeface="Georgia" pitchFamily="34" charset="0"/>
-                <a:ea typeface="Georgia" pitchFamily="34" charset="-122"/>
-                <a:cs typeface="Georgia" pitchFamily="34" charset="-120"/>
-              </a:rPr>
-              <a:t>I expect the second number to drop by Day 5.</a:t>
-            </a:r>
-            <a:endParaRPr lang="en-US" sz="1300" dirty="0"/>
-          </a:p>
-        </p:txBody>
-      </p:sp>
-      <p:sp>
-        <p:nvSpPr>
-          <p:cNvPr id="12" name="Text 10"/>
           <p:cNvSpPr/>
           <p:nvPr/>
         </p:nvSpPr>
@@ -3532,7 +3632,7 @@
         <p:spPr>
           <a:xfrm>
             <a:off x="406301" y="457051"/>
-            <a:ext cx="8498026" cy="274290"/>
+            <a:ext cx="8498026" cy="548580"/>
           </a:xfrm>
           <a:prstGeom prst="rect">
             <a:avLst/>
@@ -3565,7 +3665,7 @@
                 <a:ea typeface="Georgia" pitchFamily="34" charset="-122"/>
                 <a:cs typeface="Georgia" pitchFamily="34" charset="-120"/>
               </a:rPr>
-              <a:t>Homework</a:t>
+              <a:t>Teacher demonstration (12 min) — the same baseline problem, the Nikhilam way (cont.)</a:t>
             </a:r>
             <a:endParaRPr lang="en-US" sz="1800" dirty="0"/>
           </a:p>
@@ -3579,8 +3679,8 @@
         </p:nvSpPr>
         <p:spPr>
           <a:xfrm>
-            <a:off x="406301" y="870942"/>
-            <a:ext cx="8498026" cy="426541"/>
+            <a:off x="634901" y="1157883"/>
+            <a:ext cx="8102798" cy="281880"/>
           </a:xfrm>
           <a:prstGeom prst="rect">
             <a:avLst/>
@@ -3592,13 +3692,31 @@
           <a:bodyPr wrap="square" lIns="0" tIns="0" rIns="0" bIns="0" rtlCol="0" anchor="t"/>
           <a:lstStyle/>
           <a:p>
-            <a:pPr algn="l" indent="0" marL="0">
-              <a:lnSpc>
-                <a:spcPts val="1680"/>
-              </a:lnSpc>
-              <a:spcBef>
-                <a:spcPts val="300"/>
-              </a:spcBef>
+            <a:pPr algn="l" marL="342900" indent="-342900">
+              <a:lnSpc>
+                <a:spcPts val="1620"/>
+              </a:lnSpc>
+              <a:spcAft>
+                <a:spcPts val="300"/>
+              </a:spcAft>
+              <a:buSzPct val="100000"/>
+              <a:buChar char="•"/>
+            </a:pPr>
+            <a:r>
+              <a:rPr lang="en-US" sz="1200" b="1" dirty="0">
+                <a:solidFill>
+                  <a:srgbClr val="1C2833"/>
+                </a:solidFill>
+                <a:latin typeface="Arial" pitchFamily="34" charset="0"/>
+                <a:ea typeface="Arial" pitchFamily="34" charset="-122"/>
+                <a:cs typeface="Arial" pitchFamily="34" charset="-120"/>
+              </a:rPr>
+              <a:t>Verify</a:t>
+            </a:r>
+            <a:pPr algn="l" indent="0" marL="0">
+              <a:lnSpc>
+                <a:spcPts val="1620"/>
+              </a:lnSpc>
               <a:spcAft>
                 <a:spcPts val="300"/>
               </a:spcAft>
@@ -3613,7 +3731,7 @@
                 <a:ea typeface="Arial" pitchFamily="34" charset="-122"/>
                 <a:cs typeface="Arial" pitchFamily="34" charset="-120"/>
               </a:rPr>
-              <a:t>– Memorise the sūtra. Be able to say it from memory tomorrow. – Practice: find the complement of these 2-digit numbers to 100:   – 73, 41, 28, 86, 95, 17, 60, 52, 34, 89.   – Time yourself. Aim for under 30 seconds for all ten.</a:t>
+              <a:t> (with the class): 4567 + 5433 = 10 000. ✓</a:t>
             </a:r>
             <a:endParaRPr lang="en-US" sz="1200" dirty="0"/>
           </a:p>
@@ -3622,6 +3740,52 @@
       <p:sp>
         <p:nvSpPr>
           <p:cNvPr id="5" name="Text 3"/>
+          <p:cNvSpPr/>
+          <p:nvPr/>
+        </p:nvSpPr>
+        <p:spPr>
+          <a:xfrm>
+            <a:off x="634901" y="1541264"/>
+            <a:ext cx="8102798" cy="487561"/>
+          </a:xfrm>
+          <a:prstGeom prst="rect">
+            <a:avLst/>
+          </a:prstGeom>
+          <a:noFill/>
+          <a:ln/>
+        </p:spPr>
+        <p:txBody>
+          <a:bodyPr wrap="square" lIns="0" tIns="0" rIns="0" bIns="0" rtlCol="0" anchor="t"/>
+          <a:lstStyle/>
+          <a:p>
+            <a:pPr algn="l" marL="342900" indent="-342900">
+              <a:lnSpc>
+                <a:spcPts val="1620"/>
+              </a:lnSpc>
+              <a:spcAft>
+                <a:spcPts val="300"/>
+              </a:spcAft>
+              <a:buSzPct val="100000"/>
+              <a:buChar char="•"/>
+            </a:pPr>
+            <a:r>
+              <a:rPr lang="en-US" sz="1200" i="1" dirty="0">
+                <a:solidFill>
+                  <a:srgbClr val="1C2833"/>
+                </a:solidFill>
+                <a:latin typeface="Arial" pitchFamily="34" charset="0"/>
+                <a:ea typeface="Arial" pitchFamily="34" charset="-122"/>
+                <a:cs typeface="Arial" pitchFamily="34" charset="-120"/>
+              </a:rPr>
+              <a:t>"Notice — I never borrowed. Not once. The 'all from nine' rule means we're always subtracting from 9, which is bigger than any single digit."</a:t>
+            </a:r>
+            <a:endParaRPr lang="en-US" sz="1200" dirty="0"/>
+          </a:p>
+        </p:txBody>
+      </p:sp>
+      <p:sp>
+        <p:nvSpPr>
+          <p:cNvPr id="6" name="Text 4"/>
           <p:cNvSpPr/>
           <p:nvPr/>
         </p:nvSpPr>
@@ -3771,7 +3935,7 @@
                 <a:ea typeface="Georgia" pitchFamily="34" charset="-122"/>
                 <a:cs typeface="Georgia" pitchFamily="34" charset="-120"/>
               </a:rPr>
-              <a:t>Differentiation</a:t>
+              <a:t>Activity (10 min) — First try</a:t>
             </a:r>
             <a:endParaRPr lang="en-US" sz="1800" dirty="0"/>
           </a:p>
@@ -3786,7 +3950,7 @@
         <p:spPr>
           <a:xfrm>
             <a:off x="634901" y="883593"/>
-            <a:ext cx="8102798" cy="544711"/>
+            <a:ext cx="8102798" cy="994172"/>
           </a:xfrm>
           <a:prstGeom prst="rect">
             <a:avLst/>
@@ -3809,15 +3973,15 @@
               <a:buChar char="•"/>
             </a:pPr>
             <a:r>
-              <a:rPr lang="en-US" sz="1200" b="1" dirty="0">
-                <a:solidFill>
-                  <a:srgbClr val="1C2833"/>
-                </a:solidFill>
-                <a:latin typeface="Arial" pitchFamily="34" charset="0"/>
-                <a:ea typeface="Arial" pitchFamily="34" charset="-122"/>
-                <a:cs typeface="Arial" pitchFamily="34" charset="-120"/>
-              </a:rPr>
-              <a:t>Tier up:</a:t>
+              <a:rPr lang="en-US" sz="1200" dirty="0">
+                <a:solidFill>
+                  <a:srgbClr val="1C2833"/>
+                </a:solidFill>
+                <a:latin typeface="Arial" pitchFamily="34" charset="0"/>
+                <a:ea typeface="Arial" pitchFamily="34" charset="-122"/>
+                <a:cs typeface="Arial" pitchFamily="34" charset="-120"/>
+              </a:rPr>
+              <a:t>Students re-do the same problem (</a:t>
             </a:r>
             <a:pPr algn="l" indent="0" marL="0">
               <a:lnSpc>
@@ -3837,7 +4001,7 @@
                 <a:ea typeface="Arial" pitchFamily="34" charset="-122"/>
                 <a:cs typeface="Arial" pitchFamily="34" charset="-120"/>
               </a:rPr>
-              <a:t> Try Nikhilam on </a:t>
+              <a:t>10 000 − 4567</a:t>
             </a:r>
             <a:pPr algn="l" indent="0" marL="0">
               <a:lnSpc>
@@ -3857,27 +4021,7 @@
                 <a:ea typeface="Arial" pitchFamily="34" charset="-122"/>
                 <a:cs typeface="Arial" pitchFamily="34" charset="-120"/>
               </a:rPr>
-              <a:t>100 000 − 23 456</a:t>
-            </a:r>
-            <a:pPr algn="l" indent="0" marL="0">
-              <a:lnSpc>
-                <a:spcPts val="1620"/>
-              </a:lnSpc>
-              <a:spcAft>
-                <a:spcPts val="300"/>
-              </a:spcAft>
-              <a:buNone/>
-            </a:pPr>
-            <a:r>
-              <a:rPr lang="en-US" sz="1200" dirty="0">
-                <a:solidFill>
-                  <a:srgbClr val="1C2833"/>
-                </a:solidFill>
-                <a:latin typeface="Arial" pitchFamily="34" charset="0"/>
-                <a:ea typeface="Arial" pitchFamily="34" charset="-122"/>
-                <a:cs typeface="Arial" pitchFamily="34" charset="-120"/>
-              </a:rPr>
-              <a:t>. Time it.</a:t>
+              <a:t>) on the back of their baseline sheet, using the Nikhilam rule. Refer to the wall poster.</a:t>
             </a:r>
             <a:endParaRPr lang="en-US" sz="1200" dirty="0"/>
           </a:p>
@@ -3893,24 +4037,28 @@
               <a:buChar char="•"/>
             </a:pPr>
             <a:r>
-              <a:rPr lang="en-US" sz="1200" b="1" dirty="0">
-                <a:solidFill>
-                  <a:srgbClr val="1C2833"/>
-                </a:solidFill>
-                <a:latin typeface="Arial" pitchFamily="34" charset="0"/>
-                <a:ea typeface="Arial" pitchFamily="34" charset="-122"/>
-                <a:cs typeface="Arial" pitchFamily="34" charset="-120"/>
-              </a:rPr>
-              <a:t>Tier down:</a:t>
-            </a:r>
-            <a:pPr algn="l" indent="0" marL="0">
+              <a:rPr lang="en-US" sz="1200" dirty="0">
+                <a:solidFill>
+                  <a:srgbClr val="1C2833"/>
+                </a:solidFill>
+                <a:latin typeface="Arial" pitchFamily="34" charset="0"/>
+                <a:ea typeface="Arial" pitchFamily="34" charset="-122"/>
+                <a:cs typeface="Arial" pitchFamily="34" charset="-120"/>
+              </a:rPr>
+              <a:t>Time themselves again.</a:t>
+            </a:r>
+            <a:endParaRPr lang="en-US" sz="1200" dirty="0"/>
+          </a:p>
+          <a:p>
+            <a:pPr algn="l" marL="342900" indent="-342900">
               <a:lnSpc>
                 <a:spcPts val="1620"/>
               </a:lnSpc>
               <a:spcAft>
                 <a:spcPts val="300"/>
               </a:spcAft>
-              <a:buNone/>
+              <a:buSzPct val="100000"/>
+              <a:buChar char="•"/>
             </a:pPr>
             <a:r>
               <a:rPr lang="en-US" sz="1200" dirty="0">
@@ -3921,7 +4069,7 @@
                 <a:ea typeface="Arial" pitchFamily="34" charset="-122"/>
                 <a:cs typeface="Arial" pitchFamily="34" charset="-120"/>
               </a:rPr>
-              <a:t> If the 4-digit problem feels overwhelming, drill complements to 100 (2-digit numbers) for the activity instead.</a:t>
+              <a:t>Compare: how much slower (or faster) was the Nikhilam method on the FIRST try?</a:t>
             </a:r>
             <a:endParaRPr lang="en-US" sz="1200" dirty="0"/>
           </a:p>
@@ -4079,7 +4227,7 @@
                 <a:ea typeface="Georgia" pitchFamily="34" charset="-122"/>
                 <a:cs typeface="Georgia" pitchFamily="34" charset="-120"/>
               </a:rPr>
-              <a:t>Teacher notes</a:t>
+              <a:t>Wrap-up (5 min)</a:t>
             </a:r>
             <a:endParaRPr lang="en-US" sz="1800" dirty="0"/>
           </a:p>
@@ -4093,8 +4241,8 @@
         </p:nvSpPr>
         <p:spPr>
           <a:xfrm>
-            <a:off x="406301" y="870942"/>
-            <a:ext cx="8498026" cy="1066354"/>
+            <a:off x="634901" y="883593"/>
+            <a:ext cx="8102798" cy="975122"/>
           </a:xfrm>
           <a:prstGeom prst="rect">
             <a:avLst/>
@@ -4106,17 +4254,15 @@
           <a:bodyPr wrap="square" lIns="0" tIns="0" rIns="0" bIns="0" rtlCol="0" anchor="t"/>
           <a:lstStyle/>
           <a:p>
-            <a:pPr algn="l" indent="0" marL="0">
-              <a:lnSpc>
-                <a:spcPts val="1680"/>
-              </a:lnSpc>
-              <a:spcBef>
-                <a:spcPts val="300"/>
-              </a:spcBef>
-              <a:spcAft>
-                <a:spcPts val="300"/>
-              </a:spcAft>
-              <a:buNone/>
+            <a:pPr algn="l" marL="342900" indent="-342900">
+              <a:lnSpc>
+                <a:spcPts val="1620"/>
+              </a:lnSpc>
+              <a:spcAft>
+                <a:spcPts val="300"/>
+              </a:spcAft>
+              <a:buSzPct val="100000"/>
+              <a:buChar char="•"/>
             </a:pPr>
             <a:r>
               <a:rPr lang="en-US" sz="1200" dirty="0">
@@ -4127,15 +4273,36 @@
                 <a:ea typeface="Arial" pitchFamily="34" charset="-122"/>
                 <a:cs typeface="Arial" pitchFamily="34" charset="-120"/>
               </a:rPr>
-              <a:t>– The baseline time is the </a:t>
-            </a:r>
-            <a:pPr algn="l" indent="0" marL="0">
-              <a:lnSpc>
-                <a:spcPts val="1680"/>
-              </a:lnSpc>
-              <a:spcBef>
-                <a:spcPts val="300"/>
-              </a:spcBef>
+              <a:t>Show of hands: who was faster with Nikhilam on first try? Who was slower? (Most will be slower — that's expected. Practice fixes it.)</a:t>
+            </a:r>
+            <a:endParaRPr lang="en-US" sz="1200" dirty="0"/>
+          </a:p>
+          <a:p>
+            <a:pPr algn="l" marL="342900" indent="-342900">
+              <a:lnSpc>
+                <a:spcPts val="1620"/>
+              </a:lnSpc>
+              <a:spcAft>
+                <a:spcPts val="300"/>
+              </a:spcAft>
+              <a:buSzPct val="100000"/>
+              <a:buChar char="•"/>
+            </a:pPr>
+            <a:r>
+              <a:rPr lang="en-US" sz="1200" dirty="0">
+                <a:solidFill>
+                  <a:srgbClr val="1C2833"/>
+                </a:solidFill>
+                <a:latin typeface="Arial" pitchFamily="34" charset="0"/>
+                <a:ea typeface="Arial" pitchFamily="34" charset="-122"/>
+                <a:cs typeface="Arial" pitchFamily="34" charset="-120"/>
+              </a:rPr>
+              <a:t>Preview Day 2: </a:t>
+            </a:r>
+            <a:pPr algn="l" indent="0" marL="0">
+              <a:lnSpc>
+                <a:spcPts val="1620"/>
+              </a:lnSpc>
               <a:spcAft>
                 <a:spcPts val="300"/>
               </a:spcAft>
@@ -4150,19 +4317,20 @@
                 <a:ea typeface="Arial" pitchFamily="34" charset="-122"/>
                 <a:cs typeface="Arial" pitchFamily="34" charset="-120"/>
               </a:rPr>
-              <a:t>single most important</a:t>
-            </a:r>
-            <a:pPr algn="l" indent="0" marL="0">
-              <a:lnSpc>
-                <a:spcPts val="1680"/>
-              </a:lnSpc>
-              <a:spcBef>
-                <a:spcPts val="300"/>
-              </a:spcBef>
-              <a:spcAft>
-                <a:spcPts val="300"/>
-              </a:spcAft>
-              <a:buNone/>
+              <a:t>"Tomorrow we drill the foundational skill — finding the complement of a 2-digit number to 100, fast."</a:t>
+            </a:r>
+            <a:endParaRPr lang="en-US" sz="1200" dirty="0"/>
+          </a:p>
+          <a:p>
+            <a:pPr algn="l" marL="342900" indent="-342900">
+              <a:lnSpc>
+                <a:spcPts val="1620"/>
+              </a:lnSpc>
+              <a:spcAft>
+                <a:spcPts val="300"/>
+              </a:spcAft>
+              <a:buSzPct val="100000"/>
+              <a:buChar char="•"/>
             </a:pPr>
             <a:r>
               <a:rPr lang="en-US" sz="1200" dirty="0">
@@ -4173,7 +4341,7 @@
                 <a:ea typeface="Arial" pitchFamily="34" charset="-122"/>
                 <a:cs typeface="Arial" pitchFamily="34" charset="-120"/>
               </a:rPr>
-              <a:t> artefact of Day 1. Make sure every student records it honestly. Day 5's retest depends on it. – Don't promise a specific speedup — say "you'll likely be faster by Day 5; how much depends on you." – The Sanskrit pronunciation is hard. Model it slowly; let students laugh on the first attempt. By Day 5 they'll all say it cleanly. – One paraphrase from Tirthaji that helps: "Nikhilam (निखिलं) means 'whole,' 'entire,' 'all.' Navataḥ means 'from nine.' Caramaṁ means 'the last.' Daśataḥ means 'from ten.' Six words; one method."</a:t>
+              <a:t>Set the wall-poster Sanskrit chant as the daily opener for the next 9 days.</a:t>
             </a:r>
             <a:endParaRPr lang="en-US" sz="1200" dirty="0"/>
           </a:p>
@@ -4331,7 +4499,7 @@
                 <a:ea typeface="Georgia" pitchFamily="34" charset="-122"/>
                 <a:cs typeface="Georgia" pitchFamily="34" charset="-120"/>
               </a:rPr>
-              <a:t>Citation(s) used in this lesson</a:t>
+              <a:t>Student-facing content</a:t>
             </a:r>
             <a:endParaRPr lang="en-US" sz="1800" dirty="0"/>
           </a:p>
@@ -4345,7 +4513,749 @@
         </p:nvSpPr>
         <p:spPr>
           <a:xfrm>
-            <a:off x="406301" y="870942"/>
+            <a:off x="406301" y="883593"/>
+            <a:ext cx="8331398" cy="3302794"/>
+          </a:xfrm>
+          <a:prstGeom prst="rect">
+            <a:avLst/>
+          </a:prstGeom>
+          <a:solidFill>
+            <a:srgbClr val="F4F8F9"/>
+          </a:solidFill>
+          <a:ln/>
+        </p:spPr>
+        <p:txBody>
+          <a:bodyPr wrap="square" rtlCol="0" anchor="ctr"/>
+          <a:lstStyle/>
+          <a:p>
+            <a:pPr indent="0" marL="0">
+              <a:buNone/>
+            </a:pPr>
+            <a:endParaRPr lang="en-US" dirty="0"/>
+          </a:p>
+        </p:txBody>
+      </p:sp>
+      <p:sp>
+        <p:nvSpPr>
+          <p:cNvPr id="5" name="Shape 3"/>
+          <p:cNvSpPr/>
+          <p:nvPr/>
+        </p:nvSpPr>
+        <p:spPr>
+          <a:xfrm>
+            <a:off x="434876" y="883593"/>
+            <a:ext cx="0" cy="3302794"/>
+          </a:xfrm>
+          <a:prstGeom prst="line">
+            <a:avLst/>
+          </a:prstGeom>
+          <a:noFill/>
+          <a:ln w="57150">
+            <a:solidFill>
+              <a:srgbClr val="FE4447"/>
+            </a:solidFill>
+            <a:prstDash val="solid"/>
+          </a:ln>
+        </p:spPr>
+      </p:sp>
+      <p:sp>
+        <p:nvSpPr>
+          <p:cNvPr id="6" name="Text 4"/>
+          <p:cNvSpPr/>
+          <p:nvPr/>
+        </p:nvSpPr>
+        <p:spPr>
+          <a:xfrm>
+            <a:off x="692051" y="1074093"/>
+            <a:ext cx="7973389" cy="230981"/>
+          </a:xfrm>
+          <a:prstGeom prst="rect">
+            <a:avLst/>
+          </a:prstGeom>
+          <a:noFill/>
+          <a:ln/>
+        </p:spPr>
+        <p:txBody>
+          <a:bodyPr wrap="square" lIns="0" tIns="0" rIns="0" bIns="0" rtlCol="0" anchor="t"/>
+          <a:lstStyle/>
+          <a:p>
+            <a:pPr algn="l" indent="0" marL="0">
+              <a:lnSpc>
+                <a:spcPts val="1820"/>
+              </a:lnSpc>
+              <a:spcBef>
+                <a:spcPts val="300"/>
+              </a:spcBef>
+              <a:spcAft>
+                <a:spcPts val="300"/>
+              </a:spcAft>
+              <a:buNone/>
+            </a:pPr>
+            <a:r>
+              <a:rPr lang="en-US" sz="1300" b="1" i="1" dirty="0">
+                <a:solidFill>
+                  <a:srgbClr val="1C2833"/>
+                </a:solidFill>
+                <a:latin typeface="Georgia" pitchFamily="34" charset="0"/>
+                <a:ea typeface="Georgia" pitchFamily="34" charset="-122"/>
+                <a:cs typeface="Georgia" pitchFamily="34" charset="-120"/>
+              </a:rPr>
+              <a:t>The Nikhilam Sūtra</a:t>
+            </a:r>
+            <a:endParaRPr lang="en-US" sz="1300" dirty="0"/>
+          </a:p>
+        </p:txBody>
+      </p:sp>
+      <p:sp>
+        <p:nvSpPr>
+          <p:cNvPr id="7" name="Text 5"/>
+          <p:cNvSpPr/>
+          <p:nvPr/>
+        </p:nvSpPr>
+        <p:spPr>
+          <a:xfrm>
+            <a:off x="692051" y="1343174"/>
+            <a:ext cx="7973389" cy="230981"/>
+          </a:xfrm>
+          <a:prstGeom prst="rect">
+            <a:avLst/>
+          </a:prstGeom>
+          <a:noFill/>
+          <a:ln/>
+        </p:spPr>
+        <p:txBody>
+          <a:bodyPr wrap="square" lIns="0" tIns="0" rIns="0" bIns="0" rtlCol="0" anchor="t"/>
+          <a:lstStyle/>
+          <a:p>
+            <a:pPr algn="l" indent="0" marL="0">
+              <a:lnSpc>
+                <a:spcPts val="1820"/>
+              </a:lnSpc>
+              <a:spcBef>
+                <a:spcPts val="300"/>
+              </a:spcBef>
+              <a:spcAft>
+                <a:spcPts val="300"/>
+              </a:spcAft>
+              <a:buNone/>
+            </a:pPr>
+            <a:r>
+              <a:rPr lang="en-US" sz="1300" i="1" dirty="0">
+                <a:solidFill>
+                  <a:srgbClr val="1C2833"/>
+                </a:solidFill>
+                <a:latin typeface="Georgia" pitchFamily="34" charset="0"/>
+                <a:ea typeface="Georgia" pitchFamily="34" charset="-122"/>
+                <a:cs typeface="Georgia" pitchFamily="34" charset="-120"/>
+              </a:rPr>
+              <a:t>Nikhilaṁ Navataścaramaṁ Daśataḥ</a:t>
+            </a:r>
+            <a:pPr algn="l" indent="0" marL="0">
+              <a:lnSpc>
+                <a:spcPts val="1820"/>
+              </a:lnSpc>
+              <a:spcBef>
+                <a:spcPts val="300"/>
+              </a:spcBef>
+              <a:spcAft>
+                <a:spcPts val="300"/>
+              </a:spcAft>
+              <a:buNone/>
+            </a:pPr>
+            <a:r>
+              <a:rPr lang="en-US" sz="1300" dirty="0">
+                <a:solidFill>
+                  <a:srgbClr val="1C2833"/>
+                </a:solidFill>
+                <a:latin typeface="Georgia" pitchFamily="34" charset="0"/>
+                <a:ea typeface="Georgia" pitchFamily="34" charset="-122"/>
+                <a:cs typeface="Georgia" pitchFamily="34" charset="-120"/>
+              </a:rPr>
+              <a:t> — "all from nine and the last from ten."</a:t>
+            </a:r>
+            <a:endParaRPr lang="en-US" sz="1300" dirty="0"/>
+          </a:p>
+        </p:txBody>
+      </p:sp>
+      <p:sp>
+        <p:nvSpPr>
+          <p:cNvPr id="8" name="Text 6"/>
+          <p:cNvSpPr/>
+          <p:nvPr/>
+        </p:nvSpPr>
+        <p:spPr>
+          <a:xfrm>
+            <a:off x="692051" y="1612255"/>
+            <a:ext cx="7973389" cy="230981"/>
+          </a:xfrm>
+          <a:prstGeom prst="rect">
+            <a:avLst/>
+          </a:prstGeom>
+          <a:noFill/>
+          <a:ln/>
+        </p:spPr>
+        <p:txBody>
+          <a:bodyPr wrap="square" lIns="0" tIns="0" rIns="0" bIns="0" rtlCol="0" anchor="t"/>
+          <a:lstStyle/>
+          <a:p>
+            <a:pPr algn="l" indent="0" marL="0">
+              <a:lnSpc>
+                <a:spcPts val="1820"/>
+              </a:lnSpc>
+              <a:spcBef>
+                <a:spcPts val="300"/>
+              </a:spcBef>
+              <a:spcAft>
+                <a:spcPts val="300"/>
+              </a:spcAft>
+              <a:buNone/>
+            </a:pPr>
+            <a:r>
+              <a:rPr lang="en-US" sz="1300" i="1" dirty="0">
+                <a:solidFill>
+                  <a:srgbClr val="1C2833"/>
+                </a:solidFill>
+                <a:latin typeface="Georgia" pitchFamily="34" charset="0"/>
+                <a:ea typeface="Georgia" pitchFamily="34" charset="-122"/>
+                <a:cs typeface="Georgia" pitchFamily="34" charset="-120"/>
+              </a:rPr>
+              <a:t>To subtract from 10, 100, 1000, 10 000, …:</a:t>
+            </a:r>
+            <a:endParaRPr lang="en-US" sz="1300" dirty="0"/>
+          </a:p>
+        </p:txBody>
+      </p:sp>
+      <p:sp>
+        <p:nvSpPr>
+          <p:cNvPr id="9" name="Text 7"/>
+          <p:cNvSpPr/>
+          <p:nvPr/>
+        </p:nvSpPr>
+        <p:spPr>
+          <a:xfrm>
+            <a:off x="692051" y="1881336"/>
+            <a:ext cx="7973389" cy="230981"/>
+          </a:xfrm>
+          <a:prstGeom prst="rect">
+            <a:avLst/>
+          </a:prstGeom>
+          <a:noFill/>
+          <a:ln/>
+        </p:spPr>
+        <p:txBody>
+          <a:bodyPr wrap="square" lIns="0" tIns="0" rIns="0" bIns="0" rtlCol="0" anchor="t"/>
+          <a:lstStyle/>
+          <a:p>
+            <a:pPr algn="l" indent="0" marL="0">
+              <a:lnSpc>
+                <a:spcPts val="1820"/>
+              </a:lnSpc>
+              <a:spcBef>
+                <a:spcPts val="300"/>
+              </a:spcBef>
+              <a:spcAft>
+                <a:spcPts val="300"/>
+              </a:spcAft>
+              <a:buNone/>
+            </a:pPr>
+            <a:r>
+              <a:rPr lang="en-US" sz="1300" dirty="0">
+                <a:solidFill>
+                  <a:srgbClr val="1C2833"/>
+                </a:solidFill>
+                <a:latin typeface="Georgia" pitchFamily="34" charset="0"/>
+                <a:ea typeface="Georgia" pitchFamily="34" charset="-122"/>
+                <a:cs typeface="Georgia" pitchFamily="34" charset="-120"/>
+              </a:rPr>
+              <a:t>Subtract each digit </a:t>
+            </a:r>
+            <a:pPr algn="l" indent="0" marL="0">
+              <a:lnSpc>
+                <a:spcPts val="1820"/>
+              </a:lnSpc>
+              <a:spcBef>
+                <a:spcPts val="300"/>
+              </a:spcBef>
+              <a:spcAft>
+                <a:spcPts val="300"/>
+              </a:spcAft>
+              <a:buNone/>
+            </a:pPr>
+            <a:r>
+              <a:rPr lang="en-US" sz="1300" i="1" dirty="0">
+                <a:solidFill>
+                  <a:srgbClr val="1C2833"/>
+                </a:solidFill>
+                <a:latin typeface="Georgia" pitchFamily="34" charset="0"/>
+                <a:ea typeface="Georgia" pitchFamily="34" charset="-122"/>
+                <a:cs typeface="Georgia" pitchFamily="34" charset="-120"/>
+              </a:rPr>
+              <a:t>from 9</a:t>
+            </a:r>
+            <a:pPr algn="l" indent="0" marL="0">
+              <a:lnSpc>
+                <a:spcPts val="1820"/>
+              </a:lnSpc>
+              <a:spcBef>
+                <a:spcPts val="300"/>
+              </a:spcBef>
+              <a:spcAft>
+                <a:spcPts val="300"/>
+              </a:spcAft>
+              <a:buNone/>
+            </a:pPr>
+            <a:r>
+              <a:rPr lang="en-US" sz="1300" dirty="0">
+                <a:solidFill>
+                  <a:srgbClr val="1C2833"/>
+                </a:solidFill>
+                <a:latin typeface="Georgia" pitchFamily="34" charset="0"/>
+                <a:ea typeface="Georgia" pitchFamily="34" charset="-122"/>
+                <a:cs typeface="Georgia" pitchFamily="34" charset="-120"/>
+              </a:rPr>
+              <a:t>, </a:t>
+            </a:r>
+            <a:pPr algn="l" indent="0" marL="0">
+              <a:lnSpc>
+                <a:spcPts val="1820"/>
+              </a:lnSpc>
+              <a:spcBef>
+                <a:spcPts val="300"/>
+              </a:spcBef>
+              <a:spcAft>
+                <a:spcPts val="300"/>
+              </a:spcAft>
+              <a:buNone/>
+            </a:pPr>
+            <a:r>
+              <a:rPr lang="en-US" sz="1300" b="1" i="1" dirty="0">
+                <a:solidFill>
+                  <a:srgbClr val="1C2833"/>
+                </a:solidFill>
+                <a:latin typeface="Georgia" pitchFamily="34" charset="0"/>
+                <a:ea typeface="Georgia" pitchFamily="34" charset="-122"/>
+                <a:cs typeface="Georgia" pitchFamily="34" charset="-120"/>
+              </a:rPr>
+              <a:t>except the last digit</a:t>
+            </a:r>
+            <a:pPr algn="l" indent="0" marL="0">
+              <a:lnSpc>
+                <a:spcPts val="1820"/>
+              </a:lnSpc>
+              <a:spcBef>
+                <a:spcPts val="300"/>
+              </a:spcBef>
+              <a:spcAft>
+                <a:spcPts val="300"/>
+              </a:spcAft>
+              <a:buNone/>
+            </a:pPr>
+            <a:r>
+              <a:rPr lang="en-US" sz="1300" dirty="0">
+                <a:solidFill>
+                  <a:srgbClr val="1C2833"/>
+                </a:solidFill>
+                <a:latin typeface="Georgia" pitchFamily="34" charset="0"/>
+                <a:ea typeface="Georgia" pitchFamily="34" charset="-122"/>
+                <a:cs typeface="Georgia" pitchFamily="34" charset="-120"/>
+              </a:rPr>
+              <a:t> — subtract it </a:t>
+            </a:r>
+            <a:pPr algn="l" indent="0" marL="0">
+              <a:lnSpc>
+                <a:spcPts val="1820"/>
+              </a:lnSpc>
+              <a:spcBef>
+                <a:spcPts val="300"/>
+              </a:spcBef>
+              <a:spcAft>
+                <a:spcPts val="300"/>
+              </a:spcAft>
+              <a:buNone/>
+            </a:pPr>
+            <a:r>
+              <a:rPr lang="en-US" sz="1300" i="1" dirty="0">
+                <a:solidFill>
+                  <a:srgbClr val="1C2833"/>
+                </a:solidFill>
+                <a:latin typeface="Georgia" pitchFamily="34" charset="0"/>
+                <a:ea typeface="Georgia" pitchFamily="34" charset="-122"/>
+                <a:cs typeface="Georgia" pitchFamily="34" charset="-120"/>
+              </a:rPr>
+              <a:t>from 10</a:t>
+            </a:r>
+            <a:pPr algn="l" indent="0" marL="0">
+              <a:lnSpc>
+                <a:spcPts val="1820"/>
+              </a:lnSpc>
+              <a:spcBef>
+                <a:spcPts val="300"/>
+              </a:spcBef>
+              <a:spcAft>
+                <a:spcPts val="300"/>
+              </a:spcAft>
+              <a:buNone/>
+            </a:pPr>
+            <a:r>
+              <a:rPr lang="en-US" sz="1300" dirty="0">
+                <a:solidFill>
+                  <a:srgbClr val="1C2833"/>
+                </a:solidFill>
+                <a:latin typeface="Georgia" pitchFamily="34" charset="0"/>
+                <a:ea typeface="Georgia" pitchFamily="34" charset="-122"/>
+                <a:cs typeface="Georgia" pitchFamily="34" charset="-120"/>
+              </a:rPr>
+              <a:t>.</a:t>
+            </a:r>
+            <a:endParaRPr lang="en-US" sz="1300" dirty="0"/>
+          </a:p>
+        </p:txBody>
+      </p:sp>
+      <p:sp>
+        <p:nvSpPr>
+          <p:cNvPr id="10" name="Text 8"/>
+          <p:cNvSpPr/>
+          <p:nvPr/>
+        </p:nvSpPr>
+        <p:spPr>
+          <a:xfrm>
+            <a:off x="692051" y="2150418"/>
+            <a:ext cx="7973389" cy="230981"/>
+          </a:xfrm>
+          <a:prstGeom prst="rect">
+            <a:avLst/>
+          </a:prstGeom>
+          <a:noFill/>
+          <a:ln/>
+        </p:spPr>
+        <p:txBody>
+          <a:bodyPr wrap="square" lIns="0" tIns="0" rIns="0" bIns="0" rtlCol="0" anchor="t"/>
+          <a:lstStyle/>
+          <a:p>
+            <a:pPr algn="l" indent="0" marL="0">
+              <a:lnSpc>
+                <a:spcPts val="1820"/>
+              </a:lnSpc>
+              <a:spcBef>
+                <a:spcPts val="300"/>
+              </a:spcBef>
+              <a:spcAft>
+                <a:spcPts val="300"/>
+              </a:spcAft>
+              <a:buNone/>
+            </a:pPr>
+            <a:r>
+              <a:rPr lang="en-US" sz="1300" i="1" dirty="0">
+                <a:solidFill>
+                  <a:srgbClr val="1C2833"/>
+                </a:solidFill>
+                <a:latin typeface="Georgia" pitchFamily="34" charset="0"/>
+                <a:ea typeface="Georgia" pitchFamily="34" charset="-122"/>
+                <a:cs typeface="Georgia" pitchFamily="34" charset="-120"/>
+              </a:rPr>
+              <a:t>Read the answer top-to-bottom.</a:t>
+            </a:r>
+            <a:endParaRPr lang="en-US" sz="1300" dirty="0"/>
+          </a:p>
+        </p:txBody>
+      </p:sp>
+      <p:sp>
+        <p:nvSpPr>
+          <p:cNvPr id="11" name="Text 9"/>
+          <p:cNvSpPr/>
+          <p:nvPr/>
+        </p:nvSpPr>
+        <p:spPr>
+          <a:xfrm>
+            <a:off x="692051" y="2419499"/>
+            <a:ext cx="7973389" cy="230981"/>
+          </a:xfrm>
+          <a:prstGeom prst="rect">
+            <a:avLst/>
+          </a:prstGeom>
+          <a:noFill/>
+          <a:ln/>
+        </p:spPr>
+        <p:txBody>
+          <a:bodyPr wrap="square" lIns="0" tIns="0" rIns="0" bIns="0" rtlCol="0" anchor="t"/>
+          <a:lstStyle/>
+          <a:p>
+            <a:pPr algn="l" indent="0" marL="0">
+              <a:lnSpc>
+                <a:spcPts val="1820"/>
+              </a:lnSpc>
+              <a:spcBef>
+                <a:spcPts val="300"/>
+              </a:spcBef>
+              <a:spcAft>
+                <a:spcPts val="300"/>
+              </a:spcAft>
+              <a:buNone/>
+            </a:pPr>
+            <a:r>
+              <a:rPr lang="en-US" sz="1300" i="1" dirty="0">
+                <a:solidFill>
+                  <a:srgbClr val="1C2833"/>
+                </a:solidFill>
+                <a:latin typeface="Georgia" pitchFamily="34" charset="0"/>
+                <a:ea typeface="Georgia" pitchFamily="34" charset="-122"/>
+                <a:cs typeface="Georgia" pitchFamily="34" charset="-120"/>
+              </a:rPr>
+              <a:t>Verify: original + answer = the round base.</a:t>
+            </a:r>
+            <a:endParaRPr lang="en-US" sz="1300" dirty="0"/>
+          </a:p>
+        </p:txBody>
+      </p:sp>
+      <p:sp>
+        <p:nvSpPr>
+          <p:cNvPr id="12" name="Text 10"/>
+          <p:cNvSpPr/>
+          <p:nvPr/>
+        </p:nvSpPr>
+        <p:spPr>
+          <a:xfrm>
+            <a:off x="692051" y="2688580"/>
+            <a:ext cx="7973389" cy="230981"/>
+          </a:xfrm>
+          <a:prstGeom prst="rect">
+            <a:avLst/>
+          </a:prstGeom>
+          <a:noFill/>
+          <a:ln/>
+        </p:spPr>
+        <p:txBody>
+          <a:bodyPr wrap="square" lIns="0" tIns="0" rIns="0" bIns="0" rtlCol="0" anchor="t"/>
+          <a:lstStyle/>
+          <a:p>
+            <a:pPr algn="l" indent="0" marL="0">
+              <a:lnSpc>
+                <a:spcPts val="1820"/>
+              </a:lnSpc>
+              <a:spcBef>
+                <a:spcPts val="300"/>
+              </a:spcBef>
+              <a:spcAft>
+                <a:spcPts val="300"/>
+              </a:spcAft>
+              <a:buNone/>
+            </a:pPr>
+            <a:r>
+              <a:rPr lang="en-US" sz="1300" i="1" dirty="0">
+                <a:solidFill>
+                  <a:srgbClr val="1C2833"/>
+                </a:solidFill>
+                <a:latin typeface="Georgia" pitchFamily="34" charset="0"/>
+                <a:ea typeface="Georgia" pitchFamily="34" charset="-122"/>
+                <a:cs typeface="Georgia" pitchFamily="34" charset="-120"/>
+              </a:rPr>
+              <a:t>No borrowing. Ever.</a:t>
+            </a:r>
+            <a:endParaRPr lang="en-US" sz="1300" dirty="0"/>
+          </a:p>
+        </p:txBody>
+      </p:sp>
+      <p:sp>
+        <p:nvSpPr>
+          <p:cNvPr id="13" name="Text 11"/>
+          <p:cNvSpPr/>
+          <p:nvPr/>
+        </p:nvSpPr>
+        <p:spPr>
+          <a:xfrm>
+            <a:off x="692051" y="2957661"/>
+            <a:ext cx="7973389" cy="230981"/>
+          </a:xfrm>
+          <a:prstGeom prst="rect">
+            <a:avLst/>
+          </a:prstGeom>
+          <a:noFill/>
+          <a:ln/>
+        </p:spPr>
+        <p:txBody>
+          <a:bodyPr wrap="square" lIns="0" tIns="0" rIns="0" bIns="0" rtlCol="0" anchor="t"/>
+          <a:lstStyle/>
+          <a:p>
+            <a:pPr algn="l" indent="0" marL="0">
+              <a:lnSpc>
+                <a:spcPts val="1820"/>
+              </a:lnSpc>
+              <a:spcBef>
+                <a:spcPts val="300"/>
+              </a:spcBef>
+              <a:spcAft>
+                <a:spcPts val="300"/>
+              </a:spcAft>
+              <a:buNone/>
+            </a:pPr>
+            <a:r>
+              <a:rPr lang="en-US" sz="1300" i="1" dirty="0">
+                <a:solidFill>
+                  <a:srgbClr val="1C2833"/>
+                </a:solidFill>
+                <a:latin typeface="Georgia" pitchFamily="34" charset="0"/>
+                <a:ea typeface="Georgia" pitchFamily="34" charset="-122"/>
+                <a:cs typeface="Georgia" pitchFamily="34" charset="-120"/>
+              </a:rPr>
+              <a:t>Today's baseline:</a:t>
+            </a:r>
+            <a:endParaRPr lang="en-US" sz="1300" dirty="0"/>
+          </a:p>
+        </p:txBody>
+      </p:sp>
+      <p:sp>
+        <p:nvSpPr>
+          <p:cNvPr id="14" name="Text 12"/>
+          <p:cNvSpPr/>
+          <p:nvPr/>
+        </p:nvSpPr>
+        <p:spPr>
+          <a:xfrm>
+            <a:off x="692051" y="3226743"/>
+            <a:ext cx="7973389" cy="230981"/>
+          </a:xfrm>
+          <a:prstGeom prst="rect">
+            <a:avLst/>
+          </a:prstGeom>
+          <a:noFill/>
+          <a:ln/>
+        </p:spPr>
+        <p:txBody>
+          <a:bodyPr wrap="square" lIns="0" tIns="0" rIns="0" bIns="0" rtlCol="0" anchor="t"/>
+          <a:lstStyle/>
+          <a:p>
+            <a:pPr algn="l" indent="0" marL="0">
+              <a:lnSpc>
+                <a:spcPts val="1820"/>
+              </a:lnSpc>
+              <a:spcBef>
+                <a:spcPts val="300"/>
+              </a:spcBef>
+              <a:spcAft>
+                <a:spcPts val="300"/>
+              </a:spcAft>
+              <a:buNone/>
+            </a:pPr>
+            <a:r>
+              <a:rPr lang="en-US" sz="1300" i="1" dirty="0">
+                <a:solidFill>
+                  <a:srgbClr val="1C2833"/>
+                </a:solidFill>
+                <a:latin typeface="Georgia" pitchFamily="34" charset="0"/>
+                <a:ea typeface="Georgia" pitchFamily="34" charset="-122"/>
+                <a:cs typeface="Georgia" pitchFamily="34" charset="-120"/>
+              </a:rPr>
+              <a:t>My time with my normal method = _____ seconds</a:t>
+            </a:r>
+            <a:endParaRPr lang="en-US" sz="1300" dirty="0"/>
+          </a:p>
+        </p:txBody>
+      </p:sp>
+      <p:sp>
+        <p:nvSpPr>
+          <p:cNvPr id="15" name="Text 13"/>
+          <p:cNvSpPr/>
+          <p:nvPr/>
+        </p:nvSpPr>
+        <p:spPr>
+          <a:xfrm>
+            <a:off x="692051" y="3495824"/>
+            <a:ext cx="7973389" cy="230981"/>
+          </a:xfrm>
+          <a:prstGeom prst="rect">
+            <a:avLst/>
+          </a:prstGeom>
+          <a:noFill/>
+          <a:ln/>
+        </p:spPr>
+        <p:txBody>
+          <a:bodyPr wrap="square" lIns="0" tIns="0" rIns="0" bIns="0" rtlCol="0" anchor="t"/>
+          <a:lstStyle/>
+          <a:p>
+            <a:pPr algn="l" indent="0" marL="0">
+              <a:lnSpc>
+                <a:spcPts val="1820"/>
+              </a:lnSpc>
+              <a:spcBef>
+                <a:spcPts val="300"/>
+              </a:spcBef>
+              <a:spcAft>
+                <a:spcPts val="300"/>
+              </a:spcAft>
+              <a:buNone/>
+            </a:pPr>
+            <a:r>
+              <a:rPr lang="en-US" sz="1300" i="1" dirty="0">
+                <a:solidFill>
+                  <a:srgbClr val="1C2833"/>
+                </a:solidFill>
+                <a:latin typeface="Georgia" pitchFamily="34" charset="0"/>
+                <a:ea typeface="Georgia" pitchFamily="34" charset="-122"/>
+                <a:cs typeface="Georgia" pitchFamily="34" charset="-120"/>
+              </a:rPr>
+              <a:t>My time with Nikhilam (first try) = _____ seconds</a:t>
+            </a:r>
+            <a:endParaRPr lang="en-US" sz="1300" dirty="0"/>
+          </a:p>
+        </p:txBody>
+      </p:sp>
+      <p:sp>
+        <p:nvSpPr>
+          <p:cNvPr id="16" name="Text 14"/>
+          <p:cNvSpPr/>
+          <p:nvPr/>
+        </p:nvSpPr>
+        <p:spPr>
+          <a:xfrm>
+            <a:off x="692051" y="3764905"/>
+            <a:ext cx="7973389" cy="230981"/>
+          </a:xfrm>
+          <a:prstGeom prst="rect">
+            <a:avLst/>
+          </a:prstGeom>
+          <a:noFill/>
+          <a:ln/>
+        </p:spPr>
+        <p:txBody>
+          <a:bodyPr wrap="square" lIns="0" tIns="0" rIns="0" bIns="0" rtlCol="0" anchor="t"/>
+          <a:lstStyle/>
+          <a:p>
+            <a:pPr algn="l" indent="0" marL="0">
+              <a:lnSpc>
+                <a:spcPts val="1820"/>
+              </a:lnSpc>
+              <a:spcBef>
+                <a:spcPts val="300"/>
+              </a:spcBef>
+              <a:spcAft>
+                <a:spcPts val="300"/>
+              </a:spcAft>
+              <a:buNone/>
+            </a:pPr>
+            <a:r>
+              <a:rPr lang="en-US" sz="1300" i="1" dirty="0">
+                <a:solidFill>
+                  <a:srgbClr val="1C2833"/>
+                </a:solidFill>
+                <a:latin typeface="Georgia" pitchFamily="34" charset="0"/>
+                <a:ea typeface="Georgia" pitchFamily="34" charset="-122"/>
+                <a:cs typeface="Georgia" pitchFamily="34" charset="-120"/>
+              </a:rPr>
+              <a:t>I expect the second number to drop by Day 5.</a:t>
+            </a:r>
+            <a:endParaRPr lang="en-US" sz="1300" dirty="0"/>
+          </a:p>
+        </p:txBody>
+      </p:sp>
+      <p:sp>
+        <p:nvSpPr>
+          <p:cNvPr id="17" name="Text 15"/>
+          <p:cNvSpPr/>
+          <p:nvPr/>
+        </p:nvSpPr>
+        <p:spPr>
+          <a:xfrm>
+            <a:off x="406301" y="4434929"/>
             <a:ext cx="8498026" cy="213271"/>
           </a:xfrm>
           <a:prstGeom prst="rect">
@@ -4379,114 +5289,132 @@
                 <a:ea typeface="Arial" pitchFamily="34" charset="-122"/>
                 <a:cs typeface="Arial" pitchFamily="34" charset="-120"/>
               </a:rPr>
-              <a:t>– Tirthaji, </a:t>
-            </a:r>
-            <a:pPr algn="l" indent="0" marL="0">
-              <a:lnSpc>
-                <a:spcPts val="1680"/>
+              <a:t>Middle ·  · IKS Curriculum</a:t>
+            </a:r>
+            <a:endParaRPr lang="en-US" sz="1200" dirty="0"/>
+          </a:p>
+        </p:txBody>
+      </p:sp>
+    </p:spTree>
+  </p:cSld>
+  <p:clrMapOvr>
+    <a:masterClrMapping/>
+  </p:clrMapOvr>
+</p:sld>
+</file>
+
+<file path=ppt/slides/slide16.xml><?xml version="1.0" encoding="utf-8"?>
+<p:sld xmlns:a="http://schemas.openxmlformats.org/drawingml/2006/main" xmlns:r="http://schemas.openxmlformats.org/officeDocument/2006/relationships" xmlns:p="http://schemas.openxmlformats.org/presentationml/2006/main">
+  <p:cSld name="Slide 16">
+    <p:bg>
+      <p:bgPr>
+        <a:solidFill>
+          <a:srgbClr val="FFFFFF"/>
+        </a:solidFill>
+      </p:bgPr>
+    </p:bg>
+    <p:spTree>
+      <p:nvGrpSpPr>
+        <p:cNvPr id="1" name=""/>
+        <p:cNvGrpSpPr/>
+        <p:nvPr/>
+      </p:nvGrpSpPr>
+      <p:grpSpPr>
+        <a:xfrm>
+          <a:off x="0" y="0"/>
+          <a:ext cx="0" cy="0"/>
+          <a:chOff x="0" y="0"/>
+          <a:chExt cx="0" cy="0"/>
+        </a:xfrm>
+      </p:grpSpPr>
+      <p:sp>
+        <p:nvSpPr>
+          <p:cNvPr id="2" name="Text 0"/>
+          <p:cNvSpPr/>
+          <p:nvPr/>
+        </p:nvSpPr>
+        <p:spPr>
+          <a:xfrm>
+            <a:off x="0" y="0"/>
+            <a:ext cx="9144000" cy="101501"/>
+          </a:xfrm>
+          <a:prstGeom prst="rect">
+            <a:avLst/>
+          </a:prstGeom>
+          <a:solidFill>
+            <a:srgbClr val="277884"/>
+          </a:solidFill>
+          <a:ln/>
+        </p:spPr>
+        <p:txBody>
+          <a:bodyPr wrap="square" rtlCol="0" anchor="ctr"/>
+          <a:lstStyle/>
+          <a:p>
+            <a:pPr indent="0" marL="0">
+              <a:buNone/>
+            </a:pPr>
+            <a:endParaRPr lang="en-US" dirty="0"/>
+          </a:p>
+        </p:txBody>
+      </p:sp>
+      <p:sp>
+        <p:nvSpPr>
+          <p:cNvPr id="3" name="Text 1"/>
+          <p:cNvSpPr/>
+          <p:nvPr/>
+        </p:nvSpPr>
+        <p:spPr>
+          <a:xfrm>
+            <a:off x="406301" y="457051"/>
+            <a:ext cx="8498026" cy="274290"/>
+          </a:xfrm>
+          <a:prstGeom prst="rect">
+            <a:avLst/>
+          </a:prstGeom>
+          <a:noFill/>
+          <a:ln/>
+        </p:spPr>
+        <p:txBody>
+          <a:bodyPr wrap="square" lIns="0" tIns="0" rIns="0" bIns="0" rtlCol="0" anchor="t"/>
+          <a:lstStyle/>
+          <a:p>
+            <a:pPr algn="l" indent="0" marL="0">
+              <a:lnSpc>
+                <a:spcPts val="2160"/>
               </a:lnSpc>
               <a:spcBef>
-                <a:spcPts val="300"/>
+                <a:spcPts val="600"/>
               </a:spcBef>
               <a:spcAft>
-                <a:spcPts val="300"/>
-              </a:spcAft>
-              <a:buNone/>
-            </a:pPr>
-            <a:r>
-              <a:rPr lang="en-US" sz="1200" i="1" dirty="0">
-                <a:solidFill>
-                  <a:srgbClr val="1C2833"/>
-                </a:solidFill>
-                <a:latin typeface="Arial" pitchFamily="34" charset="0"/>
-                <a:ea typeface="Arial" pitchFamily="34" charset="-122"/>
-                <a:cs typeface="Arial" pitchFamily="34" charset="-120"/>
-              </a:rPr>
-              <a:t>Vedic Mathematics</a:t>
-            </a:r>
-            <a:pPr algn="l" indent="0" marL="0">
-              <a:lnSpc>
-                <a:spcPts val="1680"/>
-              </a:lnSpc>
-              <a:spcBef>
-                <a:spcPts val="300"/>
-              </a:spcBef>
-              <a:spcAft>
-                <a:spcPts val="300"/>
-              </a:spcAft>
-              <a:buNone/>
-            </a:pPr>
-            <a:r>
-              <a:rPr lang="en-US" sz="1200" dirty="0">
-                <a:solidFill>
-                  <a:srgbClr val="1C2833"/>
-                </a:solidFill>
-                <a:latin typeface="Arial" pitchFamily="34" charset="0"/>
-                <a:ea typeface="Arial" pitchFamily="34" charset="-122"/>
-                <a:cs typeface="Arial" pitchFamily="34" charset="-120"/>
-              </a:rPr>
-              <a:t> (1965), sūtra Nikhilam (#2). The full sūtra reads </a:t>
-            </a:r>
-            <a:pPr algn="l" indent="0" marL="0">
-              <a:lnSpc>
-                <a:spcPts val="1680"/>
-              </a:lnSpc>
-              <a:spcBef>
-                <a:spcPts val="300"/>
-              </a:spcBef>
-              <a:spcAft>
-                <a:spcPts val="300"/>
-              </a:spcAft>
-              <a:buNone/>
-            </a:pPr>
-            <a:r>
-              <a:rPr lang="en-US" sz="1200" i="1" dirty="0">
-                <a:solidFill>
-                  <a:srgbClr val="1C2833"/>
-                </a:solidFill>
-                <a:latin typeface="Arial" pitchFamily="34" charset="0"/>
-                <a:ea typeface="Arial" pitchFamily="34" charset="-122"/>
-                <a:cs typeface="Arial" pitchFamily="34" charset="-120"/>
-              </a:rPr>
-              <a:t>Nikhilaṁ Navataścaramaṁ Daśataḥ</a:t>
-            </a:r>
-            <a:pPr algn="l" indent="0" marL="0">
-              <a:lnSpc>
-                <a:spcPts val="1680"/>
-              </a:lnSpc>
-              <a:spcBef>
-                <a:spcPts val="300"/>
-              </a:spcBef>
-              <a:spcAft>
-                <a:spcPts val="300"/>
-              </a:spcAft>
-              <a:buNone/>
-            </a:pPr>
-            <a:r>
-              <a:rPr lang="en-US" sz="1200" dirty="0">
-                <a:solidFill>
-                  <a:srgbClr val="1C2833"/>
-                </a:solidFill>
-                <a:latin typeface="Arial" pitchFamily="34" charset="0"/>
-                <a:ea typeface="Arial" pitchFamily="34" charset="-122"/>
-                <a:cs typeface="Arial" pitchFamily="34" charset="-120"/>
-              </a:rPr>
-              <a:t>.</a:t>
-            </a:r>
-            <a:endParaRPr lang="en-US" sz="1200" dirty="0"/>
-          </a:p>
-        </p:txBody>
-      </p:sp>
-      <p:sp>
-        <p:nvSpPr>
-          <p:cNvPr id="5" name="Text 3"/>
-          <p:cNvSpPr/>
-          <p:nvPr/>
-        </p:nvSpPr>
-        <p:spPr>
-          <a:xfrm>
-            <a:off x="634901" y="1173063"/>
-            <a:ext cx="8102798" cy="281880"/>
+                <a:spcPts val="800"/>
+              </a:spcAft>
+              <a:buNone/>
+            </a:pPr>
+            <a:r>
+              <a:rPr lang="en-US" sz="1800" b="1" dirty="0">
+                <a:solidFill>
+                  <a:srgbClr val="FE4447"/>
+                </a:solidFill>
+                <a:latin typeface="Georgia" pitchFamily="34" charset="0"/>
+                <a:ea typeface="Georgia" pitchFamily="34" charset="-122"/>
+                <a:cs typeface="Georgia" pitchFamily="34" charset="-120"/>
+              </a:rPr>
+              <a:t>Homework</a:t>
+            </a:r>
+            <a:endParaRPr lang="en-US" sz="1800" dirty="0"/>
+          </a:p>
+        </p:txBody>
+      </p:sp>
+      <p:sp>
+        <p:nvSpPr>
+          <p:cNvPr id="4" name="Text 2"/>
+          <p:cNvSpPr/>
+          <p:nvPr/>
+        </p:nvSpPr>
+        <p:spPr>
+          <a:xfrm>
+            <a:off x="634901" y="883593"/>
+            <a:ext cx="8102798" cy="1013222"/>
           </a:xfrm>
           <a:prstGeom prst="rect">
             <a:avLst/>
@@ -4509,6 +5437,610 @@
               <a:buChar char="•"/>
             </a:pPr>
             <a:r>
+              <a:rPr lang="en-US" sz="1200" dirty="0">
+                <a:solidFill>
+                  <a:srgbClr val="1C2833"/>
+                </a:solidFill>
+                <a:latin typeface="Arial" pitchFamily="34" charset="0"/>
+                <a:ea typeface="Arial" pitchFamily="34" charset="-122"/>
+                <a:cs typeface="Arial" pitchFamily="34" charset="-120"/>
+              </a:rPr>
+              <a:t>Memorise the sūtra. Be able to say it from memory tomorrow.</a:t>
+            </a:r>
+            <a:endParaRPr lang="en-US" sz="1200" dirty="0"/>
+          </a:p>
+          <a:p>
+            <a:pPr algn="l" marL="342900" indent="-342900">
+              <a:lnSpc>
+                <a:spcPts val="1620"/>
+              </a:lnSpc>
+              <a:spcAft>
+                <a:spcPts val="300"/>
+              </a:spcAft>
+              <a:buSzPct val="100000"/>
+              <a:buChar char="•"/>
+            </a:pPr>
+            <a:r>
+              <a:rPr lang="en-US" sz="1200" dirty="0">
+                <a:solidFill>
+                  <a:srgbClr val="1C2833"/>
+                </a:solidFill>
+                <a:latin typeface="Arial" pitchFamily="34" charset="0"/>
+                <a:ea typeface="Arial" pitchFamily="34" charset="-122"/>
+                <a:cs typeface="Arial" pitchFamily="34" charset="-120"/>
+              </a:rPr>
+              <a:t>Practice: find the complement of these 2-digit numbers to 100:</a:t>
+            </a:r>
+            <a:endParaRPr lang="en-US" sz="1200" dirty="0"/>
+          </a:p>
+          <a:p>
+            <a:pPr algn="l" marL="342900" indent="-342900">
+              <a:lnSpc>
+                <a:spcPts val="1620"/>
+              </a:lnSpc>
+              <a:spcAft>
+                <a:spcPts val="300"/>
+              </a:spcAft>
+              <a:buSzPct val="100000"/>
+              <a:buChar char="•"/>
+            </a:pPr>
+            <a:r>
+              <a:rPr lang="en-US" sz="1200" dirty="0">
+                <a:solidFill>
+                  <a:srgbClr val="1C2833"/>
+                </a:solidFill>
+                <a:latin typeface="Arial" pitchFamily="34" charset="0"/>
+                <a:ea typeface="Arial" pitchFamily="34" charset="-122"/>
+                <a:cs typeface="Arial" pitchFamily="34" charset="-120"/>
+              </a:rPr>
+              <a:t>73, 41, 28, 86, 95, 17, 60, 52, 34, 89.</a:t>
+            </a:r>
+            <a:endParaRPr lang="en-US" sz="1200" dirty="0"/>
+          </a:p>
+          <a:p>
+            <a:pPr algn="l" marL="342900" indent="-342900">
+              <a:lnSpc>
+                <a:spcPts val="1620"/>
+              </a:lnSpc>
+              <a:spcAft>
+                <a:spcPts val="300"/>
+              </a:spcAft>
+              <a:buSzPct val="100000"/>
+              <a:buChar char="•"/>
+            </a:pPr>
+            <a:r>
+              <a:rPr lang="en-US" sz="1200" dirty="0">
+                <a:solidFill>
+                  <a:srgbClr val="1C2833"/>
+                </a:solidFill>
+                <a:latin typeface="Arial" pitchFamily="34" charset="0"/>
+                <a:ea typeface="Arial" pitchFamily="34" charset="-122"/>
+                <a:cs typeface="Arial" pitchFamily="34" charset="-120"/>
+              </a:rPr>
+              <a:t>Time yourself. Aim for under 30 seconds for all ten.</a:t>
+            </a:r>
+            <a:endParaRPr lang="en-US" sz="1200" dirty="0"/>
+          </a:p>
+        </p:txBody>
+      </p:sp>
+      <p:sp>
+        <p:nvSpPr>
+          <p:cNvPr id="5" name="Text 3"/>
+          <p:cNvSpPr/>
+          <p:nvPr/>
+        </p:nvSpPr>
+        <p:spPr>
+          <a:xfrm>
+            <a:off x="406301" y="4434929"/>
+            <a:ext cx="8498026" cy="213271"/>
+          </a:xfrm>
+          <a:prstGeom prst="rect">
+            <a:avLst/>
+          </a:prstGeom>
+          <a:noFill/>
+          <a:ln/>
+        </p:spPr>
+        <p:txBody>
+          <a:bodyPr wrap="square" lIns="0" tIns="0" rIns="0" bIns="0" rtlCol="0" anchor="t"/>
+          <a:lstStyle/>
+          <a:p>
+            <a:pPr algn="l" indent="0" marL="0">
+              <a:lnSpc>
+                <a:spcPts val="1680"/>
+              </a:lnSpc>
+              <a:spcBef>
+                <a:spcPts val="300"/>
+              </a:spcBef>
+              <a:spcAft>
+                <a:spcPts val="300"/>
+              </a:spcAft>
+              <a:buNone/>
+            </a:pPr>
+            <a:r>
+              <a:rPr lang="en-US" sz="1200" dirty="0">
+                <a:solidFill>
+                  <a:srgbClr val="1C2833"/>
+                </a:solidFill>
+                <a:latin typeface="Arial" pitchFamily="34" charset="0"/>
+                <a:ea typeface="Arial" pitchFamily="34" charset="-122"/>
+                <a:cs typeface="Arial" pitchFamily="34" charset="-120"/>
+              </a:rPr>
+              <a:t>Middle ·  · IKS Curriculum</a:t>
+            </a:r>
+            <a:endParaRPr lang="en-US" sz="1200" dirty="0"/>
+          </a:p>
+        </p:txBody>
+      </p:sp>
+    </p:spTree>
+  </p:cSld>
+  <p:clrMapOvr>
+    <a:masterClrMapping/>
+  </p:clrMapOvr>
+</p:sld>
+</file>
+
+<file path=ppt/slides/slide17.xml><?xml version="1.0" encoding="utf-8"?>
+<p:sld xmlns:a="http://schemas.openxmlformats.org/drawingml/2006/main" xmlns:r="http://schemas.openxmlformats.org/officeDocument/2006/relationships" xmlns:p="http://schemas.openxmlformats.org/presentationml/2006/main">
+  <p:cSld name="Slide 17">
+    <p:bg>
+      <p:bgPr>
+        <a:solidFill>
+          <a:srgbClr val="FFFFFF"/>
+        </a:solidFill>
+      </p:bgPr>
+    </p:bg>
+    <p:spTree>
+      <p:nvGrpSpPr>
+        <p:cNvPr id="1" name=""/>
+        <p:cNvGrpSpPr/>
+        <p:nvPr/>
+      </p:nvGrpSpPr>
+      <p:grpSpPr>
+        <a:xfrm>
+          <a:off x="0" y="0"/>
+          <a:ext cx="0" cy="0"/>
+          <a:chOff x="0" y="0"/>
+          <a:chExt cx="0" cy="0"/>
+        </a:xfrm>
+      </p:grpSpPr>
+      <p:sp>
+        <p:nvSpPr>
+          <p:cNvPr id="2" name="Text 0"/>
+          <p:cNvSpPr/>
+          <p:nvPr/>
+        </p:nvSpPr>
+        <p:spPr>
+          <a:xfrm>
+            <a:off x="0" y="0"/>
+            <a:ext cx="9144000" cy="101501"/>
+          </a:xfrm>
+          <a:prstGeom prst="rect">
+            <a:avLst/>
+          </a:prstGeom>
+          <a:solidFill>
+            <a:srgbClr val="277884"/>
+          </a:solidFill>
+          <a:ln/>
+        </p:spPr>
+        <p:txBody>
+          <a:bodyPr wrap="square" rtlCol="0" anchor="ctr"/>
+          <a:lstStyle/>
+          <a:p>
+            <a:pPr indent="0" marL="0">
+              <a:buNone/>
+            </a:pPr>
+            <a:endParaRPr lang="en-US" dirty="0"/>
+          </a:p>
+        </p:txBody>
+      </p:sp>
+      <p:sp>
+        <p:nvSpPr>
+          <p:cNvPr id="3" name="Text 1"/>
+          <p:cNvSpPr/>
+          <p:nvPr/>
+        </p:nvSpPr>
+        <p:spPr>
+          <a:xfrm>
+            <a:off x="406301" y="457051"/>
+            <a:ext cx="8498026" cy="274290"/>
+          </a:xfrm>
+          <a:prstGeom prst="rect">
+            <a:avLst/>
+          </a:prstGeom>
+          <a:noFill/>
+          <a:ln/>
+        </p:spPr>
+        <p:txBody>
+          <a:bodyPr wrap="square" lIns="0" tIns="0" rIns="0" bIns="0" rtlCol="0" anchor="t"/>
+          <a:lstStyle/>
+          <a:p>
+            <a:pPr algn="l" indent="0" marL="0">
+              <a:lnSpc>
+                <a:spcPts val="2160"/>
+              </a:lnSpc>
+              <a:spcBef>
+                <a:spcPts val="600"/>
+              </a:spcBef>
+              <a:spcAft>
+                <a:spcPts val="800"/>
+              </a:spcAft>
+              <a:buNone/>
+            </a:pPr>
+            <a:r>
+              <a:rPr lang="en-US" sz="1800" b="1" dirty="0">
+                <a:solidFill>
+                  <a:srgbClr val="FE4447"/>
+                </a:solidFill>
+                <a:latin typeface="Georgia" pitchFamily="34" charset="0"/>
+                <a:ea typeface="Georgia" pitchFamily="34" charset="-122"/>
+                <a:cs typeface="Georgia" pitchFamily="34" charset="-120"/>
+              </a:rPr>
+              <a:t>Differentiation</a:t>
+            </a:r>
+            <a:endParaRPr lang="en-US" sz="1800" dirty="0"/>
+          </a:p>
+        </p:txBody>
+      </p:sp>
+      <p:sp>
+        <p:nvSpPr>
+          <p:cNvPr id="4" name="Text 2"/>
+          <p:cNvSpPr/>
+          <p:nvPr/>
+        </p:nvSpPr>
+        <p:spPr>
+          <a:xfrm>
+            <a:off x="634901" y="883593"/>
+            <a:ext cx="8102798" cy="544711"/>
+          </a:xfrm>
+          <a:prstGeom prst="rect">
+            <a:avLst/>
+          </a:prstGeom>
+          <a:noFill/>
+          <a:ln/>
+        </p:spPr>
+        <p:txBody>
+          <a:bodyPr wrap="square" lIns="0" tIns="0" rIns="0" bIns="0" rtlCol="0" anchor="t"/>
+          <a:lstStyle/>
+          <a:p>
+            <a:pPr algn="l" marL="342900" indent="-342900">
+              <a:lnSpc>
+                <a:spcPts val="1620"/>
+              </a:lnSpc>
+              <a:spcAft>
+                <a:spcPts val="300"/>
+              </a:spcAft>
+              <a:buSzPct val="100000"/>
+              <a:buChar char="•"/>
+            </a:pPr>
+            <a:r>
+              <a:rPr lang="en-US" sz="1200" b="1" dirty="0">
+                <a:solidFill>
+                  <a:srgbClr val="1C2833"/>
+                </a:solidFill>
+                <a:latin typeface="Arial" pitchFamily="34" charset="0"/>
+                <a:ea typeface="Arial" pitchFamily="34" charset="-122"/>
+                <a:cs typeface="Arial" pitchFamily="34" charset="-120"/>
+              </a:rPr>
+              <a:t>Tier up:</a:t>
+            </a:r>
+            <a:pPr algn="l" indent="0" marL="0">
+              <a:lnSpc>
+                <a:spcPts val="1620"/>
+              </a:lnSpc>
+              <a:spcAft>
+                <a:spcPts val="300"/>
+              </a:spcAft>
+              <a:buNone/>
+            </a:pPr>
+            <a:r>
+              <a:rPr lang="en-US" sz="1200" dirty="0">
+                <a:solidFill>
+                  <a:srgbClr val="1C2833"/>
+                </a:solidFill>
+                <a:latin typeface="Arial" pitchFamily="34" charset="0"/>
+                <a:ea typeface="Arial" pitchFamily="34" charset="-122"/>
+                <a:cs typeface="Arial" pitchFamily="34" charset="-120"/>
+              </a:rPr>
+              <a:t> Try Nikhilam on </a:t>
+            </a:r>
+            <a:pPr algn="l" indent="0" marL="0">
+              <a:lnSpc>
+                <a:spcPts val="1620"/>
+              </a:lnSpc>
+              <a:spcAft>
+                <a:spcPts val="300"/>
+              </a:spcAft>
+              <a:buNone/>
+            </a:pPr>
+            <a:r>
+              <a:rPr lang="en-US" sz="1200" dirty="0">
+                <a:solidFill>
+                  <a:srgbClr val="1C2833"/>
+                </a:solidFill>
+                <a:latin typeface="Arial" pitchFamily="34" charset="0"/>
+                <a:ea typeface="Arial" pitchFamily="34" charset="-122"/>
+                <a:cs typeface="Arial" pitchFamily="34" charset="-120"/>
+              </a:rPr>
+              <a:t>100 000 − 23 456</a:t>
+            </a:r>
+            <a:pPr algn="l" indent="0" marL="0">
+              <a:lnSpc>
+                <a:spcPts val="1620"/>
+              </a:lnSpc>
+              <a:spcAft>
+                <a:spcPts val="300"/>
+              </a:spcAft>
+              <a:buNone/>
+            </a:pPr>
+            <a:r>
+              <a:rPr lang="en-US" sz="1200" dirty="0">
+                <a:solidFill>
+                  <a:srgbClr val="1C2833"/>
+                </a:solidFill>
+                <a:latin typeface="Arial" pitchFamily="34" charset="0"/>
+                <a:ea typeface="Arial" pitchFamily="34" charset="-122"/>
+                <a:cs typeface="Arial" pitchFamily="34" charset="-120"/>
+              </a:rPr>
+              <a:t>. Time it.</a:t>
+            </a:r>
+            <a:endParaRPr lang="en-US" sz="1200" dirty="0"/>
+          </a:p>
+          <a:p>
+            <a:pPr algn="l" marL="342900" indent="-342900">
+              <a:lnSpc>
+                <a:spcPts val="1620"/>
+              </a:lnSpc>
+              <a:spcAft>
+                <a:spcPts val="300"/>
+              </a:spcAft>
+              <a:buSzPct val="100000"/>
+              <a:buChar char="•"/>
+            </a:pPr>
+            <a:r>
+              <a:rPr lang="en-US" sz="1200" b="1" dirty="0">
+                <a:solidFill>
+                  <a:srgbClr val="1C2833"/>
+                </a:solidFill>
+                <a:latin typeface="Arial" pitchFamily="34" charset="0"/>
+                <a:ea typeface="Arial" pitchFamily="34" charset="-122"/>
+                <a:cs typeface="Arial" pitchFamily="34" charset="-120"/>
+              </a:rPr>
+              <a:t>Tier down:</a:t>
+            </a:r>
+            <a:pPr algn="l" indent="0" marL="0">
+              <a:lnSpc>
+                <a:spcPts val="1620"/>
+              </a:lnSpc>
+              <a:spcAft>
+                <a:spcPts val="300"/>
+              </a:spcAft>
+              <a:buNone/>
+            </a:pPr>
+            <a:r>
+              <a:rPr lang="en-US" sz="1200" dirty="0">
+                <a:solidFill>
+                  <a:srgbClr val="1C2833"/>
+                </a:solidFill>
+                <a:latin typeface="Arial" pitchFamily="34" charset="0"/>
+                <a:ea typeface="Arial" pitchFamily="34" charset="-122"/>
+                <a:cs typeface="Arial" pitchFamily="34" charset="-120"/>
+              </a:rPr>
+              <a:t> If the 4-digit problem feels overwhelming, drill complements to 100 (2-digit numbers) for the activity instead.</a:t>
+            </a:r>
+            <a:endParaRPr lang="en-US" sz="1200" dirty="0"/>
+          </a:p>
+        </p:txBody>
+      </p:sp>
+      <p:sp>
+        <p:nvSpPr>
+          <p:cNvPr id="5" name="Text 3"/>
+          <p:cNvSpPr/>
+          <p:nvPr/>
+        </p:nvSpPr>
+        <p:spPr>
+          <a:xfrm>
+            <a:off x="406301" y="4434929"/>
+            <a:ext cx="8498026" cy="213271"/>
+          </a:xfrm>
+          <a:prstGeom prst="rect">
+            <a:avLst/>
+          </a:prstGeom>
+          <a:noFill/>
+          <a:ln/>
+        </p:spPr>
+        <p:txBody>
+          <a:bodyPr wrap="square" lIns="0" tIns="0" rIns="0" bIns="0" rtlCol="0" anchor="t"/>
+          <a:lstStyle/>
+          <a:p>
+            <a:pPr algn="l" indent="0" marL="0">
+              <a:lnSpc>
+                <a:spcPts val="1680"/>
+              </a:lnSpc>
+              <a:spcBef>
+                <a:spcPts val="300"/>
+              </a:spcBef>
+              <a:spcAft>
+                <a:spcPts val="300"/>
+              </a:spcAft>
+              <a:buNone/>
+            </a:pPr>
+            <a:r>
+              <a:rPr lang="en-US" sz="1200" dirty="0">
+                <a:solidFill>
+                  <a:srgbClr val="1C2833"/>
+                </a:solidFill>
+                <a:latin typeface="Arial" pitchFamily="34" charset="0"/>
+                <a:ea typeface="Arial" pitchFamily="34" charset="-122"/>
+                <a:cs typeface="Arial" pitchFamily="34" charset="-120"/>
+              </a:rPr>
+              <a:t>Middle ·  · IKS Curriculum</a:t>
+            </a:r>
+            <a:endParaRPr lang="en-US" sz="1200" dirty="0"/>
+          </a:p>
+        </p:txBody>
+      </p:sp>
+    </p:spTree>
+  </p:cSld>
+  <p:clrMapOvr>
+    <a:masterClrMapping/>
+  </p:clrMapOvr>
+</p:sld>
+</file>
+
+<file path=ppt/slides/slide18.xml><?xml version="1.0" encoding="utf-8"?>
+<p:sld xmlns:a="http://schemas.openxmlformats.org/drawingml/2006/main" xmlns:r="http://schemas.openxmlformats.org/officeDocument/2006/relationships" xmlns:p="http://schemas.openxmlformats.org/presentationml/2006/main">
+  <p:cSld name="Slide 18">
+    <p:bg>
+      <p:bgPr>
+        <a:solidFill>
+          <a:srgbClr val="FFFFFF"/>
+        </a:solidFill>
+      </p:bgPr>
+    </p:bg>
+    <p:spTree>
+      <p:nvGrpSpPr>
+        <p:cNvPr id="1" name=""/>
+        <p:cNvGrpSpPr/>
+        <p:nvPr/>
+      </p:nvGrpSpPr>
+      <p:grpSpPr>
+        <a:xfrm>
+          <a:off x="0" y="0"/>
+          <a:ext cx="0" cy="0"/>
+          <a:chOff x="0" y="0"/>
+          <a:chExt cx="0" cy="0"/>
+        </a:xfrm>
+      </p:grpSpPr>
+      <p:sp>
+        <p:nvSpPr>
+          <p:cNvPr id="2" name="Text 0"/>
+          <p:cNvSpPr/>
+          <p:nvPr/>
+        </p:nvSpPr>
+        <p:spPr>
+          <a:xfrm>
+            <a:off x="0" y="0"/>
+            <a:ext cx="9144000" cy="101501"/>
+          </a:xfrm>
+          <a:prstGeom prst="rect">
+            <a:avLst/>
+          </a:prstGeom>
+          <a:solidFill>
+            <a:srgbClr val="277884"/>
+          </a:solidFill>
+          <a:ln/>
+        </p:spPr>
+        <p:txBody>
+          <a:bodyPr wrap="square" rtlCol="0" anchor="ctr"/>
+          <a:lstStyle/>
+          <a:p>
+            <a:pPr indent="0" marL="0">
+              <a:buNone/>
+            </a:pPr>
+            <a:endParaRPr lang="en-US" dirty="0"/>
+          </a:p>
+        </p:txBody>
+      </p:sp>
+      <p:sp>
+        <p:nvSpPr>
+          <p:cNvPr id="3" name="Text 1"/>
+          <p:cNvSpPr/>
+          <p:nvPr/>
+        </p:nvSpPr>
+        <p:spPr>
+          <a:xfrm>
+            <a:off x="406301" y="457051"/>
+            <a:ext cx="8498026" cy="274290"/>
+          </a:xfrm>
+          <a:prstGeom prst="rect">
+            <a:avLst/>
+          </a:prstGeom>
+          <a:noFill/>
+          <a:ln/>
+        </p:spPr>
+        <p:txBody>
+          <a:bodyPr wrap="square" lIns="0" tIns="0" rIns="0" bIns="0" rtlCol="0" anchor="t"/>
+          <a:lstStyle/>
+          <a:p>
+            <a:pPr algn="l" indent="0" marL="0">
+              <a:lnSpc>
+                <a:spcPts val="2160"/>
+              </a:lnSpc>
+              <a:spcBef>
+                <a:spcPts val="600"/>
+              </a:spcBef>
+              <a:spcAft>
+                <a:spcPts val="800"/>
+              </a:spcAft>
+              <a:buNone/>
+            </a:pPr>
+            <a:r>
+              <a:rPr lang="en-US" sz="1800" b="1" dirty="0">
+                <a:solidFill>
+                  <a:srgbClr val="FE4447"/>
+                </a:solidFill>
+                <a:latin typeface="Georgia" pitchFamily="34" charset="0"/>
+                <a:ea typeface="Georgia" pitchFamily="34" charset="-122"/>
+                <a:cs typeface="Georgia" pitchFamily="34" charset="-120"/>
+              </a:rPr>
+              <a:t>Teacher notes</a:t>
+            </a:r>
+            <a:endParaRPr lang="en-US" sz="1800" dirty="0"/>
+          </a:p>
+        </p:txBody>
+      </p:sp>
+      <p:sp>
+        <p:nvSpPr>
+          <p:cNvPr id="4" name="Text 2"/>
+          <p:cNvSpPr/>
+          <p:nvPr/>
+        </p:nvSpPr>
+        <p:spPr>
+          <a:xfrm>
+            <a:off x="634901" y="883593"/>
+            <a:ext cx="8102798" cy="1630263"/>
+          </a:xfrm>
+          <a:prstGeom prst="rect">
+            <a:avLst/>
+          </a:prstGeom>
+          <a:noFill/>
+          <a:ln/>
+        </p:spPr>
+        <p:txBody>
+          <a:bodyPr wrap="square" lIns="0" tIns="0" rIns="0" bIns="0" rtlCol="0" anchor="t"/>
+          <a:lstStyle/>
+          <a:p>
+            <a:pPr algn="l" marL="342900" indent="-342900">
+              <a:lnSpc>
+                <a:spcPts val="1620"/>
+              </a:lnSpc>
+              <a:spcAft>
+                <a:spcPts val="300"/>
+              </a:spcAft>
+              <a:buSzPct val="100000"/>
+              <a:buChar char="•"/>
+            </a:pPr>
+            <a:r>
+              <a:rPr lang="en-US" sz="1200" dirty="0">
+                <a:solidFill>
+                  <a:srgbClr val="1C2833"/>
+                </a:solidFill>
+                <a:latin typeface="Arial" pitchFamily="34" charset="0"/>
+                <a:ea typeface="Arial" pitchFamily="34" charset="-122"/>
+                <a:cs typeface="Arial" pitchFamily="34" charset="-120"/>
+              </a:rPr>
+              <a:t>The baseline time is the </a:t>
+            </a:r>
+            <a:pPr algn="l" indent="0" marL="0">
+              <a:lnSpc>
+                <a:spcPts val="1620"/>
+              </a:lnSpc>
+              <a:spcAft>
+                <a:spcPts val="300"/>
+              </a:spcAft>
+              <a:buNone/>
+            </a:pPr>
+            <a:r>
               <a:rPr lang="en-US" sz="1200" i="1" dirty="0">
                 <a:solidFill>
                   <a:srgbClr val="1C2833"/>
@@ -4517,6 +6049,406 @@
                 <a:ea typeface="Arial" pitchFamily="34" charset="-122"/>
                 <a:cs typeface="Arial" pitchFamily="34" charset="-120"/>
               </a:rPr>
+              <a:t>single most important</a:t>
+            </a:r>
+            <a:pPr algn="l" indent="0" marL="0">
+              <a:lnSpc>
+                <a:spcPts val="1620"/>
+              </a:lnSpc>
+              <a:spcAft>
+                <a:spcPts val="300"/>
+              </a:spcAft>
+              <a:buNone/>
+            </a:pPr>
+            <a:r>
+              <a:rPr lang="en-US" sz="1200" dirty="0">
+                <a:solidFill>
+                  <a:srgbClr val="1C2833"/>
+                </a:solidFill>
+                <a:latin typeface="Arial" pitchFamily="34" charset="0"/>
+                <a:ea typeface="Arial" pitchFamily="34" charset="-122"/>
+                <a:cs typeface="Arial" pitchFamily="34" charset="-120"/>
+              </a:rPr>
+              <a:t> artefact of Day 1. Make sure every student records it honestly. Day 5's retest depends on it.</a:t>
+            </a:r>
+            <a:endParaRPr lang="en-US" sz="1200" dirty="0"/>
+          </a:p>
+          <a:p>
+            <a:pPr algn="l" marL="342900" indent="-342900">
+              <a:lnSpc>
+                <a:spcPts val="1620"/>
+              </a:lnSpc>
+              <a:spcAft>
+                <a:spcPts val="300"/>
+              </a:spcAft>
+              <a:buSzPct val="100000"/>
+              <a:buChar char="•"/>
+            </a:pPr>
+            <a:r>
+              <a:rPr lang="en-US" sz="1200" dirty="0">
+                <a:solidFill>
+                  <a:srgbClr val="1C2833"/>
+                </a:solidFill>
+                <a:latin typeface="Arial" pitchFamily="34" charset="0"/>
+                <a:ea typeface="Arial" pitchFamily="34" charset="-122"/>
+                <a:cs typeface="Arial" pitchFamily="34" charset="-120"/>
+              </a:rPr>
+              <a:t>Don't promise a specific speedup — say "you'll likely be faster by Day 5; how much depends on you."</a:t>
+            </a:r>
+            <a:endParaRPr lang="en-US" sz="1200" dirty="0"/>
+          </a:p>
+          <a:p>
+            <a:pPr algn="l" marL="342900" indent="-342900">
+              <a:lnSpc>
+                <a:spcPts val="1620"/>
+              </a:lnSpc>
+              <a:spcAft>
+                <a:spcPts val="300"/>
+              </a:spcAft>
+              <a:buSzPct val="100000"/>
+              <a:buChar char="•"/>
+            </a:pPr>
+            <a:r>
+              <a:rPr lang="en-US" sz="1200" dirty="0">
+                <a:solidFill>
+                  <a:srgbClr val="1C2833"/>
+                </a:solidFill>
+                <a:latin typeface="Arial" pitchFamily="34" charset="0"/>
+                <a:ea typeface="Arial" pitchFamily="34" charset="-122"/>
+                <a:cs typeface="Arial" pitchFamily="34" charset="-120"/>
+              </a:rPr>
+              <a:t>The Sanskrit pronunciation is hard. Model it slowly; let students laugh on the first attempt. By Day 5 they'll all say it cleanly.</a:t>
+            </a:r>
+            <a:endParaRPr lang="en-US" sz="1200" dirty="0"/>
+          </a:p>
+          <a:p>
+            <a:pPr algn="l" marL="342900" indent="-342900">
+              <a:lnSpc>
+                <a:spcPts val="1620"/>
+              </a:lnSpc>
+              <a:spcAft>
+                <a:spcPts val="300"/>
+              </a:spcAft>
+              <a:buSzPct val="100000"/>
+              <a:buChar char="•"/>
+            </a:pPr>
+            <a:r>
+              <a:rPr lang="en-US" sz="1200" dirty="0">
+                <a:solidFill>
+                  <a:srgbClr val="1C2833"/>
+                </a:solidFill>
+                <a:latin typeface="Arial" pitchFamily="34" charset="0"/>
+                <a:ea typeface="Arial" pitchFamily="34" charset="-122"/>
+                <a:cs typeface="Arial" pitchFamily="34" charset="-120"/>
+              </a:rPr>
+              <a:t>One paraphrase from Tirthaji that helps: "Nikhilam (निखिलं) means 'whole,' 'entire,' 'all.' Navataḥ means 'from nine.' Caramaṁ means 'the last.' Daśataḥ means 'from ten.' Six words; one method."</a:t>
+            </a:r>
+            <a:endParaRPr lang="en-US" sz="1200" dirty="0"/>
+          </a:p>
+        </p:txBody>
+      </p:sp>
+      <p:sp>
+        <p:nvSpPr>
+          <p:cNvPr id="5" name="Text 3"/>
+          <p:cNvSpPr/>
+          <p:nvPr/>
+        </p:nvSpPr>
+        <p:spPr>
+          <a:xfrm>
+            <a:off x="406301" y="4434929"/>
+            <a:ext cx="8498026" cy="213271"/>
+          </a:xfrm>
+          <a:prstGeom prst="rect">
+            <a:avLst/>
+          </a:prstGeom>
+          <a:noFill/>
+          <a:ln/>
+        </p:spPr>
+        <p:txBody>
+          <a:bodyPr wrap="square" lIns="0" tIns="0" rIns="0" bIns="0" rtlCol="0" anchor="t"/>
+          <a:lstStyle/>
+          <a:p>
+            <a:pPr algn="l" indent="0" marL="0">
+              <a:lnSpc>
+                <a:spcPts val="1680"/>
+              </a:lnSpc>
+              <a:spcBef>
+                <a:spcPts val="300"/>
+              </a:spcBef>
+              <a:spcAft>
+                <a:spcPts val="300"/>
+              </a:spcAft>
+              <a:buNone/>
+            </a:pPr>
+            <a:r>
+              <a:rPr lang="en-US" sz="1200" dirty="0">
+                <a:solidFill>
+                  <a:srgbClr val="1C2833"/>
+                </a:solidFill>
+                <a:latin typeface="Arial" pitchFamily="34" charset="0"/>
+                <a:ea typeface="Arial" pitchFamily="34" charset="-122"/>
+                <a:cs typeface="Arial" pitchFamily="34" charset="-120"/>
+              </a:rPr>
+              <a:t>Middle ·  · IKS Curriculum</a:t>
+            </a:r>
+            <a:endParaRPr lang="en-US" sz="1200" dirty="0"/>
+          </a:p>
+        </p:txBody>
+      </p:sp>
+    </p:spTree>
+  </p:cSld>
+  <p:clrMapOvr>
+    <a:masterClrMapping/>
+  </p:clrMapOvr>
+</p:sld>
+</file>
+
+<file path=ppt/slides/slide19.xml><?xml version="1.0" encoding="utf-8"?>
+<p:sld xmlns:a="http://schemas.openxmlformats.org/drawingml/2006/main" xmlns:r="http://schemas.openxmlformats.org/officeDocument/2006/relationships" xmlns:p="http://schemas.openxmlformats.org/presentationml/2006/main">
+  <p:cSld name="Slide 19">
+    <p:bg>
+      <p:bgPr>
+        <a:solidFill>
+          <a:srgbClr val="FFFFFF"/>
+        </a:solidFill>
+      </p:bgPr>
+    </p:bg>
+    <p:spTree>
+      <p:nvGrpSpPr>
+        <p:cNvPr id="1" name=""/>
+        <p:cNvGrpSpPr/>
+        <p:nvPr/>
+      </p:nvGrpSpPr>
+      <p:grpSpPr>
+        <a:xfrm>
+          <a:off x="0" y="0"/>
+          <a:ext cx="0" cy="0"/>
+          <a:chOff x="0" y="0"/>
+          <a:chExt cx="0" cy="0"/>
+        </a:xfrm>
+      </p:grpSpPr>
+      <p:sp>
+        <p:nvSpPr>
+          <p:cNvPr id="2" name="Text 0"/>
+          <p:cNvSpPr/>
+          <p:nvPr/>
+        </p:nvSpPr>
+        <p:spPr>
+          <a:xfrm>
+            <a:off x="0" y="0"/>
+            <a:ext cx="9144000" cy="101501"/>
+          </a:xfrm>
+          <a:prstGeom prst="rect">
+            <a:avLst/>
+          </a:prstGeom>
+          <a:solidFill>
+            <a:srgbClr val="277884"/>
+          </a:solidFill>
+          <a:ln/>
+        </p:spPr>
+        <p:txBody>
+          <a:bodyPr wrap="square" rtlCol="0" anchor="ctr"/>
+          <a:lstStyle/>
+          <a:p>
+            <a:pPr indent="0" marL="0">
+              <a:buNone/>
+            </a:pPr>
+            <a:endParaRPr lang="en-US" dirty="0"/>
+          </a:p>
+        </p:txBody>
+      </p:sp>
+      <p:sp>
+        <p:nvSpPr>
+          <p:cNvPr id="3" name="Text 1"/>
+          <p:cNvSpPr/>
+          <p:nvPr/>
+        </p:nvSpPr>
+        <p:spPr>
+          <a:xfrm>
+            <a:off x="406301" y="457051"/>
+            <a:ext cx="8498026" cy="274290"/>
+          </a:xfrm>
+          <a:prstGeom prst="rect">
+            <a:avLst/>
+          </a:prstGeom>
+          <a:noFill/>
+          <a:ln/>
+        </p:spPr>
+        <p:txBody>
+          <a:bodyPr wrap="square" lIns="0" tIns="0" rIns="0" bIns="0" rtlCol="0" anchor="t"/>
+          <a:lstStyle/>
+          <a:p>
+            <a:pPr algn="l" indent="0" marL="0">
+              <a:lnSpc>
+                <a:spcPts val="2160"/>
+              </a:lnSpc>
+              <a:spcBef>
+                <a:spcPts val="600"/>
+              </a:spcBef>
+              <a:spcAft>
+                <a:spcPts val="800"/>
+              </a:spcAft>
+              <a:buNone/>
+            </a:pPr>
+            <a:r>
+              <a:rPr lang="en-US" sz="1800" b="1" dirty="0">
+                <a:solidFill>
+                  <a:srgbClr val="FE4447"/>
+                </a:solidFill>
+                <a:latin typeface="Georgia" pitchFamily="34" charset="0"/>
+                <a:ea typeface="Georgia" pitchFamily="34" charset="-122"/>
+                <a:cs typeface="Georgia" pitchFamily="34" charset="-120"/>
+              </a:rPr>
+              <a:t>Citation(s) used in this lesson</a:t>
+            </a:r>
+            <a:endParaRPr lang="en-US" sz="1800" dirty="0"/>
+          </a:p>
+        </p:txBody>
+      </p:sp>
+      <p:sp>
+        <p:nvSpPr>
+          <p:cNvPr id="4" name="Text 2"/>
+          <p:cNvSpPr/>
+          <p:nvPr/>
+        </p:nvSpPr>
+        <p:spPr>
+          <a:xfrm>
+            <a:off x="634901" y="883593"/>
+            <a:ext cx="8102798" cy="525661"/>
+          </a:xfrm>
+          <a:prstGeom prst="rect">
+            <a:avLst/>
+          </a:prstGeom>
+          <a:noFill/>
+          <a:ln/>
+        </p:spPr>
+        <p:txBody>
+          <a:bodyPr wrap="square" lIns="0" tIns="0" rIns="0" bIns="0" rtlCol="0" anchor="t"/>
+          <a:lstStyle/>
+          <a:p>
+            <a:pPr algn="l" marL="342900" indent="-342900">
+              <a:lnSpc>
+                <a:spcPts val="1620"/>
+              </a:lnSpc>
+              <a:spcAft>
+                <a:spcPts val="300"/>
+              </a:spcAft>
+              <a:buSzPct val="100000"/>
+              <a:buChar char="•"/>
+            </a:pPr>
+            <a:r>
+              <a:rPr lang="en-US" sz="1200" dirty="0">
+                <a:solidFill>
+                  <a:srgbClr val="1C2833"/>
+                </a:solidFill>
+                <a:latin typeface="Arial" pitchFamily="34" charset="0"/>
+                <a:ea typeface="Arial" pitchFamily="34" charset="-122"/>
+                <a:cs typeface="Arial" pitchFamily="34" charset="-120"/>
+              </a:rPr>
+              <a:t>Tirthaji, </a:t>
+            </a:r>
+            <a:pPr algn="l" indent="0" marL="0">
+              <a:lnSpc>
+                <a:spcPts val="1620"/>
+              </a:lnSpc>
+              <a:spcAft>
+                <a:spcPts val="300"/>
+              </a:spcAft>
+              <a:buNone/>
+            </a:pPr>
+            <a:r>
+              <a:rPr lang="en-US" sz="1200" i="1" dirty="0">
+                <a:solidFill>
+                  <a:srgbClr val="1C2833"/>
+                </a:solidFill>
+                <a:latin typeface="Arial" pitchFamily="34" charset="0"/>
+                <a:ea typeface="Arial" pitchFamily="34" charset="-122"/>
+                <a:cs typeface="Arial" pitchFamily="34" charset="-120"/>
+              </a:rPr>
+              <a:t>Vedic Mathematics</a:t>
+            </a:r>
+            <a:pPr algn="l" indent="0" marL="0">
+              <a:lnSpc>
+                <a:spcPts val="1620"/>
+              </a:lnSpc>
+              <a:spcAft>
+                <a:spcPts val="300"/>
+              </a:spcAft>
+              <a:buNone/>
+            </a:pPr>
+            <a:r>
+              <a:rPr lang="en-US" sz="1200" dirty="0">
+                <a:solidFill>
+                  <a:srgbClr val="1C2833"/>
+                </a:solidFill>
+                <a:latin typeface="Arial" pitchFamily="34" charset="0"/>
+                <a:ea typeface="Arial" pitchFamily="34" charset="-122"/>
+                <a:cs typeface="Arial" pitchFamily="34" charset="-120"/>
+              </a:rPr>
+              <a:t> (1965), sūtra Nikhilam (#2). The full sūtra reads </a:t>
+            </a:r>
+            <a:pPr algn="l" indent="0" marL="0">
+              <a:lnSpc>
+                <a:spcPts val="1620"/>
+              </a:lnSpc>
+              <a:spcAft>
+                <a:spcPts val="300"/>
+              </a:spcAft>
+              <a:buNone/>
+            </a:pPr>
+            <a:r>
+              <a:rPr lang="en-US" sz="1200" i="1" dirty="0">
+                <a:solidFill>
+                  <a:srgbClr val="1C2833"/>
+                </a:solidFill>
+                <a:latin typeface="Arial" pitchFamily="34" charset="0"/>
+                <a:ea typeface="Arial" pitchFamily="34" charset="-122"/>
+                <a:cs typeface="Arial" pitchFamily="34" charset="-120"/>
+              </a:rPr>
+              <a:t>Nikhilaṁ Navataścaramaṁ Daśataḥ</a:t>
+            </a:r>
+            <a:pPr algn="l" indent="0" marL="0">
+              <a:lnSpc>
+                <a:spcPts val="1620"/>
+              </a:lnSpc>
+              <a:spcAft>
+                <a:spcPts val="300"/>
+              </a:spcAft>
+              <a:buNone/>
+            </a:pPr>
+            <a:r>
+              <a:rPr lang="en-US" sz="1200" dirty="0">
+                <a:solidFill>
+                  <a:srgbClr val="1C2833"/>
+                </a:solidFill>
+                <a:latin typeface="Arial" pitchFamily="34" charset="0"/>
+                <a:ea typeface="Arial" pitchFamily="34" charset="-122"/>
+                <a:cs typeface="Arial" pitchFamily="34" charset="-120"/>
+              </a:rPr>
+              <a:t>.</a:t>
+            </a:r>
+            <a:endParaRPr lang="en-US" sz="1200" dirty="0"/>
+          </a:p>
+          <a:p>
+            <a:pPr algn="l" marL="342900" indent="-342900">
+              <a:lnSpc>
+                <a:spcPts val="1620"/>
+              </a:lnSpc>
+              <a:spcAft>
+                <a:spcPts val="300"/>
+              </a:spcAft>
+              <a:buSzPct val="100000"/>
+              <a:buChar char="•"/>
+            </a:pPr>
+            <a:r>
+              <a:rPr lang="en-US" sz="1200" i="1" dirty="0">
+                <a:solidFill>
+                  <a:srgbClr val="1C2833"/>
+                </a:solidFill>
+                <a:latin typeface="Arial" pitchFamily="34" charset="0"/>
+                <a:ea typeface="Arial" pitchFamily="34" charset="-122"/>
+                <a:cs typeface="Arial" pitchFamily="34" charset="-120"/>
+              </a:rPr>
               <a:t>Microsoft Word - sutras1.pdf</a:t>
             </a:r>
             <a:pPr algn="l" indent="0" marL="0">
@@ -4545,7 +6477,7 @@
       </p:sp>
       <p:sp>
         <p:nvSpPr>
-          <p:cNvPr id="6" name="Text 4"/>
+          <p:cNvPr id="5" name="Text 3"/>
           <p:cNvSpPr/>
           <p:nvPr/>
         </p:nvSpPr>
@@ -4695,7 +6627,7 @@
                 <a:ea typeface="Georgia" pitchFamily="34" charset="-122"/>
                 <a:cs typeface="Georgia" pitchFamily="34" charset="-120"/>
               </a:rPr>
-              <a:t>Materials</a:t>
+              <a:t>Learning objective</a:t>
             </a:r>
             <a:endParaRPr lang="en-US" sz="1800" dirty="0"/>
           </a:p>
@@ -4710,7 +6642,7 @@
         <p:spPr>
           <a:xfrm>
             <a:off x="406301" y="870942"/>
-            <a:ext cx="8498026" cy="649337"/>
+            <a:ext cx="8498026" cy="436066"/>
           </a:xfrm>
           <a:prstGeom prst="rect">
             <a:avLst/>
@@ -4743,7 +6675,7 @@
                 <a:ea typeface="Arial" pitchFamily="34" charset="-122"/>
                 <a:cs typeface="Arial" pitchFamily="34" charset="-120"/>
               </a:rPr>
-              <a:t>– Printed baseline sheet: ONE subtraction problem (</a:t>
+              <a:t>By the end of this lesson, students will record a personal baseline time for </a:t>
             </a:r>
             <a:pPr algn="l" indent="0" marL="0">
               <a:lnSpc>
@@ -4766,7 +6698,7 @@
                 <a:ea typeface="Arial" pitchFamily="34" charset="-122"/>
                 <a:cs typeface="Arial" pitchFamily="34" charset="-120"/>
               </a:rPr>
-              <a:t>10 000 − 4567 = ?</a:t>
+              <a:t>10 000 − 4567</a:t>
             </a:r>
             <a:pPr algn="l" indent="0" marL="0">
               <a:lnSpc>
@@ -4789,7 +6721,7 @@
                 <a:ea typeface="Arial" pitchFamily="34" charset="-122"/>
                 <a:cs typeface="Arial" pitchFamily="34" charset="-120"/>
               </a:rPr>
-              <a:t>). One per student. – Stopwatch or wall clock (one per pair is plenty). – Whiteboard / large paper for the teacher demo. – A printed Nikhilam sūtra poster — IAST + English — on the wall.</a:t>
+              <a:t> using standard borrowing, will recite the Nikhilam sūtra in Sanskrit, and will have watched the method solve the same problem visibly faster.</a:t>
             </a:r>
             <a:endParaRPr lang="en-US" sz="1200" dirty="0"/>
           </a:p>
@@ -4947,7 +6879,7 @@
                 <a:ea typeface="Georgia" pitchFamily="34" charset="-122"/>
                 <a:cs typeface="Georgia" pitchFamily="34" charset="-120"/>
               </a:rPr>
-              <a:t>Vocabulary introduced today</a:t>
+              <a:t>Materials</a:t>
             </a:r>
             <a:endParaRPr lang="en-US" sz="1800" dirty="0"/>
           </a:p>
@@ -4962,7 +6894,7 @@
         <p:spPr>
           <a:xfrm>
             <a:off x="634901" y="883593"/>
-            <a:ext cx="8102798" cy="937022"/>
+            <a:ext cx="8102798" cy="1032272"/>
           </a:xfrm>
           <a:prstGeom prst="rect">
             <a:avLst/>
@@ -4985,15 +6917,15 @@
               <a:buChar char="•"/>
             </a:pPr>
             <a:r>
-              <a:rPr lang="en-US" sz="1200" i="1" dirty="0">
-                <a:solidFill>
-                  <a:srgbClr val="1C2833"/>
-                </a:solidFill>
-                <a:latin typeface="Arial" pitchFamily="34" charset="0"/>
-                <a:ea typeface="Arial" pitchFamily="34" charset="-122"/>
-                <a:cs typeface="Arial" pitchFamily="34" charset="-120"/>
-              </a:rPr>
-              <a:t>Nikhilaṁ Navataścaramaṁ Daśataḥ</a:t>
+              <a:rPr lang="en-US" sz="1200" dirty="0">
+                <a:solidFill>
+                  <a:srgbClr val="1C2833"/>
+                </a:solidFill>
+                <a:latin typeface="Arial" pitchFamily="34" charset="0"/>
+                <a:ea typeface="Arial" pitchFamily="34" charset="-122"/>
+                <a:cs typeface="Arial" pitchFamily="34" charset="-120"/>
+              </a:rPr>
+              <a:t>Printed baseline sheet: ONE subtraction problem (</a:t>
             </a:r>
             <a:pPr algn="l" indent="0" marL="0">
               <a:lnSpc>
@@ -5013,7 +6945,27 @@
                 <a:ea typeface="Arial" pitchFamily="34" charset="-122"/>
                 <a:cs typeface="Arial" pitchFamily="34" charset="-120"/>
               </a:rPr>
-              <a:t> (IAST: nikhilaṁ navataścaramaṁ daśataḥ; lit. "all from nine and the last from ten") — the sūtra we'll learn this fortnight.</a:t>
+              <a:t>10 000 − 4567 = ?</a:t>
+            </a:r>
+            <a:pPr algn="l" indent="0" marL="0">
+              <a:lnSpc>
+                <a:spcPts val="1620"/>
+              </a:lnSpc>
+              <a:spcAft>
+                <a:spcPts val="300"/>
+              </a:spcAft>
+              <a:buNone/>
+            </a:pPr>
+            <a:r>
+              <a:rPr lang="en-US" sz="1200" dirty="0">
+                <a:solidFill>
+                  <a:srgbClr val="1C2833"/>
+                </a:solidFill>
+                <a:latin typeface="Arial" pitchFamily="34" charset="0"/>
+                <a:ea typeface="Arial" pitchFamily="34" charset="-122"/>
+                <a:cs typeface="Arial" pitchFamily="34" charset="-120"/>
+              </a:rPr>
+              <a:t>). One per student.</a:t>
             </a:r>
             <a:endParaRPr lang="en-US" sz="1200" dirty="0"/>
           </a:p>
@@ -5029,24 +6981,28 @@
               <a:buChar char="•"/>
             </a:pPr>
             <a:r>
-              <a:rPr lang="en-US" sz="1200" i="1" dirty="0">
-                <a:solidFill>
-                  <a:srgbClr val="1C2833"/>
-                </a:solidFill>
-                <a:latin typeface="Arial" pitchFamily="34" charset="0"/>
-                <a:ea typeface="Arial" pitchFamily="34" charset="-122"/>
-                <a:cs typeface="Arial" pitchFamily="34" charset="-120"/>
-              </a:rPr>
-              <a:t>sūtra</a:t>
-            </a:r>
-            <a:pPr algn="l" indent="0" marL="0">
+              <a:rPr lang="en-US" sz="1200" dirty="0">
+                <a:solidFill>
+                  <a:srgbClr val="1C2833"/>
+                </a:solidFill>
+                <a:latin typeface="Arial" pitchFamily="34" charset="0"/>
+                <a:ea typeface="Arial" pitchFamily="34" charset="-122"/>
+                <a:cs typeface="Arial" pitchFamily="34" charset="-120"/>
+              </a:rPr>
+              <a:t>Stopwatch or wall clock (one per pair is plenty).</a:t>
+            </a:r>
+            <a:endParaRPr lang="en-US" sz="1200" dirty="0"/>
+          </a:p>
+          <a:p>
+            <a:pPr algn="l" marL="342900" indent="-342900">
               <a:lnSpc>
                 <a:spcPts val="1620"/>
               </a:lnSpc>
               <a:spcAft>
                 <a:spcPts val="300"/>
               </a:spcAft>
-              <a:buNone/>
+              <a:buSzPct val="100000"/>
+              <a:buChar char="•"/>
             </a:pPr>
             <a:r>
               <a:rPr lang="en-US" sz="1200" dirty="0">
@@ -5057,36 +7013,20 @@
                 <a:ea typeface="Arial" pitchFamily="34" charset="-122"/>
                 <a:cs typeface="Arial" pitchFamily="34" charset="-120"/>
               </a:rPr>
-              <a:t> (IAST: sūtra; lit. "thread, formula, aphorism") — a short mnemonic rule. Tirthaji's </a:t>
-            </a:r>
-            <a:pPr algn="l" indent="0" marL="0">
+              <a:t>Whiteboard / large paper for the teacher demo.</a:t>
+            </a:r>
+            <a:endParaRPr lang="en-US" sz="1200" dirty="0"/>
+          </a:p>
+          <a:p>
+            <a:pPr algn="l" marL="342900" indent="-342900">
               <a:lnSpc>
                 <a:spcPts val="1620"/>
               </a:lnSpc>
               <a:spcAft>
                 <a:spcPts val="300"/>
               </a:spcAft>
-              <a:buNone/>
-            </a:pPr>
-            <a:r>
-              <a:rPr lang="en-US" sz="1200" i="1" dirty="0">
-                <a:solidFill>
-                  <a:srgbClr val="1C2833"/>
-                </a:solidFill>
-                <a:latin typeface="Arial" pitchFamily="34" charset="0"/>
-                <a:ea typeface="Arial" pitchFamily="34" charset="-122"/>
-                <a:cs typeface="Arial" pitchFamily="34" charset="-120"/>
-              </a:rPr>
-              <a:t>Vedic Mathematics</a:t>
-            </a:r>
-            <a:pPr algn="l" indent="0" marL="0">
-              <a:lnSpc>
-                <a:spcPts val="1620"/>
-              </a:lnSpc>
-              <a:spcAft>
-                <a:spcPts val="300"/>
-              </a:spcAft>
-              <a:buNone/>
+              <a:buSzPct val="100000"/>
+              <a:buChar char="•"/>
             </a:pPr>
             <a:r>
               <a:rPr lang="en-US" sz="1200" dirty="0">
@@ -5097,7 +7037,7 @@
                 <a:ea typeface="Arial" pitchFamily="34" charset="-122"/>
                 <a:cs typeface="Arial" pitchFamily="34" charset="-120"/>
               </a:rPr>
-              <a:t> gives 16 of them.</a:t>
+              <a:t>A printed Nikhilam sūtra poster — IAST + English — on the wall.</a:t>
             </a:r>
             <a:endParaRPr lang="en-US" sz="1200" dirty="0"/>
           </a:p>
@@ -5255,7 +7195,7 @@
                 <a:ea typeface="Georgia" pitchFamily="34" charset="-122"/>
                 <a:cs typeface="Georgia" pitchFamily="34" charset="-120"/>
               </a:rPr>
-              <a:t>Lesson flow</a:t>
+              <a:t>Vocabulary introduced today</a:t>
             </a:r>
             <a:endParaRPr lang="en-US" sz="1800" dirty="0"/>
           </a:p>
@@ -5264,6 +7204,156 @@
       <p:sp>
         <p:nvSpPr>
           <p:cNvPr id="4" name="Text 2"/>
+          <p:cNvSpPr/>
+          <p:nvPr/>
+        </p:nvSpPr>
+        <p:spPr>
+          <a:xfrm>
+            <a:off x="634901" y="883593"/>
+            <a:ext cx="8102798" cy="937022"/>
+          </a:xfrm>
+          <a:prstGeom prst="rect">
+            <a:avLst/>
+          </a:prstGeom>
+          <a:noFill/>
+          <a:ln/>
+        </p:spPr>
+        <p:txBody>
+          <a:bodyPr wrap="square" lIns="0" tIns="0" rIns="0" bIns="0" rtlCol="0" anchor="t"/>
+          <a:lstStyle/>
+          <a:p>
+            <a:pPr algn="l" marL="342900" indent="-342900">
+              <a:lnSpc>
+                <a:spcPts val="1620"/>
+              </a:lnSpc>
+              <a:spcAft>
+                <a:spcPts val="300"/>
+              </a:spcAft>
+              <a:buSzPct val="100000"/>
+              <a:buChar char="•"/>
+            </a:pPr>
+            <a:r>
+              <a:rPr lang="en-US" sz="1200" i="1" dirty="0">
+                <a:solidFill>
+                  <a:srgbClr val="1C2833"/>
+                </a:solidFill>
+                <a:latin typeface="Arial" pitchFamily="34" charset="0"/>
+                <a:ea typeface="Arial" pitchFamily="34" charset="-122"/>
+                <a:cs typeface="Arial" pitchFamily="34" charset="-120"/>
+              </a:rPr>
+              <a:t>Nikhilaṁ Navataścaramaṁ Daśataḥ</a:t>
+            </a:r>
+            <a:pPr algn="l" indent="0" marL="0">
+              <a:lnSpc>
+                <a:spcPts val="1620"/>
+              </a:lnSpc>
+              <a:spcAft>
+                <a:spcPts val="300"/>
+              </a:spcAft>
+              <a:buNone/>
+            </a:pPr>
+            <a:r>
+              <a:rPr lang="en-US" sz="1200" dirty="0">
+                <a:solidFill>
+                  <a:srgbClr val="1C2833"/>
+                </a:solidFill>
+                <a:latin typeface="Arial" pitchFamily="34" charset="0"/>
+                <a:ea typeface="Arial" pitchFamily="34" charset="-122"/>
+                <a:cs typeface="Arial" pitchFamily="34" charset="-120"/>
+              </a:rPr>
+              <a:t> (IAST: nikhilaṁ navataścaramaṁ daśataḥ; lit. "all from nine and the last from ten") — the sūtra we'll learn this fortnight.</a:t>
+            </a:r>
+            <a:endParaRPr lang="en-US" sz="1200" dirty="0"/>
+          </a:p>
+          <a:p>
+            <a:pPr algn="l" marL="342900" indent="-342900">
+              <a:lnSpc>
+                <a:spcPts val="1620"/>
+              </a:lnSpc>
+              <a:spcAft>
+                <a:spcPts val="300"/>
+              </a:spcAft>
+              <a:buSzPct val="100000"/>
+              <a:buChar char="•"/>
+            </a:pPr>
+            <a:r>
+              <a:rPr lang="en-US" sz="1200" i="1" dirty="0">
+                <a:solidFill>
+                  <a:srgbClr val="1C2833"/>
+                </a:solidFill>
+                <a:latin typeface="Arial" pitchFamily="34" charset="0"/>
+                <a:ea typeface="Arial" pitchFamily="34" charset="-122"/>
+                <a:cs typeface="Arial" pitchFamily="34" charset="-120"/>
+              </a:rPr>
+              <a:t>sūtra</a:t>
+            </a:r>
+            <a:pPr algn="l" indent="0" marL="0">
+              <a:lnSpc>
+                <a:spcPts val="1620"/>
+              </a:lnSpc>
+              <a:spcAft>
+                <a:spcPts val="300"/>
+              </a:spcAft>
+              <a:buNone/>
+            </a:pPr>
+            <a:r>
+              <a:rPr lang="en-US" sz="1200" dirty="0">
+                <a:solidFill>
+                  <a:srgbClr val="1C2833"/>
+                </a:solidFill>
+                <a:latin typeface="Arial" pitchFamily="34" charset="0"/>
+                <a:ea typeface="Arial" pitchFamily="34" charset="-122"/>
+                <a:cs typeface="Arial" pitchFamily="34" charset="-120"/>
+              </a:rPr>
+              <a:t> (IAST: sūtra; lit. "thread, formula, aphorism") — a short mnemonic rule. Tirthaji's </a:t>
+            </a:r>
+            <a:pPr algn="l" indent="0" marL="0">
+              <a:lnSpc>
+                <a:spcPts val="1620"/>
+              </a:lnSpc>
+              <a:spcAft>
+                <a:spcPts val="300"/>
+              </a:spcAft>
+              <a:buNone/>
+            </a:pPr>
+            <a:r>
+              <a:rPr lang="en-US" sz="1200" i="1" dirty="0">
+                <a:solidFill>
+                  <a:srgbClr val="1C2833"/>
+                </a:solidFill>
+                <a:latin typeface="Arial" pitchFamily="34" charset="0"/>
+                <a:ea typeface="Arial" pitchFamily="34" charset="-122"/>
+                <a:cs typeface="Arial" pitchFamily="34" charset="-120"/>
+              </a:rPr>
+              <a:t>Vedic Mathematics</a:t>
+            </a:r>
+            <a:pPr algn="l" indent="0" marL="0">
+              <a:lnSpc>
+                <a:spcPts val="1620"/>
+              </a:lnSpc>
+              <a:spcAft>
+                <a:spcPts val="300"/>
+              </a:spcAft>
+              <a:buNone/>
+            </a:pPr>
+            <a:r>
+              <a:rPr lang="en-US" sz="1200" dirty="0">
+                <a:solidFill>
+                  <a:srgbClr val="1C2833"/>
+                </a:solidFill>
+                <a:latin typeface="Arial" pitchFamily="34" charset="0"/>
+                <a:ea typeface="Arial" pitchFamily="34" charset="-122"/>
+                <a:cs typeface="Arial" pitchFamily="34" charset="-120"/>
+              </a:rPr>
+              <a:t> gives 16 of them.</a:t>
+            </a:r>
+            <a:endParaRPr lang="en-US" sz="1200" dirty="0"/>
+          </a:p>
+        </p:txBody>
+      </p:sp>
+      <p:sp>
+        <p:nvSpPr>
+          <p:cNvPr id="5" name="Text 3"/>
           <p:cNvSpPr/>
           <p:nvPr/>
         </p:nvSpPr>
@@ -5413,7 +7503,7 @@
                 <a:ea typeface="Georgia" pitchFamily="34" charset="-122"/>
                 <a:cs typeface="Georgia" pitchFamily="34" charset="-120"/>
               </a:rPr>
-              <a:t>Warm-up (5 min)</a:t>
+              <a:t>Lesson flow</a:t>
             </a:r>
             <a:endParaRPr lang="en-US" sz="1800" dirty="0"/>
           </a:p>
@@ -5422,169 +7512,6 @@
       <p:sp>
         <p:nvSpPr>
           <p:cNvPr id="4" name="Text 2"/>
-          <p:cNvSpPr/>
-          <p:nvPr/>
-        </p:nvSpPr>
-        <p:spPr>
-          <a:xfrm>
-            <a:off x="406301" y="870942"/>
-            <a:ext cx="8498026" cy="649337"/>
-          </a:xfrm>
-          <a:prstGeom prst="rect">
-            <a:avLst/>
-          </a:prstGeom>
-          <a:noFill/>
-          <a:ln/>
-        </p:spPr>
-        <p:txBody>
-          <a:bodyPr wrap="square" lIns="0" tIns="0" rIns="0" bIns="0" rtlCol="0" anchor="t"/>
-          <a:lstStyle/>
-          <a:p>
-            <a:pPr algn="l" indent="0" marL="0">
-              <a:lnSpc>
-                <a:spcPts val="1680"/>
-              </a:lnSpc>
-              <a:spcBef>
-                <a:spcPts val="300"/>
-              </a:spcBef>
-              <a:spcAft>
-                <a:spcPts val="300"/>
-              </a:spcAft>
-              <a:buNone/>
-            </a:pPr>
-            <a:r>
-              <a:rPr lang="en-US" sz="1200" dirty="0">
-                <a:solidFill>
-                  <a:srgbClr val="1C2833"/>
-                </a:solidFill>
-                <a:latin typeface="Arial" pitchFamily="34" charset="0"/>
-                <a:ea typeface="Arial" pitchFamily="34" charset="-122"/>
-                <a:cs typeface="Arial" pitchFamily="34" charset="-120"/>
-              </a:rPr>
-              <a:t>– Teacher: </a:t>
-            </a:r>
-            <a:pPr algn="l" indent="0" marL="0">
-              <a:lnSpc>
-                <a:spcPts val="1680"/>
-              </a:lnSpc>
-              <a:spcBef>
-                <a:spcPts val="300"/>
-              </a:spcBef>
-              <a:spcAft>
-                <a:spcPts val="300"/>
-              </a:spcAft>
-              <a:buNone/>
-            </a:pPr>
-            <a:r>
-              <a:rPr lang="en-US" sz="1200" i="1" dirty="0">
-                <a:solidFill>
-                  <a:srgbClr val="1C2833"/>
-                </a:solidFill>
-                <a:latin typeface="Arial" pitchFamily="34" charset="0"/>
-                <a:ea typeface="Arial" pitchFamily="34" charset="-122"/>
-                <a:cs typeface="Arial" pitchFamily="34" charset="-120"/>
-              </a:rPr>
-              <a:t>"How long does it take you to solve</a:t>
-            </a:r>
-            <a:pPr algn="l" indent="0" marL="0">
-              <a:lnSpc>
-                <a:spcPts val="1680"/>
-              </a:lnSpc>
-              <a:spcBef>
-                <a:spcPts val="300"/>
-              </a:spcBef>
-              <a:spcAft>
-                <a:spcPts val="300"/>
-              </a:spcAft>
-              <a:buNone/>
-            </a:pPr>
-            <a:r>
-              <a:rPr lang="en-US" sz="1200" dirty="0">
-                <a:solidFill>
-                  <a:srgbClr val="1C2833"/>
-                </a:solidFill>
-                <a:latin typeface="Arial" pitchFamily="34" charset="0"/>
-                <a:ea typeface="Arial" pitchFamily="34" charset="-122"/>
-                <a:cs typeface="Arial" pitchFamily="34" charset="-120"/>
-              </a:rPr>
-              <a:t> </a:t>
-            </a:r>
-            <a:pPr algn="l" indent="0" marL="0">
-              <a:lnSpc>
-                <a:spcPts val="1680"/>
-              </a:lnSpc>
-              <a:spcBef>
-                <a:spcPts val="300"/>
-              </a:spcBef>
-              <a:spcAft>
-                <a:spcPts val="300"/>
-              </a:spcAft>
-              <a:buNone/>
-            </a:pPr>
-            <a:r>
-              <a:rPr lang="en-US" sz="1200" dirty="0">
-                <a:solidFill>
-                  <a:srgbClr val="1C2833"/>
-                </a:solidFill>
-                <a:latin typeface="Arial" pitchFamily="34" charset="0"/>
-                <a:ea typeface="Arial" pitchFamily="34" charset="-122"/>
-                <a:cs typeface="Arial" pitchFamily="34" charset="-120"/>
-              </a:rPr>
-              <a:t>10 000 − 4567</a:t>
-            </a:r>
-            <a:pPr algn="l" indent="0" marL="0">
-              <a:lnSpc>
-                <a:spcPts val="1680"/>
-              </a:lnSpc>
-              <a:spcBef>
-                <a:spcPts val="300"/>
-              </a:spcBef>
-              <a:spcAft>
-                <a:spcPts val="300"/>
-              </a:spcAft>
-              <a:buNone/>
-            </a:pPr>
-            <a:r>
-              <a:rPr lang="en-US" sz="1200" i="1" dirty="0">
-                <a:solidFill>
-                  <a:srgbClr val="1C2833"/>
-                </a:solidFill>
-                <a:latin typeface="Arial" pitchFamily="34" charset="0"/>
-                <a:ea typeface="Arial" pitchFamily="34" charset="-122"/>
-                <a:cs typeface="Arial" pitchFamily="34" charset="-120"/>
-              </a:rPr>
-              <a:t>? Make a guess."</a:t>
-            </a:r>
-            <a:pPr algn="l" indent="0" marL="0">
-              <a:lnSpc>
-                <a:spcPts val="1680"/>
-              </a:lnSpc>
-              <a:spcBef>
-                <a:spcPts val="300"/>
-              </a:spcBef>
-              <a:spcAft>
-                <a:spcPts val="300"/>
-              </a:spcAft>
-              <a:buNone/>
-            </a:pPr>
-            <a:r>
-              <a:rPr lang="en-US" sz="1200" dirty="0">
-                <a:solidFill>
-                  <a:srgbClr val="1C2833"/>
-                </a:solidFill>
-                <a:latin typeface="Arial" pitchFamily="34" charset="0"/>
-                <a:ea typeface="Arial" pitchFamily="34" charset="-122"/>
-                <a:cs typeface="Arial" pitchFamily="34" charset="-120"/>
-              </a:rPr>
-              <a:t> – Take 3–4 guesses. Write the range on the board (e.g. "15 sec to 60 sec"). – Quick make-10 reflex round: teacher calls digits; class chorus the partner. 8 → 2, 6 → 4, 9 → 1, 3 → 7, 5 → 5, 4 → 6, 7 → 3, 2 → 8.</a:t>
-            </a:r>
-            <a:endParaRPr lang="en-US" sz="1200" dirty="0"/>
-          </a:p>
-        </p:txBody>
-      </p:sp>
-      <p:sp>
-        <p:nvSpPr>
-          <p:cNvPr id="5" name="Text 3"/>
           <p:cNvSpPr/>
           <p:nvPr/>
         </p:nvSpPr>
@@ -5734,7 +7661,7 @@
                 <a:ea typeface="Georgia" pitchFamily="34" charset="-122"/>
                 <a:cs typeface="Georgia" pitchFamily="34" charset="-120"/>
               </a:rPr>
-              <a:t>Baseline timing (8 min)</a:t>
+              <a:t>Warm-up (5 min)</a:t>
             </a:r>
             <a:endParaRPr lang="en-US" sz="1800" dirty="0"/>
           </a:p>
@@ -5748,8 +7675,8 @@
         </p:nvSpPr>
         <p:spPr>
           <a:xfrm>
-            <a:off x="406301" y="870942"/>
-            <a:ext cx="8498026" cy="639812"/>
+            <a:off x="634901" y="883593"/>
+            <a:ext cx="8102798" cy="994172"/>
           </a:xfrm>
           <a:prstGeom prst="rect">
             <a:avLst/>
@@ -5761,17 +7688,15 @@
           <a:bodyPr wrap="square" lIns="0" tIns="0" rIns="0" bIns="0" rtlCol="0" anchor="t"/>
           <a:lstStyle/>
           <a:p>
-            <a:pPr algn="l" indent="0" marL="0">
-              <a:lnSpc>
-                <a:spcPts val="1680"/>
-              </a:lnSpc>
-              <a:spcBef>
-                <a:spcPts val="300"/>
-              </a:spcBef>
-              <a:spcAft>
-                <a:spcPts val="300"/>
-              </a:spcAft>
-              <a:buNone/>
+            <a:pPr algn="l" marL="342900" indent="-342900">
+              <a:lnSpc>
+                <a:spcPts val="1620"/>
+              </a:lnSpc>
+              <a:spcAft>
+                <a:spcPts val="300"/>
+              </a:spcAft>
+              <a:buSzPct val="100000"/>
+              <a:buChar char="•"/>
             </a:pPr>
             <a:r>
               <a:rPr lang="en-US" sz="1200" dirty="0">
@@ -5782,7 +7707,135 @@
                 <a:ea typeface="Arial" pitchFamily="34" charset="-122"/>
                 <a:cs typeface="Arial" pitchFamily="34" charset="-120"/>
               </a:rPr>
-              <a:t>– Hand out the baseline sheet face-down. – Students write their name and predicted time on the back. – On "Go," flip and solve using whatever method they normally use (standard borrowing). – Record their actual time (the wall clock is running). – Mark answer; honest self-correction — they're racing themselves over the module, not each other.</a:t>
+              <a:t>Teacher: </a:t>
+            </a:r>
+            <a:pPr algn="l" indent="0" marL="0">
+              <a:lnSpc>
+                <a:spcPts val="1620"/>
+              </a:lnSpc>
+              <a:spcAft>
+                <a:spcPts val="300"/>
+              </a:spcAft>
+              <a:buNone/>
+            </a:pPr>
+            <a:r>
+              <a:rPr lang="en-US" sz="1200" i="1" dirty="0">
+                <a:solidFill>
+                  <a:srgbClr val="1C2833"/>
+                </a:solidFill>
+                <a:latin typeface="Arial" pitchFamily="34" charset="0"/>
+                <a:ea typeface="Arial" pitchFamily="34" charset="-122"/>
+                <a:cs typeface="Arial" pitchFamily="34" charset="-120"/>
+              </a:rPr>
+              <a:t>"How long does it take you to solve</a:t>
+            </a:r>
+            <a:pPr algn="l" indent="0" marL="0">
+              <a:lnSpc>
+                <a:spcPts val="1620"/>
+              </a:lnSpc>
+              <a:spcAft>
+                <a:spcPts val="300"/>
+              </a:spcAft>
+              <a:buNone/>
+            </a:pPr>
+            <a:r>
+              <a:rPr lang="en-US" sz="1200" dirty="0">
+                <a:solidFill>
+                  <a:srgbClr val="1C2833"/>
+                </a:solidFill>
+                <a:latin typeface="Arial" pitchFamily="34" charset="0"/>
+                <a:ea typeface="Arial" pitchFamily="34" charset="-122"/>
+                <a:cs typeface="Arial" pitchFamily="34" charset="-120"/>
+              </a:rPr>
+              <a:t> </a:t>
+            </a:r>
+            <a:pPr algn="l" indent="0" marL="0">
+              <a:lnSpc>
+                <a:spcPts val="1620"/>
+              </a:lnSpc>
+              <a:spcAft>
+                <a:spcPts val="300"/>
+              </a:spcAft>
+              <a:buNone/>
+            </a:pPr>
+            <a:r>
+              <a:rPr lang="en-US" sz="1200" dirty="0">
+                <a:solidFill>
+                  <a:srgbClr val="1C2833"/>
+                </a:solidFill>
+                <a:latin typeface="Arial" pitchFamily="34" charset="0"/>
+                <a:ea typeface="Arial" pitchFamily="34" charset="-122"/>
+                <a:cs typeface="Arial" pitchFamily="34" charset="-120"/>
+              </a:rPr>
+              <a:t>10 000 − 4567</a:t>
+            </a:r>
+            <a:pPr algn="l" indent="0" marL="0">
+              <a:lnSpc>
+                <a:spcPts val="1620"/>
+              </a:lnSpc>
+              <a:spcAft>
+                <a:spcPts val="300"/>
+              </a:spcAft>
+              <a:buNone/>
+            </a:pPr>
+            <a:r>
+              <a:rPr lang="en-US" sz="1200" i="1" dirty="0">
+                <a:solidFill>
+                  <a:srgbClr val="1C2833"/>
+                </a:solidFill>
+                <a:latin typeface="Arial" pitchFamily="34" charset="0"/>
+                <a:ea typeface="Arial" pitchFamily="34" charset="-122"/>
+                <a:cs typeface="Arial" pitchFamily="34" charset="-120"/>
+              </a:rPr>
+              <a:t>? Make a guess."</a:t>
+            </a:r>
+            <a:endParaRPr lang="en-US" sz="1200" dirty="0"/>
+          </a:p>
+          <a:p>
+            <a:pPr algn="l" marL="342900" indent="-342900">
+              <a:lnSpc>
+                <a:spcPts val="1620"/>
+              </a:lnSpc>
+              <a:spcAft>
+                <a:spcPts val="300"/>
+              </a:spcAft>
+              <a:buSzPct val="100000"/>
+              <a:buChar char="•"/>
+            </a:pPr>
+            <a:r>
+              <a:rPr lang="en-US" sz="1200" dirty="0">
+                <a:solidFill>
+                  <a:srgbClr val="1C2833"/>
+                </a:solidFill>
+                <a:latin typeface="Arial" pitchFamily="34" charset="0"/>
+                <a:ea typeface="Arial" pitchFamily="34" charset="-122"/>
+                <a:cs typeface="Arial" pitchFamily="34" charset="-120"/>
+              </a:rPr>
+              <a:t>Take 3–4 guesses. Write the range on the board (e.g. "15 sec to 60 sec").</a:t>
+            </a:r>
+            <a:endParaRPr lang="en-US" sz="1200" dirty="0"/>
+          </a:p>
+          <a:p>
+            <a:pPr algn="l" marL="342900" indent="-342900">
+              <a:lnSpc>
+                <a:spcPts val="1620"/>
+              </a:lnSpc>
+              <a:spcAft>
+                <a:spcPts val="300"/>
+              </a:spcAft>
+              <a:buSzPct val="100000"/>
+              <a:buChar char="•"/>
+            </a:pPr>
+            <a:r>
+              <a:rPr lang="en-US" sz="1200" dirty="0">
+                <a:solidFill>
+                  <a:srgbClr val="1C2833"/>
+                </a:solidFill>
+                <a:latin typeface="Arial" pitchFamily="34" charset="0"/>
+                <a:ea typeface="Arial" pitchFamily="34" charset="-122"/>
+                <a:cs typeface="Arial" pitchFamily="34" charset="-120"/>
+              </a:rPr>
+              <a:t>Quick make-10 reflex round: teacher calls digits; class chorus the partner. 8 → 2, 6 → 4, 9 → 1, 3 → 7, 5 → 5, 4 → 6, 7 → 3, 2 → 8.</a:t>
             </a:r>
             <a:endParaRPr lang="en-US" sz="1200" dirty="0"/>
           </a:p>
@@ -5940,7 +7993,7 @@
                 <a:ea typeface="Georgia" pitchFamily="34" charset="-122"/>
                 <a:cs typeface="Georgia" pitchFamily="34" charset="-120"/>
               </a:rPr>
-              <a:t>Meet the sūtra (5 min)</a:t>
+              <a:t>Baseline timing (8 min)</a:t>
             </a:r>
             <a:endParaRPr lang="en-US" sz="1800" dirty="0"/>
           </a:p>
@@ -5954,8 +8007,8 @@
         </p:nvSpPr>
         <p:spPr>
           <a:xfrm>
-            <a:off x="406301" y="870942"/>
-            <a:ext cx="8498026" cy="213271"/>
+            <a:off x="634901" y="883593"/>
+            <a:ext cx="8102798" cy="1257002"/>
           </a:xfrm>
           <a:prstGeom prst="rect">
             <a:avLst/>
@@ -5967,17 +8020,15 @@
           <a:bodyPr wrap="square" lIns="0" tIns="0" rIns="0" bIns="0" rtlCol="0" anchor="t"/>
           <a:lstStyle/>
           <a:p>
-            <a:pPr algn="l" indent="0" marL="0">
-              <a:lnSpc>
-                <a:spcPts val="1680"/>
-              </a:lnSpc>
-              <a:spcBef>
-                <a:spcPts val="300"/>
-              </a:spcBef>
-              <a:spcAft>
-                <a:spcPts val="300"/>
-              </a:spcAft>
-              <a:buNone/>
+            <a:pPr algn="l" marL="342900" indent="-342900">
+              <a:lnSpc>
+                <a:spcPts val="1620"/>
+              </a:lnSpc>
+              <a:spcAft>
+                <a:spcPts val="300"/>
+              </a:spcAft>
+              <a:buSzPct val="100000"/>
+              <a:buChar char="•"/>
             </a:pPr>
             <a:r>
               <a:rPr lang="en-US" sz="1200" dirty="0">
@@ -5988,180 +8039,111 @@
                 <a:ea typeface="Arial" pitchFamily="34" charset="-122"/>
                 <a:cs typeface="Arial" pitchFamily="34" charset="-120"/>
               </a:rPr>
-              <a:t>– Point to the wall poster. Teacher reads slowly:</a:t>
+              <a:t>Hand out the baseline sheet face-down.</a:t>
             </a:r>
             <a:endParaRPr lang="en-US" sz="1200" dirty="0"/>
           </a:p>
+          <a:p>
+            <a:pPr algn="l" marL="342900" indent="-342900">
+              <a:lnSpc>
+                <a:spcPts val="1620"/>
+              </a:lnSpc>
+              <a:spcAft>
+                <a:spcPts val="300"/>
+              </a:spcAft>
+              <a:buSzPct val="100000"/>
+              <a:buChar char="•"/>
+            </a:pPr>
+            <a:r>
+              <a:rPr lang="en-US" sz="1200" dirty="0">
+                <a:solidFill>
+                  <a:srgbClr val="1C2833"/>
+                </a:solidFill>
+                <a:latin typeface="Arial" pitchFamily="34" charset="0"/>
+                <a:ea typeface="Arial" pitchFamily="34" charset="-122"/>
+                <a:cs typeface="Arial" pitchFamily="34" charset="-120"/>
+              </a:rPr>
+              <a:t>Students write their name and predicted time on the back.</a:t>
+            </a:r>
+            <a:endParaRPr lang="en-US" sz="1200" dirty="0"/>
+          </a:p>
+          <a:p>
+            <a:pPr algn="l" marL="342900" indent="-342900">
+              <a:lnSpc>
+                <a:spcPts val="1620"/>
+              </a:lnSpc>
+              <a:spcAft>
+                <a:spcPts val="300"/>
+              </a:spcAft>
+              <a:buSzPct val="100000"/>
+              <a:buChar char="•"/>
+            </a:pPr>
+            <a:r>
+              <a:rPr lang="en-US" sz="1200" dirty="0">
+                <a:solidFill>
+                  <a:srgbClr val="1C2833"/>
+                </a:solidFill>
+                <a:latin typeface="Arial" pitchFamily="34" charset="0"/>
+                <a:ea typeface="Arial" pitchFamily="34" charset="-122"/>
+                <a:cs typeface="Arial" pitchFamily="34" charset="-120"/>
+              </a:rPr>
+              <a:t>On "Go," flip and solve using whatever method they normally use (standard borrowing).</a:t>
+            </a:r>
+            <a:endParaRPr lang="en-US" sz="1200" dirty="0"/>
+          </a:p>
+          <a:p>
+            <a:pPr algn="l" marL="342900" indent="-342900">
+              <a:lnSpc>
+                <a:spcPts val="1620"/>
+              </a:lnSpc>
+              <a:spcAft>
+                <a:spcPts val="300"/>
+              </a:spcAft>
+              <a:buSzPct val="100000"/>
+              <a:buChar char="•"/>
+            </a:pPr>
+            <a:r>
+              <a:rPr lang="en-US" sz="1200" dirty="0">
+                <a:solidFill>
+                  <a:srgbClr val="1C2833"/>
+                </a:solidFill>
+                <a:latin typeface="Arial" pitchFamily="34" charset="0"/>
+                <a:ea typeface="Arial" pitchFamily="34" charset="-122"/>
+                <a:cs typeface="Arial" pitchFamily="34" charset="-120"/>
+              </a:rPr>
+              <a:t>Record their actual time (the wall clock is running).</a:t>
+            </a:r>
+            <a:endParaRPr lang="en-US" sz="1200" dirty="0"/>
+          </a:p>
+          <a:p>
+            <a:pPr algn="l" marL="342900" indent="-342900">
+              <a:lnSpc>
+                <a:spcPts val="1620"/>
+              </a:lnSpc>
+              <a:spcAft>
+                <a:spcPts val="300"/>
+              </a:spcAft>
+              <a:buSzPct val="100000"/>
+              <a:buChar char="•"/>
+            </a:pPr>
+            <a:r>
+              <a:rPr lang="en-US" sz="1200" dirty="0">
+                <a:solidFill>
+                  <a:srgbClr val="1C2833"/>
+                </a:solidFill>
+                <a:latin typeface="Arial" pitchFamily="34" charset="0"/>
+                <a:ea typeface="Arial" pitchFamily="34" charset="-122"/>
+                <a:cs typeface="Arial" pitchFamily="34" charset="-120"/>
+              </a:rPr>
+              <a:t>Mark answer; honest self-correction — they're racing themselves over the module, not each other.</a:t>
+            </a:r>
+            <a:endParaRPr lang="en-US" sz="1200" dirty="0"/>
+          </a:p>
         </p:txBody>
       </p:sp>
       <p:sp>
         <p:nvSpPr>
           <p:cNvPr id="5" name="Text 3"/>
-          <p:cNvSpPr/>
-          <p:nvPr/>
-        </p:nvSpPr>
-        <p:spPr>
-          <a:xfrm>
-            <a:off x="406301" y="1160413"/>
-            <a:ext cx="8498026" cy="213271"/>
-          </a:xfrm>
-          <a:prstGeom prst="rect">
-            <a:avLst/>
-          </a:prstGeom>
-          <a:noFill/>
-          <a:ln/>
-        </p:spPr>
-        <p:txBody>
-          <a:bodyPr wrap="square" lIns="0" tIns="0" rIns="0" bIns="0" rtlCol="0" anchor="t"/>
-          <a:lstStyle/>
-          <a:p>
-            <a:pPr algn="l" indent="0" marL="0">
-              <a:lnSpc>
-                <a:spcPts val="1680"/>
-              </a:lnSpc>
-              <a:spcBef>
-                <a:spcPts val="300"/>
-              </a:spcBef>
-              <a:spcAft>
-                <a:spcPts val="300"/>
-              </a:spcAft>
-              <a:buNone/>
-            </a:pPr>
-            <a:r>
-              <a:rPr lang="en-US" sz="1200" dirty="0">
-                <a:solidFill>
-                  <a:srgbClr val="1C2833"/>
-                </a:solidFill>
-                <a:latin typeface="Arial" pitchFamily="34" charset="0"/>
-                <a:ea typeface="Arial" pitchFamily="34" charset="-122"/>
-                <a:cs typeface="Arial" pitchFamily="34" charset="-120"/>
-              </a:rPr>
-              <a:t>&gt; </a:t>
-            </a:r>
-            <a:pPr algn="l" indent="0" marL="0">
-              <a:lnSpc>
-                <a:spcPts val="1680"/>
-              </a:lnSpc>
-              <a:spcBef>
-                <a:spcPts val="300"/>
-              </a:spcBef>
-              <a:spcAft>
-                <a:spcPts val="300"/>
-              </a:spcAft>
-              <a:buNone/>
-            </a:pPr>
-            <a:r>
-              <a:rPr lang="en-US" sz="1200" i="1" dirty="0">
-                <a:solidFill>
-                  <a:srgbClr val="1C2833"/>
-                </a:solidFill>
-                <a:latin typeface="Arial" pitchFamily="34" charset="0"/>
-                <a:ea typeface="Arial" pitchFamily="34" charset="-122"/>
-                <a:cs typeface="Arial" pitchFamily="34" charset="-120"/>
-              </a:rPr>
-              <a:t>Nikhilaṁ Navataścaramaṁ Daśataḥ</a:t>
-            </a:r>
-            <a:pPr algn="l" indent="0" marL="0">
-              <a:lnSpc>
-                <a:spcPts val="1680"/>
-              </a:lnSpc>
-              <a:spcBef>
-                <a:spcPts val="300"/>
-              </a:spcBef>
-              <a:spcAft>
-                <a:spcPts val="300"/>
-              </a:spcAft>
-              <a:buNone/>
-            </a:pPr>
-            <a:r>
-              <a:rPr lang="en-US" sz="1200" dirty="0">
-                <a:solidFill>
-                  <a:srgbClr val="1C2833"/>
-                </a:solidFill>
-                <a:latin typeface="Arial" pitchFamily="34" charset="0"/>
-                <a:ea typeface="Arial" pitchFamily="34" charset="-122"/>
-                <a:cs typeface="Arial" pitchFamily="34" charset="-120"/>
-              </a:rPr>
-              <a:t> &gt; "All from nine and the last from ten."</a:t>
-            </a:r>
-            <a:endParaRPr lang="en-US" sz="1200" dirty="0"/>
-          </a:p>
-        </p:txBody>
-      </p:sp>
-      <p:sp>
-        <p:nvSpPr>
-          <p:cNvPr id="6" name="Text 4"/>
-          <p:cNvSpPr/>
-          <p:nvPr/>
-        </p:nvSpPr>
-        <p:spPr>
-          <a:xfrm>
-            <a:off x="406301" y="1449884"/>
-            <a:ext cx="8498026" cy="426541"/>
-          </a:xfrm>
-          <a:prstGeom prst="rect">
-            <a:avLst/>
-          </a:prstGeom>
-          <a:noFill/>
-          <a:ln/>
-        </p:spPr>
-        <p:txBody>
-          <a:bodyPr wrap="square" lIns="0" tIns="0" rIns="0" bIns="0" rtlCol="0" anchor="t"/>
-          <a:lstStyle/>
-          <a:p>
-            <a:pPr algn="l" indent="0" marL="0">
-              <a:lnSpc>
-                <a:spcPts val="1680"/>
-              </a:lnSpc>
-              <a:spcBef>
-                <a:spcPts val="300"/>
-              </a:spcBef>
-              <a:spcAft>
-                <a:spcPts val="300"/>
-              </a:spcAft>
-              <a:buNone/>
-            </a:pPr>
-            <a:r>
-              <a:rPr lang="en-US" sz="1200" dirty="0">
-                <a:solidFill>
-                  <a:srgbClr val="1C2833"/>
-                </a:solidFill>
-                <a:latin typeface="Arial" pitchFamily="34" charset="0"/>
-                <a:ea typeface="Arial" pitchFamily="34" charset="-122"/>
-                <a:cs typeface="Arial" pitchFamily="34" charset="-120"/>
-              </a:rPr>
-              <a:t>– Class echoes 3 times: soft / normal / loud. – Teacher: </a:t>
-            </a:r>
-            <a:pPr algn="l" indent="0" marL="0">
-              <a:lnSpc>
-                <a:spcPts val="1680"/>
-              </a:lnSpc>
-              <a:spcBef>
-                <a:spcPts val="300"/>
-              </a:spcBef>
-              <a:spcAft>
-                <a:spcPts val="300"/>
-              </a:spcAft>
-              <a:buNone/>
-            </a:pPr>
-            <a:r>
-              <a:rPr lang="en-US" sz="1200" i="1" dirty="0">
-                <a:solidFill>
-                  <a:srgbClr val="1C2833"/>
-                </a:solidFill>
-                <a:latin typeface="Arial" pitchFamily="34" charset="0"/>
-                <a:ea typeface="Arial" pitchFamily="34" charset="-122"/>
-                <a:cs typeface="Arial" pitchFamily="34" charset="-120"/>
-              </a:rPr>
-              <a:t>"That's the whole rule. Six Sanskrit words. By Day 10 you'll use it without thinking."</a:t>
-            </a:r>
-            <a:endParaRPr lang="en-US" sz="1200" dirty="0"/>
-          </a:p>
-        </p:txBody>
-      </p:sp>
-      <p:sp>
-        <p:nvSpPr>
-          <p:cNvPr id="7" name="Text 5"/>
           <p:cNvSpPr/>
           <p:nvPr/>
         </p:nvSpPr>
@@ -6278,7 +8260,7 @@
         <p:spPr>
           <a:xfrm>
             <a:off x="406301" y="457051"/>
-            <a:ext cx="8498026" cy="548580"/>
+            <a:ext cx="8498026" cy="274290"/>
           </a:xfrm>
           <a:prstGeom prst="rect">
             <a:avLst/>
@@ -6311,7 +8293,7 @@
                 <a:ea typeface="Georgia" pitchFamily="34" charset="-122"/>
                 <a:cs typeface="Georgia" pitchFamily="34" charset="-120"/>
               </a:rPr>
-              <a:t>Teacher demonstration (12 min) — the same baseline problem, the Nikhilam way</a:t>
+              <a:t>Meet the sūtra (5 min)</a:t>
             </a:r>
             <a:endParaRPr lang="en-US" sz="1800" dirty="0"/>
           </a:p>
@@ -6325,8 +8307,8 @@
         </p:nvSpPr>
         <p:spPr>
           <a:xfrm>
-            <a:off x="406301" y="1145232"/>
-            <a:ext cx="8498026" cy="213271"/>
+            <a:off x="634901" y="883593"/>
+            <a:ext cx="8102798" cy="281880"/>
           </a:xfrm>
           <a:prstGeom prst="rect">
             <a:avLst/>
@@ -6338,17 +8320,15 @@
           <a:bodyPr wrap="square" lIns="0" tIns="0" rIns="0" bIns="0" rtlCol="0" anchor="t"/>
           <a:lstStyle/>
           <a:p>
-            <a:pPr algn="l" indent="0" marL="0">
-              <a:lnSpc>
-                <a:spcPts val="1680"/>
-              </a:lnSpc>
-              <a:spcBef>
-                <a:spcPts val="300"/>
-              </a:spcBef>
-              <a:spcAft>
-                <a:spcPts val="300"/>
-              </a:spcAft>
-              <a:buNone/>
+            <a:pPr algn="l" marL="342900" indent="-342900">
+              <a:lnSpc>
+                <a:spcPts val="1620"/>
+              </a:lnSpc>
+              <a:spcAft>
+                <a:spcPts val="300"/>
+              </a:spcAft>
+              <a:buSzPct val="100000"/>
+              <a:buChar char="•"/>
             </a:pPr>
             <a:r>
               <a:rPr lang="en-US" sz="1200" dirty="0">
@@ -6359,7 +8339,7 @@
                 <a:ea typeface="Arial" pitchFamily="34" charset="-122"/>
                 <a:cs typeface="Arial" pitchFamily="34" charset="-120"/>
               </a:rPr>
-              <a:t>Write on the board:</a:t>
+              <a:t>Point to the wall poster. Teacher reads slowly:</a:t>
             </a:r>
             <a:endParaRPr lang="en-US" sz="1200" dirty="0"/>
           </a:p>
@@ -6373,8 +8353,8 @@
         </p:nvSpPr>
         <p:spPr>
           <a:xfrm>
-            <a:off x="406301" y="1447354"/>
-            <a:ext cx="8331398" cy="777627"/>
+            <a:off x="406301" y="1266974"/>
+            <a:ext cx="8331398" cy="611981"/>
           </a:xfrm>
           <a:prstGeom prst="rect">
             <a:avLst/>
@@ -6403,16 +8383,16 @@
         </p:nvSpPr>
         <p:spPr>
           <a:xfrm>
-            <a:off x="430113" y="1447354"/>
-            <a:ext cx="0" cy="777627"/>
+            <a:off x="434876" y="1266974"/>
+            <a:ext cx="0" cy="611981"/>
           </a:xfrm>
           <a:prstGeom prst="line">
             <a:avLst/>
           </a:prstGeom>
           <a:noFill/>
-          <a:ln w="47625">
+          <a:ln w="57150">
             <a:solidFill>
-              <a:srgbClr val="277884"/>
+              <a:srgbClr val="FE4447"/>
             </a:solidFill>
             <a:prstDash val="solid"/>
           </a:ln>
@@ -6426,8 +8406,8 @@
         </p:nvSpPr>
         <p:spPr>
           <a:xfrm>
-            <a:off x="631627" y="1574304"/>
-            <a:ext cx="8086939" cy="174575"/>
+            <a:off x="692051" y="1457474"/>
+            <a:ext cx="7973389" cy="230981"/>
           </a:xfrm>
           <a:prstGeom prst="rect">
             <a:avLst/>
@@ -6441,22 +8421,51 @@
           <a:p>
             <a:pPr algn="l" indent="0" marL="0">
               <a:lnSpc>
-                <a:spcPts val="1375"/>
-              </a:lnSpc>
-              <a:buNone/>
-            </a:pPr>
-            <a:r>
-              <a:rPr lang="en-US" sz="1100" dirty="0">
-                <a:solidFill>
-                  <a:srgbClr val="1C2833"/>
-                </a:solidFill>
-                <a:latin typeface="Courier New" pitchFamily="34" charset="0"/>
-                <a:ea typeface="Courier New" pitchFamily="34" charset="-122"/>
-                <a:cs typeface="Courier New" pitchFamily="34" charset="-120"/>
-              </a:rPr>
-              <a:t>1 0 0 0 0</a:t>
-            </a:r>
-            <a:endParaRPr lang="en-US" sz="1100" dirty="0"/>
+                <a:spcPts val="1820"/>
+              </a:lnSpc>
+              <a:spcBef>
+                <a:spcPts val="300"/>
+              </a:spcBef>
+              <a:spcAft>
+                <a:spcPts val="300"/>
+              </a:spcAft>
+              <a:buNone/>
+            </a:pPr>
+            <a:r>
+              <a:rPr lang="en-US" sz="1300" i="1" dirty="0">
+                <a:solidFill>
+                  <a:srgbClr val="1C2833"/>
+                </a:solidFill>
+                <a:latin typeface="Georgia" pitchFamily="34" charset="0"/>
+                <a:ea typeface="Georgia" pitchFamily="34" charset="-122"/>
+                <a:cs typeface="Georgia" pitchFamily="34" charset="-120"/>
+              </a:rPr>
+              <a:t>Nikhilaṁ Navataścaramaṁ Daśataḥ</a:t>
+            </a:r>
+            <a:pPr algn="l" indent="0" marL="0">
+              <a:lnSpc>
+                <a:spcPts val="1820"/>
+              </a:lnSpc>
+              <a:spcBef>
+                <a:spcPts val="300"/>
+              </a:spcBef>
+              <a:spcAft>
+                <a:spcPts val="300"/>
+              </a:spcAft>
+              <a:buNone/>
+            </a:pPr>
+            <a:r>
+              <a:rPr lang="en-US" sz="1300" dirty="0">
+                <a:solidFill>
+                  <a:srgbClr val="1C2833"/>
+                </a:solidFill>
+                <a:latin typeface="Georgia" pitchFamily="34" charset="0"/>
+                <a:ea typeface="Georgia" pitchFamily="34" charset="-122"/>
+                <a:cs typeface="Georgia" pitchFamily="34" charset="-120"/>
+              </a:rPr>
+              <a:t> "All from nine and the last from ten."</a:t>
+            </a:r>
+            <a:endParaRPr lang="en-US" sz="1300" dirty="0"/>
           </a:p>
         </p:txBody>
       </p:sp>
@@ -6468,139 +8477,7 @@
         </p:nvSpPr>
         <p:spPr>
           <a:xfrm>
-            <a:off x="631627" y="1748879"/>
-            <a:ext cx="8086939" cy="174575"/>
-          </a:xfrm>
-          <a:prstGeom prst="rect">
-            <a:avLst/>
-          </a:prstGeom>
-          <a:noFill/>
-          <a:ln/>
-        </p:spPr>
-        <p:txBody>
-          <a:bodyPr wrap="square" lIns="0" tIns="0" rIns="0" bIns="0" rtlCol="0" anchor="t"/>
-          <a:lstStyle/>
-          <a:p>
-            <a:pPr algn="l" indent="0" marL="0">
-              <a:lnSpc>
-                <a:spcPts val="1375"/>
-              </a:lnSpc>
-              <a:buNone/>
-            </a:pPr>
-            <a:r>
-              <a:rPr lang="en-US" sz="1100" dirty="0">
-                <a:solidFill>
-                  <a:srgbClr val="1C2833"/>
-                </a:solidFill>
-                <a:latin typeface="Courier New" pitchFamily="34" charset="0"/>
-                <a:ea typeface="Courier New" pitchFamily="34" charset="-122"/>
-                <a:cs typeface="Courier New" pitchFamily="34" charset="-120"/>
-              </a:rPr>
-              <a:t>−        4 5 6 7</a:t>
-            </a:r>
-            <a:endParaRPr lang="en-US" sz="1100" dirty="0"/>
-          </a:p>
-        </p:txBody>
-      </p:sp>
-      <p:sp>
-        <p:nvSpPr>
-          <p:cNvPr id="9" name="Text 7"/>
-          <p:cNvSpPr/>
-          <p:nvPr/>
-        </p:nvSpPr>
-        <p:spPr>
-          <a:xfrm>
-            <a:off x="631627" y="1923455"/>
-            <a:ext cx="8086939" cy="174575"/>
-          </a:xfrm>
-          <a:prstGeom prst="rect">
-            <a:avLst/>
-          </a:prstGeom>
-          <a:noFill/>
-          <a:ln/>
-        </p:spPr>
-        <p:txBody>
-          <a:bodyPr wrap="square" lIns="0" tIns="0" rIns="0" bIns="0" rtlCol="0" anchor="t"/>
-          <a:lstStyle/>
-          <a:p>
-            <a:pPr algn="l" indent="0" marL="0">
-              <a:lnSpc>
-                <a:spcPts val="1375"/>
-              </a:lnSpc>
-              <a:buNone/>
-            </a:pPr>
-            <a:r>
-              <a:rPr lang="en-US" sz="1100" dirty="0">
-                <a:solidFill>
-                  <a:srgbClr val="1C2833"/>
-                </a:solidFill>
-                <a:latin typeface="Courier New" pitchFamily="34" charset="0"/>
-                <a:ea typeface="Courier New" pitchFamily="34" charset="-122"/>
-                <a:cs typeface="Courier New" pitchFamily="34" charset="-120"/>
-              </a:rPr>
-              <a:t>———————————————</a:t>
-            </a:r>
-            <a:endParaRPr lang="en-US" sz="1100" dirty="0"/>
-          </a:p>
-        </p:txBody>
-      </p:sp>
-      <p:sp>
-        <p:nvSpPr>
-          <p:cNvPr id="10" name="Text 8"/>
-          <p:cNvSpPr/>
-          <p:nvPr/>
-        </p:nvSpPr>
-        <p:spPr>
-          <a:xfrm>
-            <a:off x="406301" y="2313831"/>
-            <a:ext cx="8498026" cy="213271"/>
-          </a:xfrm>
-          <a:prstGeom prst="rect">
-            <a:avLst/>
-          </a:prstGeom>
-          <a:noFill/>
-          <a:ln/>
-        </p:spPr>
-        <p:txBody>
-          <a:bodyPr wrap="square" lIns="0" tIns="0" rIns="0" bIns="0" rtlCol="0" anchor="t"/>
-          <a:lstStyle/>
-          <a:p>
-            <a:pPr algn="l" indent="0" marL="0">
-              <a:lnSpc>
-                <a:spcPts val="1680"/>
-              </a:lnSpc>
-              <a:spcBef>
-                <a:spcPts val="300"/>
-              </a:spcBef>
-              <a:spcAft>
-                <a:spcPts val="300"/>
-              </a:spcAft>
-              <a:buNone/>
-            </a:pPr>
-            <a:r>
-              <a:rPr lang="en-US" sz="1200" dirty="0">
-                <a:solidFill>
-                  <a:srgbClr val="1C2833"/>
-                </a:solidFill>
-                <a:latin typeface="Arial" pitchFamily="34" charset="0"/>
-                <a:ea typeface="Arial" pitchFamily="34" charset="-122"/>
-                <a:cs typeface="Arial" pitchFamily="34" charset="-120"/>
-              </a:rPr>
-              <a:t>Narrate:</a:t>
-            </a:r>
-            <a:endParaRPr lang="en-US" sz="1200" dirty="0"/>
-          </a:p>
-        </p:txBody>
-      </p:sp>
-      <p:sp>
-        <p:nvSpPr>
-          <p:cNvPr id="11" name="Text 9"/>
-          <p:cNvSpPr/>
-          <p:nvPr/>
-        </p:nvSpPr>
-        <p:spPr>
-          <a:xfrm>
-            <a:off x="634901" y="2615952"/>
+            <a:off x="634901" y="1980456"/>
             <a:ext cx="8102798" cy="525661"/>
           </a:xfrm>
           <a:prstGeom prst="rect">
@@ -6624,15 +8501,15 @@
               <a:buChar char="•"/>
             </a:pPr>
             <a:r>
-              <a:rPr lang="en-US" sz="1200" i="1" dirty="0">
-                <a:solidFill>
-                  <a:srgbClr val="1C2833"/>
-                </a:solidFill>
-                <a:latin typeface="Arial" pitchFamily="34" charset="0"/>
-                <a:ea typeface="Arial" pitchFamily="34" charset="-122"/>
-                <a:cs typeface="Arial" pitchFamily="34" charset="-120"/>
-              </a:rPr>
-              <a:t>"We want to subtract 4567 from 10 000. That's 10⁴ — a clean power of ten. Perfect Nikhilam territory."</a:t>
+              <a:rPr lang="en-US" sz="1200" dirty="0">
+                <a:solidFill>
+                  <a:srgbClr val="1C2833"/>
+                </a:solidFill>
+                <a:latin typeface="Arial" pitchFamily="34" charset="0"/>
+                <a:ea typeface="Arial" pitchFamily="34" charset="-122"/>
+                <a:cs typeface="Arial" pitchFamily="34" charset="-120"/>
+              </a:rPr>
+              <a:t>Class echoes 3 times: soft / normal / loud.</a:t>
             </a:r>
             <a:endParaRPr lang="en-US" sz="1200" dirty="0"/>
           </a:p>
@@ -6648,6 +8525,26 @@
               <a:buChar char="•"/>
             </a:pPr>
             <a:r>
+              <a:rPr lang="en-US" sz="1200" dirty="0">
+                <a:solidFill>
+                  <a:srgbClr val="1C2833"/>
+                </a:solidFill>
+                <a:latin typeface="Arial" pitchFamily="34" charset="0"/>
+                <a:ea typeface="Arial" pitchFamily="34" charset="-122"/>
+                <a:cs typeface="Arial" pitchFamily="34" charset="-120"/>
+              </a:rPr>
+              <a:t>Teacher: </a:t>
+            </a:r>
+            <a:pPr algn="l" indent="0" marL="0">
+              <a:lnSpc>
+                <a:spcPts val="1620"/>
+              </a:lnSpc>
+              <a:spcAft>
+                <a:spcPts val="300"/>
+              </a:spcAft>
+              <a:buNone/>
+            </a:pPr>
+            <a:r>
               <a:rPr lang="en-US" sz="1200" i="1" dirty="0">
                 <a:solidFill>
                   <a:srgbClr val="1C2833"/>
@@ -6656,7 +8553,7 @@
                 <a:ea typeface="Arial" pitchFamily="34" charset="-122"/>
                 <a:cs typeface="Arial" pitchFamily="34" charset="-120"/>
               </a:rPr>
-              <a:t>"Treat 4567 as a 4-digit number. Apply the rule digit-by-digit."</a:t>
+              <a:t>"That's the whole rule. Six Sanskrit words. By Day 10 you'll use it without thinking."</a:t>
             </a:r>
             <a:endParaRPr lang="en-US" sz="1200" dirty="0"/>
           </a:p>
@@ -6664,537 +8561,13 @@
       </p:sp>
       <p:sp>
         <p:nvSpPr>
-          <p:cNvPr id="12" name="Text 10"/>
-          <p:cNvSpPr/>
-          <p:nvPr/>
-        </p:nvSpPr>
-        <p:spPr>
-          <a:xfrm>
-            <a:off x="406301" y="3230463"/>
-            <a:ext cx="8498026" cy="213271"/>
-          </a:xfrm>
-          <a:prstGeom prst="rect">
-            <a:avLst/>
-          </a:prstGeom>
-          <a:noFill/>
-          <a:ln/>
-        </p:spPr>
-        <p:txBody>
-          <a:bodyPr wrap="square" lIns="0" tIns="0" rIns="0" bIns="0" rtlCol="0" anchor="t"/>
-          <a:lstStyle/>
-          <a:p>
-            <a:pPr algn="l" indent="0" marL="0">
-              <a:lnSpc>
-                <a:spcPts val="1680"/>
-              </a:lnSpc>
-              <a:spcBef>
-                <a:spcPts val="300"/>
-              </a:spcBef>
-              <a:spcAft>
-                <a:spcPts val="300"/>
-              </a:spcAft>
-              <a:buNone/>
-            </a:pPr>
-            <a:r>
-              <a:rPr lang="en-US" sz="1200" i="1" dirty="0">
-                <a:solidFill>
-                  <a:srgbClr val="1C2833"/>
-                </a:solidFill>
-                <a:latin typeface="Arial" pitchFamily="34" charset="0"/>
-                <a:ea typeface="Arial" pitchFamily="34" charset="-122"/>
-                <a:cs typeface="Arial" pitchFamily="34" charset="-120"/>
-              </a:rPr>
-              <a:t>Each row: Step · Apply rule · Get.</a:t>
-            </a:r>
-            <a:endParaRPr lang="en-US" sz="1200" dirty="0"/>
-          </a:p>
-        </p:txBody>
-      </p:sp>
-      <p:sp>
-        <p:nvSpPr>
-          <p:cNvPr id="13" name="Text 11"/>
-          <p:cNvSpPr/>
-          <p:nvPr/>
-        </p:nvSpPr>
-        <p:spPr>
-          <a:xfrm>
-            <a:off x="634901" y="3532584"/>
-            <a:ext cx="8102798" cy="1013222"/>
-          </a:xfrm>
-          <a:prstGeom prst="rect">
-            <a:avLst/>
-          </a:prstGeom>
-          <a:noFill/>
-          <a:ln/>
-        </p:spPr>
-        <p:txBody>
-          <a:bodyPr wrap="square" lIns="0" tIns="0" rIns="0" bIns="0" rtlCol="0" anchor="t"/>
-          <a:lstStyle/>
-          <a:p>
-            <a:pPr algn="l" marL="342900" indent="-342900">
-              <a:lnSpc>
-                <a:spcPts val="1620"/>
-              </a:lnSpc>
-              <a:spcAft>
-                <a:spcPts val="300"/>
-              </a:spcAft>
-              <a:buSzPct val="100000"/>
-              <a:buChar char="•"/>
-            </a:pPr>
-            <a:r>
-              <a:rPr lang="en-US" sz="1200" b="1" dirty="0">
-                <a:solidFill>
-                  <a:srgbClr val="1C2833"/>
-                </a:solidFill>
-                <a:latin typeface="Arial" pitchFamily="34" charset="0"/>
-                <a:ea typeface="Arial" pitchFamily="34" charset="-122"/>
-                <a:cs typeface="Arial" pitchFamily="34" charset="-120"/>
-              </a:rPr>
-              <a:t>First digit (4):</a:t>
-            </a:r>
-            <a:pPr algn="l" indent="0" marL="0">
-              <a:lnSpc>
-                <a:spcPts val="1620"/>
-              </a:lnSpc>
-              <a:spcAft>
-                <a:spcPts val="300"/>
-              </a:spcAft>
-              <a:buNone/>
-            </a:pPr>
-            <a:r>
-              <a:rPr lang="en-US" sz="1200" dirty="0">
-                <a:solidFill>
-                  <a:srgbClr val="1C2833"/>
-                </a:solidFill>
-                <a:latin typeface="Arial" pitchFamily="34" charset="0"/>
-                <a:ea typeface="Arial" pitchFamily="34" charset="-122"/>
-                <a:cs typeface="Arial" pitchFamily="34" charset="-120"/>
-              </a:rPr>
-              <a:t> — "from 9" · 9 − 4 = </a:t>
-            </a:r>
-            <a:pPr algn="l" indent="0" marL="0">
-              <a:lnSpc>
-                <a:spcPts val="1620"/>
-              </a:lnSpc>
-              <a:spcAft>
-                <a:spcPts val="300"/>
-              </a:spcAft>
-              <a:buNone/>
-            </a:pPr>
-            <a:r>
-              <a:rPr lang="en-US" sz="1200" b="1" dirty="0">
-                <a:solidFill>
-                  <a:srgbClr val="1C2833"/>
-                </a:solidFill>
-                <a:latin typeface="Arial" pitchFamily="34" charset="0"/>
-                <a:ea typeface="Arial" pitchFamily="34" charset="-122"/>
-                <a:cs typeface="Arial" pitchFamily="34" charset="-120"/>
-              </a:rPr>
-              <a:t>5</a:t>
-            </a:r>
-            <a:endParaRPr lang="en-US" sz="1200" dirty="0"/>
-          </a:p>
-          <a:p>
-            <a:pPr algn="l" marL="342900" indent="-342900">
-              <a:lnSpc>
-                <a:spcPts val="1620"/>
-              </a:lnSpc>
-              <a:spcAft>
-                <a:spcPts val="300"/>
-              </a:spcAft>
-              <a:buSzPct val="100000"/>
-              <a:buChar char="•"/>
-            </a:pPr>
-            <a:r>
-              <a:rPr lang="en-US" sz="1200" b="1" dirty="0">
-                <a:solidFill>
-                  <a:srgbClr val="1C2833"/>
-                </a:solidFill>
-                <a:latin typeface="Arial" pitchFamily="34" charset="0"/>
-                <a:ea typeface="Arial" pitchFamily="34" charset="-122"/>
-                <a:cs typeface="Arial" pitchFamily="34" charset="-120"/>
-              </a:rPr>
-              <a:t>Second digit (5):</a:t>
-            </a:r>
-            <a:pPr algn="l" indent="0" marL="0">
-              <a:lnSpc>
-                <a:spcPts val="1620"/>
-              </a:lnSpc>
-              <a:spcAft>
-                <a:spcPts val="300"/>
-              </a:spcAft>
-              <a:buNone/>
-            </a:pPr>
-            <a:r>
-              <a:rPr lang="en-US" sz="1200" dirty="0">
-                <a:solidFill>
-                  <a:srgbClr val="1C2833"/>
-                </a:solidFill>
-                <a:latin typeface="Arial" pitchFamily="34" charset="0"/>
-                <a:ea typeface="Arial" pitchFamily="34" charset="-122"/>
-                <a:cs typeface="Arial" pitchFamily="34" charset="-120"/>
-              </a:rPr>
-              <a:t> — "from 9" · 9 − 5 = </a:t>
-            </a:r>
-            <a:pPr algn="l" indent="0" marL="0">
-              <a:lnSpc>
-                <a:spcPts val="1620"/>
-              </a:lnSpc>
-              <a:spcAft>
-                <a:spcPts val="300"/>
-              </a:spcAft>
-              <a:buNone/>
-            </a:pPr>
-            <a:r>
-              <a:rPr lang="en-US" sz="1200" b="1" dirty="0">
-                <a:solidFill>
-                  <a:srgbClr val="1C2833"/>
-                </a:solidFill>
-                <a:latin typeface="Arial" pitchFamily="34" charset="0"/>
-                <a:ea typeface="Arial" pitchFamily="34" charset="-122"/>
-                <a:cs typeface="Arial" pitchFamily="34" charset="-120"/>
-              </a:rPr>
-              <a:t>4</a:t>
-            </a:r>
-            <a:endParaRPr lang="en-US" sz="1200" dirty="0"/>
-          </a:p>
-          <a:p>
-            <a:pPr algn="l" marL="342900" indent="-342900">
-              <a:lnSpc>
-                <a:spcPts val="1620"/>
-              </a:lnSpc>
-              <a:spcAft>
-                <a:spcPts val="300"/>
-              </a:spcAft>
-              <a:buSzPct val="100000"/>
-              <a:buChar char="•"/>
-            </a:pPr>
-            <a:r>
-              <a:rPr lang="en-US" sz="1200" b="1" dirty="0">
-                <a:solidFill>
-                  <a:srgbClr val="1C2833"/>
-                </a:solidFill>
-                <a:latin typeface="Arial" pitchFamily="34" charset="0"/>
-                <a:ea typeface="Arial" pitchFamily="34" charset="-122"/>
-                <a:cs typeface="Arial" pitchFamily="34" charset="-120"/>
-              </a:rPr>
-              <a:t>Third digit (6):</a:t>
-            </a:r>
-            <a:pPr algn="l" indent="0" marL="0">
-              <a:lnSpc>
-                <a:spcPts val="1620"/>
-              </a:lnSpc>
-              <a:spcAft>
-                <a:spcPts val="300"/>
-              </a:spcAft>
-              <a:buNone/>
-            </a:pPr>
-            <a:r>
-              <a:rPr lang="en-US" sz="1200" dirty="0">
-                <a:solidFill>
-                  <a:srgbClr val="1C2833"/>
-                </a:solidFill>
-                <a:latin typeface="Arial" pitchFamily="34" charset="0"/>
-                <a:ea typeface="Arial" pitchFamily="34" charset="-122"/>
-                <a:cs typeface="Arial" pitchFamily="34" charset="-120"/>
-              </a:rPr>
-              <a:t> — "from 9" · 9 − 6 = </a:t>
-            </a:r>
-            <a:pPr algn="l" indent="0" marL="0">
-              <a:lnSpc>
-                <a:spcPts val="1620"/>
-              </a:lnSpc>
-              <a:spcAft>
-                <a:spcPts val="300"/>
-              </a:spcAft>
-              <a:buNone/>
-            </a:pPr>
-            <a:r>
-              <a:rPr lang="en-US" sz="1200" b="1" dirty="0">
-                <a:solidFill>
-                  <a:srgbClr val="1C2833"/>
-                </a:solidFill>
-                <a:latin typeface="Arial" pitchFamily="34" charset="0"/>
-                <a:ea typeface="Arial" pitchFamily="34" charset="-122"/>
-                <a:cs typeface="Arial" pitchFamily="34" charset="-120"/>
-              </a:rPr>
-              <a:t>3</a:t>
-            </a:r>
-            <a:endParaRPr lang="en-US" sz="1200" dirty="0"/>
-          </a:p>
-          <a:p>
-            <a:pPr algn="l" marL="342900" indent="-342900">
-              <a:lnSpc>
-                <a:spcPts val="1620"/>
-              </a:lnSpc>
-              <a:spcAft>
-                <a:spcPts val="300"/>
-              </a:spcAft>
-              <a:buSzPct val="100000"/>
-              <a:buChar char="•"/>
-            </a:pPr>
-            <a:r>
-              <a:rPr lang="en-US" sz="1200" b="1" dirty="0">
-                <a:solidFill>
-                  <a:srgbClr val="1C2833"/>
-                </a:solidFill>
-                <a:latin typeface="Arial" pitchFamily="34" charset="0"/>
-                <a:ea typeface="Arial" pitchFamily="34" charset="-122"/>
-                <a:cs typeface="Arial" pitchFamily="34" charset="-120"/>
-              </a:rPr>
-              <a:t>Last digit (7):</a:t>
-            </a:r>
-            <a:pPr algn="l" indent="0" marL="0">
-              <a:lnSpc>
-                <a:spcPts val="1620"/>
-              </a:lnSpc>
-              <a:spcAft>
-                <a:spcPts val="300"/>
-              </a:spcAft>
-              <a:buNone/>
-            </a:pPr>
-            <a:r>
-              <a:rPr lang="en-US" sz="1200" dirty="0">
-                <a:solidFill>
-                  <a:srgbClr val="1C2833"/>
-                </a:solidFill>
-                <a:latin typeface="Arial" pitchFamily="34" charset="0"/>
-                <a:ea typeface="Arial" pitchFamily="34" charset="-122"/>
-                <a:cs typeface="Arial" pitchFamily="34" charset="-120"/>
-              </a:rPr>
-              <a:t> — "from 10" · 10 − 7 = </a:t>
-            </a:r>
-            <a:pPr algn="l" indent="0" marL="0">
-              <a:lnSpc>
-                <a:spcPts val="1620"/>
-              </a:lnSpc>
-              <a:spcAft>
-                <a:spcPts val="300"/>
-              </a:spcAft>
-              <a:buNone/>
-            </a:pPr>
-            <a:r>
-              <a:rPr lang="en-US" sz="1200" b="1" dirty="0">
-                <a:solidFill>
-                  <a:srgbClr val="1C2833"/>
-                </a:solidFill>
-                <a:latin typeface="Arial" pitchFamily="34" charset="0"/>
-                <a:ea typeface="Arial" pitchFamily="34" charset="-122"/>
-                <a:cs typeface="Arial" pitchFamily="34" charset="-120"/>
-              </a:rPr>
-              <a:t>3</a:t>
-            </a:r>
-            <a:endParaRPr lang="en-US" sz="1200" dirty="0"/>
-          </a:p>
-        </p:txBody>
-      </p:sp>
-      <p:sp>
-        <p:nvSpPr>
-          <p:cNvPr id="14" name="Text 12"/>
-          <p:cNvSpPr/>
-          <p:nvPr/>
-        </p:nvSpPr>
-        <p:spPr>
-          <a:xfrm>
-            <a:off x="634901" y="4647307"/>
-            <a:ext cx="8102798" cy="281880"/>
-          </a:xfrm>
-          <a:prstGeom prst="rect">
-            <a:avLst/>
-          </a:prstGeom>
-          <a:noFill/>
-          <a:ln/>
-        </p:spPr>
-        <p:txBody>
-          <a:bodyPr wrap="square" lIns="0" tIns="0" rIns="0" bIns="0" rtlCol="0" anchor="t"/>
-          <a:lstStyle/>
-          <a:p>
-            <a:pPr algn="l" marL="342900" indent="-342900">
-              <a:lnSpc>
-                <a:spcPts val="1620"/>
-              </a:lnSpc>
-              <a:spcAft>
-                <a:spcPts val="300"/>
-              </a:spcAft>
-              <a:buSzPct val="100000"/>
-              <a:buChar char="•"/>
-            </a:pPr>
-            <a:r>
-              <a:rPr lang="en-US" sz="1200" dirty="0">
-                <a:solidFill>
-                  <a:srgbClr val="1C2833"/>
-                </a:solidFill>
-                <a:latin typeface="Arial" pitchFamily="34" charset="0"/>
-                <a:ea typeface="Arial" pitchFamily="34" charset="-122"/>
-                <a:cs typeface="Arial" pitchFamily="34" charset="-120"/>
-              </a:rPr>
-              <a:t>Read the answer top-to-bottom: </a:t>
-            </a:r>
-            <a:pPr algn="l" indent="0" marL="0">
-              <a:lnSpc>
-                <a:spcPts val="1620"/>
-              </a:lnSpc>
-              <a:spcAft>
-                <a:spcPts val="300"/>
-              </a:spcAft>
-              <a:buNone/>
-            </a:pPr>
-            <a:r>
-              <a:rPr lang="en-US" sz="1200" b="1" dirty="0">
-                <a:solidFill>
-                  <a:srgbClr val="1C2833"/>
-                </a:solidFill>
-                <a:latin typeface="Arial" pitchFamily="34" charset="0"/>
-                <a:ea typeface="Arial" pitchFamily="34" charset="-122"/>
-                <a:cs typeface="Arial" pitchFamily="34" charset="-120"/>
-              </a:rPr>
-              <a:t>5433</a:t>
-            </a:r>
-            <a:pPr algn="l" indent="0" marL="0">
-              <a:lnSpc>
-                <a:spcPts val="1620"/>
-              </a:lnSpc>
-              <a:spcAft>
-                <a:spcPts val="300"/>
-              </a:spcAft>
-              <a:buNone/>
-            </a:pPr>
-            <a:r>
-              <a:rPr lang="en-US" sz="1200" dirty="0">
-                <a:solidFill>
-                  <a:srgbClr val="1C2833"/>
-                </a:solidFill>
-                <a:latin typeface="Arial" pitchFamily="34" charset="0"/>
-                <a:ea typeface="Arial" pitchFamily="34" charset="-122"/>
-                <a:cs typeface="Arial" pitchFamily="34" charset="-120"/>
-              </a:rPr>
-              <a:t>.</a:t>
-            </a:r>
-            <a:endParaRPr lang="en-US" sz="1200" dirty="0"/>
-          </a:p>
-        </p:txBody>
-      </p:sp>
-      <p:sp>
-        <p:nvSpPr>
-          <p:cNvPr id="15" name="Text 13"/>
-          <p:cNvSpPr/>
-          <p:nvPr/>
-        </p:nvSpPr>
-        <p:spPr>
-          <a:xfrm>
-            <a:off x="634901" y="5030688"/>
-            <a:ext cx="8102798" cy="281880"/>
-          </a:xfrm>
-          <a:prstGeom prst="rect">
-            <a:avLst/>
-          </a:prstGeom>
-          <a:noFill/>
-          <a:ln/>
-        </p:spPr>
-        <p:txBody>
-          <a:bodyPr wrap="square" lIns="0" tIns="0" rIns="0" bIns="0" rtlCol="0" anchor="t"/>
-          <a:lstStyle/>
-          <a:p>
-            <a:pPr algn="l" marL="342900" indent="-342900">
-              <a:lnSpc>
-                <a:spcPts val="1620"/>
-              </a:lnSpc>
-              <a:spcAft>
-                <a:spcPts val="300"/>
-              </a:spcAft>
-              <a:buSzPct val="100000"/>
-              <a:buChar char="•"/>
-            </a:pPr>
-            <a:r>
-              <a:rPr lang="en-US" sz="1200" b="1" dirty="0">
-                <a:solidFill>
-                  <a:srgbClr val="1C2833"/>
-                </a:solidFill>
-                <a:latin typeface="Arial" pitchFamily="34" charset="0"/>
-                <a:ea typeface="Arial" pitchFamily="34" charset="-122"/>
-                <a:cs typeface="Arial" pitchFamily="34" charset="-120"/>
-              </a:rPr>
-              <a:t>Verify</a:t>
-            </a:r>
-            <a:pPr algn="l" indent="0" marL="0">
-              <a:lnSpc>
-                <a:spcPts val="1620"/>
-              </a:lnSpc>
-              <a:spcAft>
-                <a:spcPts val="300"/>
-              </a:spcAft>
-              <a:buNone/>
-            </a:pPr>
-            <a:r>
-              <a:rPr lang="en-US" sz="1200" dirty="0">
-                <a:solidFill>
-                  <a:srgbClr val="1C2833"/>
-                </a:solidFill>
-                <a:latin typeface="Arial" pitchFamily="34" charset="0"/>
-                <a:ea typeface="Arial" pitchFamily="34" charset="-122"/>
-                <a:cs typeface="Arial" pitchFamily="34" charset="-120"/>
-              </a:rPr>
-              <a:t> (with the class): 4567 + 5433 = 10 000. ✓</a:t>
-            </a:r>
-            <a:endParaRPr lang="en-US" sz="1200" dirty="0"/>
-          </a:p>
-        </p:txBody>
-      </p:sp>
-      <p:sp>
-        <p:nvSpPr>
-          <p:cNvPr id="16" name="Text 14"/>
-          <p:cNvSpPr/>
-          <p:nvPr/>
-        </p:nvSpPr>
-        <p:spPr>
-          <a:xfrm>
-            <a:off x="634901" y="5414070"/>
-            <a:ext cx="8102798" cy="487561"/>
-          </a:xfrm>
-          <a:prstGeom prst="rect">
-            <a:avLst/>
-          </a:prstGeom>
-          <a:noFill/>
-          <a:ln/>
-        </p:spPr>
-        <p:txBody>
-          <a:bodyPr wrap="square" lIns="0" tIns="0" rIns="0" bIns="0" rtlCol="0" anchor="t"/>
-          <a:lstStyle/>
-          <a:p>
-            <a:pPr algn="l" marL="342900" indent="-342900">
-              <a:lnSpc>
-                <a:spcPts val="1620"/>
-              </a:lnSpc>
-              <a:spcAft>
-                <a:spcPts val="300"/>
-              </a:spcAft>
-              <a:buSzPct val="100000"/>
-              <a:buChar char="•"/>
-            </a:pPr>
-            <a:r>
-              <a:rPr lang="en-US" sz="1200" i="1" dirty="0">
-                <a:solidFill>
-                  <a:srgbClr val="1C2833"/>
-                </a:solidFill>
-                <a:latin typeface="Arial" pitchFamily="34" charset="0"/>
-                <a:ea typeface="Arial" pitchFamily="34" charset="-122"/>
-                <a:cs typeface="Arial" pitchFamily="34" charset="-120"/>
-              </a:rPr>
-              <a:t>"Notice — I never borrowed. Not once. The 'all from nine' rule means we're always subtracting from 9, which is bigger than any single digit."</a:t>
-            </a:r>
-            <a:endParaRPr lang="en-US" sz="1200" dirty="0"/>
-          </a:p>
-        </p:txBody>
-      </p:sp>
-      <p:sp>
-        <p:nvSpPr>
-          <p:cNvPr id="17" name="Text 15"/>
-          <p:cNvSpPr/>
-          <p:nvPr/>
-        </p:nvSpPr>
-        <p:spPr>
-          <a:xfrm>
-            <a:off x="406301" y="6066681"/>
+          <p:cNvPr id="9" name="Text 7"/>
+          <p:cNvSpPr/>
+          <p:nvPr/>
+        </p:nvSpPr>
+        <p:spPr>
+          <a:xfrm>
+            <a:off x="406301" y="4434929"/>
             <a:ext cx="8498026" cy="213271"/>
           </a:xfrm>
           <a:prstGeom prst="rect">
@@ -7305,7 +8678,7 @@
         <p:spPr>
           <a:xfrm>
             <a:off x="406301" y="457051"/>
-            <a:ext cx="8498026" cy="274290"/>
+            <a:ext cx="8498026" cy="548580"/>
           </a:xfrm>
           <a:prstGeom prst="rect">
             <a:avLst/>
@@ -7338,7 +8711,7 @@
                 <a:ea typeface="Georgia" pitchFamily="34" charset="-122"/>
                 <a:cs typeface="Georgia" pitchFamily="34" charset="-120"/>
               </a:rPr>
-              <a:t>Activity (10 min) — First try</a:t>
+              <a:t>Teacher demonstration (12 min) — the same baseline problem, the Nikhilam way</a:t>
             </a:r>
             <a:endParaRPr lang="en-US" sz="1800" dirty="0"/>
           </a:p>
@@ -7352,8 +8725,8 @@
         </p:nvSpPr>
         <p:spPr>
           <a:xfrm>
-            <a:off x="406301" y="870942"/>
-            <a:ext cx="8498026" cy="649337"/>
+            <a:off x="406301" y="1145232"/>
+            <a:ext cx="8498026" cy="213271"/>
           </a:xfrm>
           <a:prstGeom prst="rect">
             <a:avLst/>
@@ -7386,8 +8759,212 @@
                 <a:ea typeface="Arial" pitchFamily="34" charset="-122"/>
                 <a:cs typeface="Arial" pitchFamily="34" charset="-120"/>
               </a:rPr>
-              <a:t>– Students re-do the same problem (</a:t>
-            </a:r>
+              <a:t>Write on the board:</a:t>
+            </a:r>
+            <a:endParaRPr lang="en-US" sz="1200" dirty="0"/>
+          </a:p>
+        </p:txBody>
+      </p:sp>
+      <p:sp>
+        <p:nvSpPr>
+          <p:cNvPr id="5" name="Text 3"/>
+          <p:cNvSpPr/>
+          <p:nvPr/>
+        </p:nvSpPr>
+        <p:spPr>
+          <a:xfrm>
+            <a:off x="406301" y="1447354"/>
+            <a:ext cx="8331398" cy="777627"/>
+          </a:xfrm>
+          <a:prstGeom prst="rect">
+            <a:avLst/>
+          </a:prstGeom>
+          <a:solidFill>
+            <a:srgbClr val="F4F8F9"/>
+          </a:solidFill>
+          <a:ln/>
+        </p:spPr>
+        <p:txBody>
+          <a:bodyPr wrap="square" rtlCol="0" anchor="ctr"/>
+          <a:lstStyle/>
+          <a:p>
+            <a:pPr indent="0" marL="0">
+              <a:buNone/>
+            </a:pPr>
+            <a:endParaRPr lang="en-US" dirty="0"/>
+          </a:p>
+        </p:txBody>
+      </p:sp>
+      <p:sp>
+        <p:nvSpPr>
+          <p:cNvPr id="6" name="Shape 4"/>
+          <p:cNvSpPr/>
+          <p:nvPr/>
+        </p:nvSpPr>
+        <p:spPr>
+          <a:xfrm>
+            <a:off x="430113" y="1447354"/>
+            <a:ext cx="0" cy="777627"/>
+          </a:xfrm>
+          <a:prstGeom prst="line">
+            <a:avLst/>
+          </a:prstGeom>
+          <a:noFill/>
+          <a:ln w="47625">
+            <a:solidFill>
+              <a:srgbClr val="277884"/>
+            </a:solidFill>
+            <a:prstDash val="solid"/>
+          </a:ln>
+        </p:spPr>
+      </p:sp>
+      <p:sp>
+        <p:nvSpPr>
+          <p:cNvPr id="7" name="Text 5"/>
+          <p:cNvSpPr/>
+          <p:nvPr/>
+        </p:nvSpPr>
+        <p:spPr>
+          <a:xfrm>
+            <a:off x="631627" y="1574304"/>
+            <a:ext cx="8086939" cy="174575"/>
+          </a:xfrm>
+          <a:prstGeom prst="rect">
+            <a:avLst/>
+          </a:prstGeom>
+          <a:noFill/>
+          <a:ln/>
+        </p:spPr>
+        <p:txBody>
+          <a:bodyPr wrap="square" lIns="0" tIns="0" rIns="0" bIns="0" rtlCol="0" anchor="t"/>
+          <a:lstStyle/>
+          <a:p>
+            <a:pPr algn="l" indent="0" marL="0">
+              <a:lnSpc>
+                <a:spcPts val="1375"/>
+              </a:lnSpc>
+              <a:buNone/>
+            </a:pPr>
+            <a:r>
+              <a:rPr lang="en-US" sz="1100" dirty="0">
+                <a:solidFill>
+                  <a:srgbClr val="1C2833"/>
+                </a:solidFill>
+                <a:latin typeface="Courier New" pitchFamily="34" charset="0"/>
+                <a:ea typeface="Courier New" pitchFamily="34" charset="-122"/>
+                <a:cs typeface="Courier New" pitchFamily="34" charset="-120"/>
+              </a:rPr>
+              <a:t>1 0 0 0 0</a:t>
+            </a:r>
+            <a:endParaRPr lang="en-US" sz="1100" dirty="0"/>
+          </a:p>
+        </p:txBody>
+      </p:sp>
+      <p:sp>
+        <p:nvSpPr>
+          <p:cNvPr id="8" name="Text 6"/>
+          <p:cNvSpPr/>
+          <p:nvPr/>
+        </p:nvSpPr>
+        <p:spPr>
+          <a:xfrm>
+            <a:off x="631627" y="1748879"/>
+            <a:ext cx="8086939" cy="174575"/>
+          </a:xfrm>
+          <a:prstGeom prst="rect">
+            <a:avLst/>
+          </a:prstGeom>
+          <a:noFill/>
+          <a:ln/>
+        </p:spPr>
+        <p:txBody>
+          <a:bodyPr wrap="square" lIns="0" tIns="0" rIns="0" bIns="0" rtlCol="0" anchor="t"/>
+          <a:lstStyle/>
+          <a:p>
+            <a:pPr algn="l" indent="0" marL="0">
+              <a:lnSpc>
+                <a:spcPts val="1375"/>
+              </a:lnSpc>
+              <a:buNone/>
+            </a:pPr>
+            <a:r>
+              <a:rPr lang="en-US" sz="1100" dirty="0">
+                <a:solidFill>
+                  <a:srgbClr val="1C2833"/>
+                </a:solidFill>
+                <a:latin typeface="Courier New" pitchFamily="34" charset="0"/>
+                <a:ea typeface="Courier New" pitchFamily="34" charset="-122"/>
+                <a:cs typeface="Courier New" pitchFamily="34" charset="-120"/>
+              </a:rPr>
+              <a:t>−        4 5 6 7</a:t>
+            </a:r>
+            <a:endParaRPr lang="en-US" sz="1100" dirty="0"/>
+          </a:p>
+        </p:txBody>
+      </p:sp>
+      <p:sp>
+        <p:nvSpPr>
+          <p:cNvPr id="9" name="Text 7"/>
+          <p:cNvSpPr/>
+          <p:nvPr/>
+        </p:nvSpPr>
+        <p:spPr>
+          <a:xfrm>
+            <a:off x="631627" y="1923455"/>
+            <a:ext cx="8086939" cy="174575"/>
+          </a:xfrm>
+          <a:prstGeom prst="rect">
+            <a:avLst/>
+          </a:prstGeom>
+          <a:noFill/>
+          <a:ln/>
+        </p:spPr>
+        <p:txBody>
+          <a:bodyPr wrap="square" lIns="0" tIns="0" rIns="0" bIns="0" rtlCol="0" anchor="t"/>
+          <a:lstStyle/>
+          <a:p>
+            <a:pPr algn="l" indent="0" marL="0">
+              <a:lnSpc>
+                <a:spcPts val="1375"/>
+              </a:lnSpc>
+              <a:buNone/>
+            </a:pPr>
+            <a:r>
+              <a:rPr lang="en-US" sz="1100" dirty="0">
+                <a:solidFill>
+                  <a:srgbClr val="1C2833"/>
+                </a:solidFill>
+                <a:latin typeface="Courier New" pitchFamily="34" charset="0"/>
+                <a:ea typeface="Courier New" pitchFamily="34" charset="-122"/>
+                <a:cs typeface="Courier New" pitchFamily="34" charset="-120"/>
+              </a:rPr>
+              <a:t>———————————————</a:t>
+            </a:r>
+            <a:endParaRPr lang="en-US" sz="1100" dirty="0"/>
+          </a:p>
+        </p:txBody>
+      </p:sp>
+      <p:sp>
+        <p:nvSpPr>
+          <p:cNvPr id="10" name="Text 8"/>
+          <p:cNvSpPr/>
+          <p:nvPr/>
+        </p:nvSpPr>
+        <p:spPr>
+          <a:xfrm>
+            <a:off x="406301" y="2313831"/>
+            <a:ext cx="8498026" cy="213271"/>
+          </a:xfrm>
+          <a:prstGeom prst="rect">
+            <a:avLst/>
+          </a:prstGeom>
+          <a:noFill/>
+          <a:ln/>
+        </p:spPr>
+        <p:txBody>
+          <a:bodyPr wrap="square" lIns="0" tIns="0" rIns="0" bIns="0" rtlCol="0" anchor="t"/>
+          <a:lstStyle/>
+          <a:p>
             <a:pPr algn="l" indent="0" marL="0">
               <a:lnSpc>
                 <a:spcPts val="1680"/>
@@ -7409,30 +8986,7 @@
                 <a:ea typeface="Arial" pitchFamily="34" charset="-122"/>
                 <a:cs typeface="Arial" pitchFamily="34" charset="-120"/>
               </a:rPr>
-              <a:t>10 000 − 4567</a:t>
-            </a:r>
-            <a:pPr algn="l" indent="0" marL="0">
-              <a:lnSpc>
-                <a:spcPts val="1680"/>
-              </a:lnSpc>
-              <a:spcBef>
-                <a:spcPts val="300"/>
-              </a:spcBef>
-              <a:spcAft>
-                <a:spcPts val="300"/>
-              </a:spcAft>
-              <a:buNone/>
-            </a:pPr>
-            <a:r>
-              <a:rPr lang="en-US" sz="1200" dirty="0">
-                <a:solidFill>
-                  <a:srgbClr val="1C2833"/>
-                </a:solidFill>
-                <a:latin typeface="Arial" pitchFamily="34" charset="0"/>
-                <a:ea typeface="Arial" pitchFamily="34" charset="-122"/>
-                <a:cs typeface="Arial" pitchFamily="34" charset="-120"/>
-              </a:rPr>
-              <a:t>) on the back of their baseline sheet, using the Nikhilam rule. Refer to the wall poster. – Time themselves again. – Compare: how much slower (or faster) was the Nikhilam method on the FIRST try?</a:t>
+              <a:t>Narrate:</a:t>
             </a:r>
             <a:endParaRPr lang="en-US" sz="1200" dirty="0"/>
           </a:p>
@@ -7440,7 +8994,7 @@
       </p:sp>
       <p:sp>
         <p:nvSpPr>
-          <p:cNvPr id="5" name="Text 3"/>
+          <p:cNvPr id="11" name="Text 9"/>
           <p:cNvSpPr/>
           <p:nvPr/>
         </p:nvSpPr>
